--- a/pptx/MIDTERM_PRESENTATION_v3.pptx
+++ b/pptx/MIDTERM_PRESENTATION_v3.pptx
@@ -360,35 +360,8 @@
           <a:lstStyle/>
           <a:p>
             <a:r>
-              <a:rPr dirty="0" err="1"/>
-              <a:t>LIMEの基本的な仕組みを二値分類の例から説明し、Slide</a:t>
-            </a:r>
-            <a:r>
-              <a:rPr dirty="0"/>
-              <a:t> 6以降で多クラス分類へ話を広げる。今回はFisherの提案手法や実験結果には踏み込まず、研究の出発点を整理する。</a:t>
-            </a:r>
-          </a:p>
-          <a:p>
-            <a:endParaRPr dirty="0"/>
-          </a:p>
-          <a:p>
-            <a:r>
-              <a:rPr dirty="0"/>
-              <a:t>[Sources]</a:t>
-            </a:r>
-          </a:p>
-          <a:p>
-            <a:r>
-              <a:rPr dirty="0"/>
-              <a:t>- https://</a:t>
-            </a:r>
-            <a:r>
-              <a:rPr dirty="0" err="1"/>
-              <a:t>arxiv.org</a:t>
-            </a:r>
-            <a:r>
-              <a:rPr dirty="0"/>
-              <a:t>/abs/1602.04938</a:t>
+              <a:rPr lang="ja-JP" dirty="0"/>
+              <a:t>はじめに、齊藤研究室M1の池亀です。今日は「多クラス分類におけるLIMEの説明方法と課題」というテーマで、修士研究の中間発表をします。よろしくお願いします。</a:t>
             </a:r>
           </a:p>
         </p:txBody>
@@ -465,7 +438,8 @@
           <a:lstStyle/>
           <a:p>
             <a:r>
-              <a:t>実験設定の出典: src/run_ovo_vs_ovr_experiment.py, src/run_blackbox_comparison_experiment.py, src/run_feature_role_experiment.py, src/run_timing_experiment.py</a:t>
+              <a:rPr lang="ja-JP" dirty="0"/>
+              <a:t>実験設定です。データは人工的に生成した多クラスのデータセットを使っています。詳しい設定は表の通りですが、ポイントだけお伝えすると、すべての手法で同じ摂動点・同じ重み付け・同じ説明対象を使って条件を揃えて比較しています。そのうえで、このあと説明する3つの観点、特徴の関連性、忠実度、計算時間を、それぞれ別の実験で測っています。</a:t>
             </a:r>
           </a:p>
         </p:txBody>
@@ -542,7 +516,8 @@
           <a:lstStyle/>
           <a:p>
             <a:r>
-              <a:t>出典: results/challenging_groundtruth_recall.png, challenging_groundtruth_results.csv。真値は各説明点で数値計算したlog(p_A/p_B)の局所勾配。競合特徴数とKを一致させた旧実験とは異なり、弱い密ノイズを含む30次元からTop-5を選ぶ。</a:t>
+              <a:rPr lang="ja-JP" dirty="0"/>
+              <a:t>1つ目の結果です。非線形で、特徴同士に相関があり、ノイズも含むような、やや難しいブラックボックスを使って、各説明点で「AとBの確率比を実際に動かしている、本当に重要な特徴」を、あらかじめ数値計算で正解として求めておきます。そのうえで、各手法が選んだ上位5個の特徴が、その正解と何個一致しているかを再現率として測りました。結果は、One-vs-Restが0.82なのに対して、2クラス通常LIMEが0.913、Contrastiveが0.926と、どちらも大きく上回っています。この差は6つの条件すべてで統計的にも有意でした。2クラスに絞ることで、本当に効いている特徴をより正確に選べている、ということです。</a:t>
             </a:r>
           </a:p>
         </p:txBody>
@@ -619,7 +594,8 @@
           <a:lstStyle/>
           <a:p>
             <a:r>
-              <a:t>出典: results/challenging_groundtruth_fidelity.png。全条件平均はOVR 0.8871、2クラス通常LIME 0.8983、Contrastive 0.9005。20独立BBの対応検定で両方式とも6/6条件有意だが、実用差は約1.1〜1.3ポイント。</a:t>
+              <a:rPr lang="ja-JP" dirty="0"/>
+              <a:t>2つ目は、同じブラックボックスに対して、学習には使っていない未知の摂動点400個を用意して、各手法が作った説明が「AとBどちらが優勢か」を、元のブラックボックスの判定とどれだけ一致させられるかを測ったものです。結果はOne-vs-Restが0.887、2クラス通常LIMEが0.898、Contrastiveが0.901と、こちらも6条件すべてで有意な改善はあるものの、差はだいたい1ポイントほどで、大きな差ではありません。ここで大事なのは、精度が大きく上がったというより、精度を落とさずに、さきほどの関連性の改善が得られている、という点です。</a:t>
             </a:r>
           </a:p>
         </p:txBody>
@@ -696,7 +672,8 @@
           <a:lstStyle/>
           <a:p>
             <a:r>
-              <a:t>出典: results/timing_scaling.png。BB推論と摂動生成は含まない。全クラス対ではなく、Top-1/Top-2の1ペアだけを説明する設定。</a:t>
+              <a:rPr lang="ja-JP" dirty="0"/>
+              <a:t>3つ目は計算時間です。今回の提案は、予測1位と2位の1ペアだけを説明するので、クラスの数が増えても学習するモデルの数は増えません。実際、クラス数が10のとき、One-vs-Restが63.46ミリ秒かかるのに対して、2クラスLIMEとContrastiveはどちらも6.5ミリ秒程度で、約10分の1に抑えられています。</a:t>
             </a:r>
           </a:p>
         </p:txBody>
@@ -773,7 +750,8 @@
           <a:lstStyle/>
           <a:p>
             <a:r>
-              <a:t>一般化範囲は今回の合成データとTop-1/Top-2。実データとユーザ評価は今後の課題として口頭で補足する。</a:t>
+              <a:rPr lang="ja-JP" dirty="0"/>
+              <a:t>まとめです。今回の提案の一番の価値は、Aとその他全部ではなく、実際に競合しているAとBという2つのクラスに対して、直接説明を出せるようになったことだと考えています。しかも、それでいて忠実度は従来のOne-vs-Restより落ちていません。むしろわずかに改善していて、加えて計算時間はクラス数が増えてもほぼ変わらない、という結果になりました。今後の展望としては、まず、この解釈性の向上を「分かりやすくなった」という言葉だけで終わらせず、定量的に測る方法を検討したいと考えています。例えば、人に実際に説明を見てもらって、理解のしやすさを評価してもらう、といった方向です。それ以外にも、今回は人工データでの検証だったので、実データでの検証や、競合するクラスがTop-2以外だったり、入力によって競合クラスが変わったりする場合への対応も、今後の課題として取り組んでいきたいと思います。以上で発表を終わります。ご清聴ありがとうございました。</a:t>
             </a:r>
           </a:p>
         </p:txBody>
@@ -961,6 +939,183 @@
 </p:notes>
 </file>
 
+<file path=ppt/notesSlides/notesSlide17.xml><?xml version="1.0" encoding="utf-8"?>
+<p:notes xmlns:a="http://schemas.openxmlformats.org/drawingml/2006/main" xmlns:r="http://schemas.openxmlformats.org/officeDocument/2006/relationships" xmlns:p="http://schemas.openxmlformats.org/presentationml/2006/main">
+  <p:cSld>
+    <p:spTree>
+      <p:nvGrpSpPr>
+        <p:cNvPr id="1" name=""/>
+        <p:cNvGrpSpPr/>
+        <p:nvPr/>
+      </p:nvGrpSpPr>
+      <p:grpSpPr>
+        <a:xfrm>
+          <a:off x="0" y="0"/>
+          <a:ext cx="0" cy="0"/>
+          <a:chOff x="0" y="0"/>
+          <a:chExt cx="0" cy="0"/>
+        </a:xfrm>
+      </p:grpSpPr>
+      <p:sp>
+        <p:nvSpPr>
+          <p:cNvPr id="2" name="Slide Image Placeholder 1"/>
+          <p:cNvSpPr>
+            <a:spLocks noGrp="1" noRot="1" noChangeAspect="1"/>
+          </p:cNvSpPr>
+          <p:nvPr>
+            <p:ph type="sldImg"/>
+          </p:nvPr>
+        </p:nvSpPr>
+        <p:spPr/>
+      </p:sp>
+      <p:sp>
+        <p:nvSpPr>
+          <p:cNvPr id="3" name="Notes Placeholder 2"/>
+          <p:cNvSpPr>
+            <a:spLocks noGrp="1"/>
+          </p:cNvSpPr>
+          <p:nvPr>
+            <p:ph type="body" idx="1"/>
+          </p:nvPr>
+        </p:nvSpPr>
+        <p:spPr/>
+        <p:txBody>
+          <a:bodyPr/>
+          <a:lstStyle/>
+          <a:p>
+            <a:r>
+              <a:rPr lang="ja-JP" dirty="0"/>
+              <a:t>発表の流れです。まずXAIとLIMEの基本をおさらいしたあと、それを多クラス分類に広げたときに出てくる課題を確認します。そのうえで関連研究を2つ紹介し、今回の提案手法、実験と考察、最後にまとめと今後の展望、という順番で進めます。</a:t>
+            </a:r>
+          </a:p>
+        </p:txBody>
+      </p:sp>
+    </p:spTree>
+  </p:cSld>
+  <p:clrMapOvr>
+    <a:masterClrMapping/>
+  </p:clrMapOvr>
+</p:notes>
+</file>
+
+<file path=ppt/notesSlides/notesSlide18.xml><?xml version="1.0" encoding="utf-8"?>
+<p:notes xmlns:a="http://schemas.openxmlformats.org/drawingml/2006/main" xmlns:r="http://schemas.openxmlformats.org/officeDocument/2006/relationships" xmlns:p="http://schemas.openxmlformats.org/presentationml/2006/main">
+  <p:cSld>
+    <p:spTree>
+      <p:nvGrpSpPr>
+        <p:cNvPr id="1" name=""/>
+        <p:cNvGrpSpPr/>
+        <p:nvPr/>
+      </p:nvGrpSpPr>
+      <p:grpSpPr>
+        <a:xfrm>
+          <a:off x="0" y="0"/>
+          <a:ext cx="0" cy="0"/>
+          <a:chOff x="0" y="0"/>
+          <a:chExt cx="0" cy="0"/>
+        </a:xfrm>
+      </p:grpSpPr>
+      <p:sp>
+        <p:nvSpPr>
+          <p:cNvPr id="2" name="Slide Image Placeholder 1"/>
+          <p:cNvSpPr>
+            <a:spLocks noGrp="1" noRot="1" noChangeAspect="1"/>
+          </p:cNvSpPr>
+          <p:nvPr>
+            <p:ph type="sldImg"/>
+          </p:nvPr>
+        </p:nvSpPr>
+        <p:spPr/>
+      </p:sp>
+      <p:sp>
+        <p:nvSpPr>
+          <p:cNvPr id="3" name="Notes Placeholder 2"/>
+          <p:cNvSpPr>
+            <a:spLocks noGrp="1"/>
+          </p:cNvSpPr>
+          <p:nvPr>
+            <p:ph type="body" idx="1"/>
+          </p:nvPr>
+        </p:nvSpPr>
+        <p:spPr/>
+        <p:txBody>
+          <a:bodyPr/>
+          <a:lstStyle/>
+          <a:p>
+            <a:r>
+              <a:rPr lang="ja-JP" dirty="0"/>
+              <a:t>それでは、代表的なXAI手法の一つであるLIMEについて見ていきます。</a:t>
+            </a:r>
+          </a:p>
+        </p:txBody>
+      </p:sp>
+    </p:spTree>
+  </p:cSld>
+  <p:clrMapOvr>
+    <a:masterClrMapping/>
+  </p:clrMapOvr>
+</p:notes>
+</file>
+
+<file path=ppt/notesSlides/notesSlide19.xml><?xml version="1.0" encoding="utf-8"?>
+<p:notes xmlns:a="http://schemas.openxmlformats.org/drawingml/2006/main" xmlns:r="http://schemas.openxmlformats.org/officeDocument/2006/relationships" xmlns:p="http://schemas.openxmlformats.org/presentationml/2006/main">
+  <p:cSld>
+    <p:spTree>
+      <p:nvGrpSpPr>
+        <p:cNvPr id="1" name=""/>
+        <p:cNvGrpSpPr/>
+        <p:nvPr/>
+      </p:nvGrpSpPr>
+      <p:grpSpPr>
+        <a:xfrm>
+          <a:off x="0" y="0"/>
+          <a:ext cx="0" cy="0"/>
+          <a:chOff x="0" y="0"/>
+          <a:chExt cx="0" cy="0"/>
+        </a:xfrm>
+      </p:grpSpPr>
+      <p:sp>
+        <p:nvSpPr>
+          <p:cNvPr id="2" name="Slide Image Placeholder 1"/>
+          <p:cNvSpPr>
+            <a:spLocks noGrp="1" noRot="1" noChangeAspect="1"/>
+          </p:cNvSpPr>
+          <p:nvPr>
+            <p:ph type="sldImg"/>
+          </p:nvPr>
+        </p:nvSpPr>
+        <p:spPr/>
+      </p:sp>
+      <p:sp>
+        <p:nvSpPr>
+          <p:cNvPr id="3" name="Notes Placeholder 2"/>
+          <p:cNvSpPr>
+            <a:spLocks noGrp="1"/>
+          </p:cNvSpPr>
+          <p:nvPr>
+            <p:ph type="body" idx="1"/>
+          </p:nvPr>
+        </p:nvSpPr>
+        <p:spPr/>
+        <p:txBody>
+          <a:bodyPr/>
+          <a:lstStyle/>
+          <a:p>
+            <a:r>
+              <a:rPr lang="ja-JP" dirty="0"/>
+              <a:t>ここまでは2値分類、つまりクラスが2つの場合の話でした。ここからは、クラスが3つ以上ある多クラス分類にLIMEを広げたときの話に入ります。</a:t>
+            </a:r>
+          </a:p>
+        </p:txBody>
+      </p:sp>
+    </p:spTree>
+  </p:cSld>
+  <p:clrMapOvr>
+    <a:masterClrMapping/>
+  </p:clrMapOvr>
+</p:notes>
+</file>
+
 <file path=ppt/notesSlides/notesSlide2.xml><?xml version="1.0" encoding="utf-8"?>
 <p:notes xmlns:a="http://schemas.openxmlformats.org/drawingml/2006/main" xmlns:r="http://schemas.openxmlformats.org/officeDocument/2006/relationships" xmlns:p="http://schemas.openxmlformats.org/presentationml/2006/main">
   <p:cSld>
@@ -1006,35 +1161,8 @@
           <a:lstStyle/>
           <a:p>
             <a:r>
-              <a:rPr dirty="0" err="1"/>
-              <a:t>XAIはExplainable</a:t>
-            </a:r>
-            <a:r>
-              <a:rPr dirty="0"/>
-              <a:t> Artificial Intelligenceの略。予測値だけでは分からない判断根拠を示し、予測の確認だけでなく、モデルが本質的でない特徴を学んでいないかを調べるデバッグにも役立つ。図の値は実験結果ではなく模式例。</a:t>
-            </a:r>
-          </a:p>
-          <a:p>
-            <a:endParaRPr dirty="0"/>
-          </a:p>
-          <a:p>
-            <a:r>
-              <a:rPr dirty="0"/>
-              <a:t>[Sources]</a:t>
-            </a:r>
-          </a:p>
-          <a:p>
-            <a:r>
-              <a:rPr dirty="0"/>
-              <a:t>- https://</a:t>
-            </a:r>
-            <a:r>
-              <a:rPr dirty="0" err="1"/>
-              <a:t>arxiv.org</a:t>
-            </a:r>
-            <a:r>
-              <a:rPr dirty="0"/>
-              <a:t>/abs/1602.04938</a:t>
+              <a:rPr lang="ja-JP" dirty="0"/>
+              <a:t>まず、なぜXAI、説明可能なAIが必要かという話からです。ニューラルネットワークやランダムフォレストのような複雑なモデルは、精度は高いのですが、「なぜその予測になったのか」を人が理解するのはほぼ不可能です。予測精度と解釈可能性はトレードオフの関係にあると言われていて、医療や金融のように判断の根拠を説明する責任がある現場では、この解釈可能性がとても重要になります。</a:t>
             </a:r>
           </a:p>
         </p:txBody>
@@ -1055,6 +1183,360 @@
           <a:lstStyle/>
           <a:p>
             <a:endParaRPr/>
+          </a:p>
+        </p:txBody>
+      </p:sp>
+    </p:spTree>
+  </p:cSld>
+  <p:clrMapOvr>
+    <a:masterClrMapping/>
+  </p:clrMapOvr>
+</p:notes>
+</file>
+
+<file path=ppt/notesSlides/notesSlide20.xml><?xml version="1.0" encoding="utf-8"?>
+<p:notes xmlns:a="http://schemas.openxmlformats.org/drawingml/2006/main" xmlns:r="http://schemas.openxmlformats.org/officeDocument/2006/relationships" xmlns:p="http://schemas.openxmlformats.org/presentationml/2006/main">
+  <p:cSld>
+    <p:spTree>
+      <p:nvGrpSpPr>
+        <p:cNvPr id="1" name=""/>
+        <p:cNvGrpSpPr/>
+        <p:nvPr/>
+      </p:nvGrpSpPr>
+      <p:grpSpPr>
+        <a:xfrm>
+          <a:off x="0" y="0"/>
+          <a:ext cx="0" cy="0"/>
+          <a:chOff x="0" y="0"/>
+          <a:chExt cx="0" cy="0"/>
+        </a:xfrm>
+      </p:grpSpPr>
+      <p:sp>
+        <p:nvSpPr>
+          <p:cNvPr id="2" name="Slide Image Placeholder 1"/>
+          <p:cNvSpPr>
+            <a:spLocks noGrp="1" noRot="1" noChangeAspect="1"/>
+          </p:cNvSpPr>
+          <p:nvPr>
+            <p:ph type="sldImg"/>
+          </p:nvPr>
+        </p:nvSpPr>
+        <p:spPr/>
+      </p:sp>
+      <p:sp>
+        <p:nvSpPr>
+          <p:cNvPr id="3" name="Notes Placeholder 2"/>
+          <p:cNvSpPr>
+            <a:spLocks noGrp="1"/>
+          </p:cNvSpPr>
+          <p:nvPr>
+            <p:ph type="body" idx="1"/>
+          </p:nvPr>
+        </p:nvSpPr>
+        <p:spPr/>
+        <p:txBody>
+          <a:bodyPr/>
+          <a:lstStyle/>
+          <a:p>
+            <a:r>
+              <a:rPr lang="ja-JP" dirty="0"/>
+              <a:t>この課題に対して、先行研究がどうアプローチしているかを2つ紹介します。</a:t>
+            </a:r>
+          </a:p>
+        </p:txBody>
+      </p:sp>
+    </p:spTree>
+  </p:cSld>
+  <p:clrMapOvr>
+    <a:masterClrMapping/>
+  </p:clrMapOvr>
+</p:notes>
+</file>
+
+<file path=ppt/notesSlides/notesSlide21.xml><?xml version="1.0" encoding="utf-8"?>
+<p:notes xmlns:a="http://schemas.openxmlformats.org/drawingml/2006/main" xmlns:r="http://schemas.openxmlformats.org/officeDocument/2006/relationships" xmlns:p="http://schemas.openxmlformats.org/presentationml/2006/main">
+  <p:cSld>
+    <p:spTree>
+      <p:nvGrpSpPr>
+        <p:cNvPr id="1" name=""/>
+        <p:cNvGrpSpPr/>
+        <p:nvPr/>
+      </p:nvGrpSpPr>
+      <p:grpSpPr>
+        <a:xfrm>
+          <a:off x="0" y="0"/>
+          <a:ext cx="0" cy="0"/>
+          <a:chOff x="0" y="0"/>
+          <a:chExt cx="0" cy="0"/>
+        </a:xfrm>
+      </p:grpSpPr>
+      <p:sp>
+        <p:nvSpPr>
+          <p:cNvPr id="2" name="Slide Image Placeholder 1"/>
+          <p:cNvSpPr>
+            <a:spLocks noGrp="1" noRot="1" noChangeAspect="1"/>
+          </p:cNvSpPr>
+          <p:nvPr>
+            <p:ph type="sldImg"/>
+          </p:nvPr>
+        </p:nvSpPr>
+        <p:spPr/>
+      </p:sp>
+      <p:sp>
+        <p:nvSpPr>
+          <p:cNvPr id="3" name="Notes Placeholder 2"/>
+          <p:cNvSpPr>
+            <a:spLocks noGrp="1"/>
+          </p:cNvSpPr>
+          <p:nvPr>
+            <p:ph type="body" idx="1"/>
+          </p:nvPr>
+        </p:nvSpPr>
+        <p:spPr/>
+        <p:txBody>
+          <a:bodyPr/>
+          <a:lstStyle/>
+          <a:p>
+            <a:r>
+              <a:rPr lang="ja-JP" dirty="0"/>
+              <a:t>2つ目はCLIMAXという研究です。左側にある通り、CLIMAXはブラックボックス分類器を局所的な小さい分類モデルで説明する手法で、対象クラスの対数オッズを回帰するL-CLIMAXと、確率を交差エントロピーで回帰するCE-CLIMAXの2種類があります。下の式にある通り、CLIMAXの比較対象は「クラスA対それ以外全部」で、これはLIMEのone-vs-restと同じ構造です。右側の通り、本研究が活かすのは、確率をそのまま見るのではなく、対数比や交差エントロピーで近似するという当てはめ方です。ただし比較対象は「それ以外全部」ではなく、予測1位・2位という特定の2クラスに絞る、という点が今回の提案の違いになります。</a:t>
+            </a:r>
+          </a:p>
+        </p:txBody>
+      </p:sp>
+    </p:spTree>
+  </p:cSld>
+  <p:clrMapOvr>
+    <a:masterClrMapping/>
+  </p:clrMapOvr>
+</p:notes>
+</file>
+
+<file path=ppt/notesSlides/notesSlide22.xml><?xml version="1.0" encoding="utf-8"?>
+<p:notes xmlns:a="http://schemas.openxmlformats.org/drawingml/2006/main" xmlns:r="http://schemas.openxmlformats.org/officeDocument/2006/relationships" xmlns:p="http://schemas.openxmlformats.org/presentationml/2006/main">
+  <p:cSld>
+    <p:spTree>
+      <p:nvGrpSpPr>
+        <p:cNvPr id="1" name=""/>
+        <p:cNvGrpSpPr/>
+        <p:nvPr/>
+      </p:nvGrpSpPr>
+      <p:grpSpPr>
+        <a:xfrm>
+          <a:off x="0" y="0"/>
+          <a:ext cx="0" cy="0"/>
+          <a:chOff x="0" y="0"/>
+          <a:chExt cx="0" cy="0"/>
+        </a:xfrm>
+      </p:grpSpPr>
+      <p:sp>
+        <p:nvSpPr>
+          <p:cNvPr id="2" name="Slide Image Placeholder 1"/>
+          <p:cNvSpPr>
+            <a:spLocks noGrp="1" noRot="1" noChangeAspect="1"/>
+          </p:cNvSpPr>
+          <p:nvPr>
+            <p:ph type="sldImg"/>
+          </p:nvPr>
+        </p:nvSpPr>
+        <p:spPr/>
+      </p:sp>
+      <p:sp>
+        <p:nvSpPr>
+          <p:cNvPr id="3" name="Notes Placeholder 2"/>
+          <p:cNvSpPr>
+            <a:spLocks noGrp="1"/>
+          </p:cNvSpPr>
+          <p:nvPr>
+            <p:ph type="body" idx="1"/>
+          </p:nvPr>
+        </p:nvSpPr>
+        <p:spPr/>
+        <p:txBody>
+          <a:bodyPr/>
+          <a:lstStyle/>
+          <a:p>
+            <a:r>
+              <a:rPr lang="ja-JP" dirty="0"/>
+              <a:t>それでは、この2つの先行研究を踏まえた、今回の提案手法の話に入ります。</a:t>
+            </a:r>
+          </a:p>
+        </p:txBody>
+      </p:sp>
+    </p:spTree>
+  </p:cSld>
+  <p:clrMapOvr>
+    <a:masterClrMapping/>
+  </p:clrMapOvr>
+</p:notes>
+</file>
+
+<file path=ppt/notesSlides/notesSlide23.xml><?xml version="1.0" encoding="utf-8"?>
+<p:notes xmlns:a="http://schemas.openxmlformats.org/drawingml/2006/main" xmlns:r="http://schemas.openxmlformats.org/officeDocument/2006/relationships" xmlns:p="http://schemas.openxmlformats.org/presentationml/2006/main">
+  <p:cSld>
+    <p:spTree>
+      <p:nvGrpSpPr>
+        <p:cNvPr id="1" name=""/>
+        <p:cNvGrpSpPr/>
+        <p:nvPr/>
+      </p:nvGrpSpPr>
+      <p:grpSpPr>
+        <a:xfrm>
+          <a:off x="0" y="0"/>
+          <a:ext cx="0" cy="0"/>
+          <a:chOff x="0" y="0"/>
+          <a:chExt cx="0" cy="0"/>
+        </a:xfrm>
+      </p:grpSpPr>
+      <p:sp>
+        <p:nvSpPr>
+          <p:cNvPr id="2" name="Slide Image Placeholder 1"/>
+          <p:cNvSpPr>
+            <a:spLocks noGrp="1" noRot="1" noChangeAspect="1"/>
+          </p:cNvSpPr>
+          <p:nvPr>
+            <p:ph type="sldImg"/>
+          </p:nvPr>
+        </p:nvSpPr>
+        <p:spPr/>
+      </p:sp>
+      <p:sp>
+        <p:nvSpPr>
+          <p:cNvPr id="3" name="Notes Placeholder 2"/>
+          <p:cNvSpPr>
+            <a:spLocks noGrp="1"/>
+          </p:cNvSpPr>
+          <p:nvPr>
+            <p:ph type="body" idx="1"/>
+          </p:nvPr>
+        </p:nvSpPr>
+        <p:spPr/>
+        <p:txBody>
+          <a:bodyPr/>
+          <a:lstStyle/>
+          <a:p>
+            <a:r>
+              <a:rPr lang="ja-JP" dirty="0"/>
+              <a:t>提案手法の全体像です。上の段が従来のOne-vs-Rest、下の段が今回の提案です。最初の2ステップ、説明対象を選ぶと近傍サンプルを作るのところは、実は共通のLIMEの仕組みをそのまま使っています。違いが出るのはその先です。One-vs-Restでは、クラスの数だけ各クラスの確率をそれぞれ回帰するので、クラスが増えるとその分だけモデルを作る回数も増えますし、できあがる説明もクラスの数だけバラバラにできます。一方、今回の提案では、まず予測の1位と2位のクラスだけを選び、その2クラスの確率比、あるいは対数比を1回だけ回帰します。特徴選択も1回で済み、最終的にできる説明は「AとBを分ける」という1つの説明だけです。つまり、クラスが増えても回帰する回数は変わらず、説明の数も常に1つ、というのが大きな違いです。</a:t>
+            </a:r>
+          </a:p>
+        </p:txBody>
+      </p:sp>
+    </p:spTree>
+  </p:cSld>
+  <p:clrMapOvr>
+    <a:masterClrMapping/>
+  </p:clrMapOvr>
+</p:notes>
+</file>
+
+<file path=ppt/notesSlides/notesSlide24.xml><?xml version="1.0" encoding="utf-8"?>
+<p:notes xmlns:a="http://schemas.openxmlformats.org/drawingml/2006/main" xmlns:r="http://schemas.openxmlformats.org/officeDocument/2006/relationships" xmlns:p="http://schemas.openxmlformats.org/presentationml/2006/main">
+  <p:cSld>
+    <p:spTree>
+      <p:nvGrpSpPr>
+        <p:cNvPr id="1" name=""/>
+        <p:cNvGrpSpPr/>
+        <p:nvPr/>
+      </p:nvGrpSpPr>
+      <p:grpSpPr>
+        <a:xfrm>
+          <a:off x="0" y="0"/>
+          <a:ext cx="0" cy="0"/>
+          <a:chOff x="0" y="0"/>
+          <a:chExt cx="0" cy="0"/>
+        </a:xfrm>
+      </p:grpSpPr>
+      <p:sp>
+        <p:nvSpPr>
+          <p:cNvPr id="2" name="Slide Image Placeholder 1"/>
+          <p:cNvSpPr>
+            <a:spLocks noGrp="1" noRot="1" noChangeAspect="1"/>
+          </p:cNvSpPr>
+          <p:nvPr>
+            <p:ph type="sldImg"/>
+          </p:nvPr>
+        </p:nvSpPr>
+        <p:spPr/>
+      </p:sp>
+      <p:sp>
+        <p:nvSpPr>
+          <p:cNvPr id="3" name="Notes Placeholder 2"/>
+          <p:cNvSpPr>
+            <a:spLocks noGrp="1"/>
+          </p:cNvSpPr>
+          <p:nvPr>
+            <p:ph type="body" idx="1"/>
+          </p:nvPr>
+        </p:nvSpPr>
+        <p:spPr/>
+        <p:txBody>
+          <a:bodyPr/>
+          <a:lstStyle/>
+          <a:p>
+            <a:r>
+              <a:rPr lang="ja-JP" dirty="0"/>
+              <a:t>それでは、実際にこの3つの方式を比較した実験の設定と結果を見ていきます。</a:t>
+            </a:r>
+          </a:p>
+        </p:txBody>
+      </p:sp>
+    </p:spTree>
+  </p:cSld>
+  <p:clrMapOvr>
+    <a:masterClrMapping/>
+  </p:clrMapOvr>
+</p:notes>
+</file>
+
+<file path=ppt/notesSlides/notesSlide25.xml><?xml version="1.0" encoding="utf-8"?>
+<p:notes xmlns:a="http://schemas.openxmlformats.org/drawingml/2006/main" xmlns:r="http://schemas.openxmlformats.org/officeDocument/2006/relationships" xmlns:p="http://schemas.openxmlformats.org/presentationml/2006/main">
+  <p:cSld>
+    <p:spTree>
+      <p:nvGrpSpPr>
+        <p:cNvPr id="1" name=""/>
+        <p:cNvGrpSpPr/>
+        <p:nvPr/>
+      </p:nvGrpSpPr>
+      <p:grpSpPr>
+        <a:xfrm>
+          <a:off x="0" y="0"/>
+          <a:ext cx="0" cy="0"/>
+          <a:chOff x="0" y="0"/>
+          <a:chExt cx="0" cy="0"/>
+        </a:xfrm>
+      </p:grpSpPr>
+      <p:sp>
+        <p:nvSpPr>
+          <p:cNvPr id="2" name="Slide Image Placeholder 1"/>
+          <p:cNvSpPr>
+            <a:spLocks noGrp="1" noRot="1" noChangeAspect="1"/>
+          </p:cNvSpPr>
+          <p:nvPr>
+            <p:ph type="sldImg"/>
+          </p:nvPr>
+        </p:nvSpPr>
+        <p:spPr/>
+      </p:sp>
+      <p:sp>
+        <p:nvSpPr>
+          <p:cNvPr id="3" name="Notes Placeholder 2"/>
+          <p:cNvSpPr>
+            <a:spLocks noGrp="1"/>
+          </p:cNvSpPr>
+          <p:nvPr>
+            <p:ph type="body" idx="1"/>
+          </p:nvPr>
+        </p:nvSpPr>
+        <p:spPr/>
+        <p:txBody>
+          <a:bodyPr/>
+          <a:lstStyle/>
+          <a:p>
+            <a:r>
+              <a:rPr lang="ja-JP" dirty="0"/>
+              <a:t>最後に、これまでの結果を踏まえたまとめと、今後の展望をお話しします。</a:t>
+            </a:r>
           </a:p>
         </p:txBody>
       </p:sp>
@@ -1129,35 +1611,8 @@
           <a:lstStyle/>
           <a:p>
             <a:r>
-              <a:rPr dirty="0" err="1"/>
-              <a:t>XAIはExplainable</a:t>
-            </a:r>
-            <a:r>
-              <a:rPr dirty="0"/>
-              <a:t> Artificial Intelligenceの略。予測値だけでは分からない判断根拠を示し、予測の確認だけでなく、モデルが本質的でない特徴を学んでいないかを調べるデバッグにも役立つ。図の値は実験結果ではなく模式例。</a:t>
-            </a:r>
-          </a:p>
-          <a:p>
-            <a:endParaRPr dirty="0"/>
-          </a:p>
-          <a:p>
-            <a:r>
-              <a:rPr dirty="0"/>
-              <a:t>[Sources]</a:t>
-            </a:r>
-          </a:p>
-          <a:p>
-            <a:r>
-              <a:rPr dirty="0"/>
-              <a:t>- https://</a:t>
-            </a:r>
-            <a:r>
-              <a:rPr dirty="0" err="1"/>
-              <a:t>arxiv.org</a:t>
-            </a:r>
-            <a:r>
-              <a:rPr dirty="0"/>
-              <a:t>/abs/1602.04938</a:t>
+              <a:rPr lang="ja-JP" dirty="0"/>
+              <a:t>XAIは、このブラックボックスの中身を覗かずに、「なぜその判断に至ったのか」を後から説明するための技術です。使い道は大きく2つあって、1つは予測の理由を人に見せて納得してもらうこと、もう1つはモデルが誤った学習をしていないかをチェックするデバッグです。有名な例として、ハスキー犬と狼を見分けるモデルが、実は犬自体ではなく背景の雪を見て判断していた、という話があります。精度は高くても、モデルが本質的でない特徴を学習してしまっていた例で、XAIがあればこうした誤学習にも気づくことができます。</a:t>
             </a:r>
           </a:p>
         </p:txBody>
@@ -1314,7 +1769,10 @@
           <a:bodyPr/>
           <a:lstStyle/>
           <a:p>
-            <a:endParaRPr/>
+            <a:r>
+              <a:rPr lang="ja-JP" dirty="0"/>
+              <a:t>LIMEは、Local Interpretable Model-agnostic Explanationsの略で、モデルの中身を見ずに、入力と出力の対応関係だけから説明を作る手法です。ポイントは「局所的」というところで、複雑なモデル全体を一つの単純なモデルに置き換えるのではなく、説明したい1点の周りだけを、単純な直線のようなモデル、サロゲートモデルで近似します。狭い範囲に限れば、複雑な曲線も直線でだいたい近似できる、というイメージです。</a:t>
+            </a:r>
           </a:p>
         </p:txBody>
       </p:sp>
@@ -1371,53 +1829,8 @@
           <a:lstStyle/>
           <a:p>
             <a:r>
-              <a:rPr dirty="0"/>
-              <a:t>1件の入力を選び、周辺に人工サンプルを生成し、ブラックボックスの予測を取得する。元の入力に近いサンプルほど強く重み付けし、少数の特徴を使う局所モデルを学習する。目的関数の第1項は局所的な予測のずれ、第2項は説明モデルの複雑さを表す。</a:t>
-            </a:r>
-          </a:p>
-          <a:p>
-            <a:endParaRPr dirty="0"/>
-          </a:p>
-          <a:p>
-            <a:r>
-              <a:rPr dirty="0"/>
-              <a:t>[Sources]</a:t>
-            </a:r>
-          </a:p>
-          <a:p>
-            <a:r>
-              <a:rPr dirty="0"/>
-              <a:t>- https://</a:t>
-            </a:r>
-            <a:r>
-              <a:rPr dirty="0" err="1"/>
-              <a:t>arxiv.org</a:t>
-            </a:r>
-            <a:r>
-              <a:rPr dirty="0"/>
-              <a:t>/abs/1602.04938</a:t>
-            </a:r>
-          </a:p>
-          <a:p>
-            <a:r>
-              <a:rPr dirty="0"/>
-              <a:t>- https://</a:t>
-            </a:r>
-            <a:r>
-              <a:rPr dirty="0" err="1"/>
-              <a:t>github.com</a:t>
-            </a:r>
-            <a:r>
-              <a:rPr dirty="0"/>
-              <a:t>/</a:t>
-            </a:r>
-            <a:r>
-              <a:rPr dirty="0" err="1"/>
-              <a:t>marcotcr</a:t>
-            </a:r>
-            <a:r>
-              <a:rPr dirty="0"/>
-              <a:t>/lime</a:t>
+              <a:rPr lang="ja-JP" dirty="0"/>
+              <a:t>具体的な手順は5つのステップです。まず説明したい入力を1つ選びます。次に、その周りにランダムな摂動を加えたサンプルをたくさん作ります。それぞれのサンプルをブラックボックスモデルに入れて予測を得ます。元の入力に近いサンプルほど強く重み付けをして、最後に、少数の特徴だけを使う単純な局所モデルを学習します。目的関数は2つの項からできていて、1つ目は元のモデルの予測をどれだけ再現できているか、2つ目は使う特徴の数をどれだけ絞れているかという単純さのペナルティです。この2つのバランスを取って学習します。</a:t>
             </a:r>
           </a:p>
         </p:txBody>
@@ -1494,78 +1907,9 @@
           <a:lstStyle/>
           <a:p>
             <a:r>
-              <a:rPr dirty="0"/>
-              <a:t>ここで初めて多クラス分類へ広げる。one-vs-restは各クラスについて、そのクラス対その他という二値問題を作る代表的な多クラス化戦略。LIMEも多クラス分類器へ適用できるが、指定したラベルの確率列をクラスごとに別々に近似する。近傍は共有できても、局所モデルと特徴選択は別々になる。</a:t>
-            </a:r>
-          </a:p>
-          <a:p>
-            <a:endParaRPr dirty="0"/>
-          </a:p>
-          <a:p>
-            <a:r>
-              <a:rPr dirty="0"/>
-              <a:t>[Sources]</a:t>
-            </a:r>
-          </a:p>
-          <a:p>
-            <a:r>
-              <a:rPr dirty="0"/>
-              <a:t>- https://</a:t>
-            </a:r>
-            <a:r>
-              <a:rPr dirty="0" err="1"/>
-              <a:t>arxiv.org</a:t>
-            </a:r>
-            <a:r>
-              <a:rPr dirty="0"/>
-              <a:t>/abs/1602.04938</a:t>
-            </a:r>
-          </a:p>
-          <a:p>
-            <a:r>
-              <a:rPr dirty="0"/>
-              <a:t>- https://</a:t>
-            </a:r>
-            <a:r>
-              <a:rPr dirty="0" err="1"/>
-              <a:t>github.com</a:t>
-            </a:r>
-            <a:r>
-              <a:rPr dirty="0"/>
-              <a:t>/</a:t>
-            </a:r>
-            <a:r>
-              <a:rPr dirty="0" err="1"/>
-              <a:t>marcotcr</a:t>
-            </a:r>
-            <a:r>
-              <a:rPr dirty="0"/>
-              <a:t>/lime/blob/master/lime/</a:t>
-            </a:r>
-            <a:r>
-              <a:rPr dirty="0" err="1"/>
-              <a:t>lime_base.py</a:t>
-            </a:r>
-            <a:endParaRPr dirty="0"/>
-          </a:p>
-          <a:p>
-            <a:r>
-              <a:rPr dirty="0"/>
-              <a:t>- https://scikit-</a:t>
-            </a:r>
-            <a:r>
-              <a:rPr dirty="0" err="1"/>
-              <a:t>learn.org</a:t>
-            </a:r>
-            <a:r>
-              <a:rPr dirty="0"/>
-              <a:t>/stable/modules/generated/</a:t>
-            </a:r>
-            <a:r>
-              <a:rPr dirty="0" err="1"/>
-              <a:t>sklearn.multiclass.OneVsRestClassifier.html</a:t>
-            </a:r>
-            <a:endParaRPr dirty="0"/>
+              <a:rPr lang="ja-JP" dirty="0"/>
+              <a:t>クラスが3つ以上ある場合、LIMEをそのまま使うと、one-vs-rest、一対他という考え方で拡張するのが一般的です。つまり、クラスAならA対「A以外すべて」、クラスBならB対「B以外すべて」というように、クラスの数だけ2値分類の問題を作って、それぞれに対して別々の局所モデルを学習します。近傍のサンプル自体は共有できますが、学習される説明モデルと、そこで使われる特徴は、クラスごとにバラバラになります。</a:t>
+            </a:r>
           </a:p>
         </p:txBody>
       </p:sp>
@@ -1641,31 +1985,8 @@
           <a:lstStyle/>
           <a:p>
             <a:r>
-              <a:rPr dirty="0"/>
-              <a:t>クラス別の説明それぞれには意味がある。しかし、クラスごとに選ばれる特徴、順位、符号が異なると、利用者は複数の説明を横断してAとBの違いを組み立てなければならない。ここで問題にしているのは数理的な矛盾ではなく、多クラス全体を読む負担である。</a:t>
-            </a:r>
-          </a:p>
-          <a:p>
-            <a:endParaRPr dirty="0"/>
-          </a:p>
-          <a:p>
-            <a:r>
-              <a:rPr dirty="0"/>
-              <a:t>[Sources]</a:t>
-            </a:r>
-          </a:p>
-          <a:p>
-            <a:r>
-              <a:rPr dirty="0"/>
-              <a:t>- https://</a:t>
-            </a:r>
-            <a:r>
-              <a:rPr dirty="0" err="1"/>
-              <a:t>arxiv.org</a:t>
-            </a:r>
-            <a:r>
-              <a:rPr dirty="0"/>
-              <a:t>/abs/2005.01427</a:t>
+              <a:rPr lang="ja-JP" dirty="0"/>
+              <a:t>ここで問題になるのが、このクラス別の説明を並べるだけだと、全体像がとても読み取りにくいということです。例えば、クラスA・B・Cそれぞれの説明で、使われている特徴も、その重みの符号もバラバラだったとします。すると利用者は、「Aに効いている特徴は分かった。でもAとBを分けている特徴は何？」という疑問に、3つの説明を自分で見比べて答えを組み立てないといけません。これは、どれかの説明が間違っているという話ではなく、クラスをまたいで比較するときの負担が大きい、という問題です。</a:t>
             </a:r>
           </a:p>
         </p:txBody>
@@ -1741,7 +2062,10 @@
           <a:bodyPr/>
           <a:lstStyle/>
           <a:p>
-            <a:endParaRPr kumimoji="1" lang="ja-JP" altLang="en-US"/>
+            <a:r>
+              <a:rPr lang="ja-JP" dirty="0"/>
+              <a:t>1つ目はGANMEXという研究です。左側にある通り、GANMEXはOne-vs-One Attribution、つまり全部のクラスではなく特定の2クラスだけを比較する、という考え方を提案しています。2クラスに絞ることで、両方のクラスに共通する特徴ではなく、その2クラスを区別する特徴に注目できる、というのがポイントです。ただしGANMEXは主に画像分類を対象としていて、GANで比較クラスの画像を生成し、それをattributionの基準にする、という仕組みです。右側の通り、本研究が活かすのはこの「特定の2クラスを比較する」という問いの立て方です。画像やGANには依存せず、LIMEの局所線形モデルを使って、一般の表形式データでOne-vs-One的な説明を作る、というのが今回の方向性です。</a:t>
+            </a:r>
           </a:p>
         </p:txBody>
       </p:sp>
@@ -1839,7 +2163,10 @@
           <a:bodyPr/>
           <a:lstStyle/>
           <a:p>
-            <a:endParaRPr/>
+            <a:r>
+              <a:rPr lang="ja-JP" dirty="0"/>
+              <a:t>この「2クラスに絞る」という部分は共通にして、そこから先の当てはめ方を3通り試しました。1つ目は基準となる2クラスLIMEで、2クラスの確率比qを、そのまま通常のLIMEと同じRidge回帰で学習する、一番シンプルな方法です。2つ目のContrastiveは、回帰する対象を比ではなく対数比 log(p1/p2) に変えたもので、3つ目のOVO Logisticは、損失関数を二乗誤差ではなく交差エントロピーに変えたものです。なぜ2つも追加したのかというと、2クラスLIMEを基準にして、Contrastiveでは何を回帰するかを、OVO Logisticではどんな損失で学習するかを、それぞれ1か所だけ変えて比較するためです。こうすることで、単に手法を増やしたのではなく、どの工夫がどれだけ効いているかを切り分けて確認できるようにしています。</a:t>
+            </a:r>
           </a:p>
         </p:txBody>
       </p:sp>
@@ -11077,10 +11404,10 @@
       </p:grpSpPr>
       <p:sp>
         <p:nvSpPr>
-          <p:cNvPr id="7" name="テキスト ボックス 6">
-            <a:extLst>
-              <a:ext uri="{FF2B5EF4-FFF2-40B4-BE49-F238E27FC236}">
-                <a16:creationId xmlns:a16="http://schemas.microsoft.com/office/drawing/2014/main" id="{C774CF58-B894-3797-ABAC-CED235C711A7}"/>
+          <p:cNvPr id="9" name="テキスト ボックス 8">
+            <a:extLst>
+              <a:ext uri="{FF2B5EF4-FFF2-40B4-BE49-F238E27FC236}">
+                <a16:creationId xmlns:a16="http://schemas.microsoft.com/office/drawing/2014/main" id="{DE6B293B-66F0-DA79-47F1-1D7250D55922}"/>
               </a:ext>
             </a:extLst>
           </p:cNvPr>
@@ -11089,8 +11416,8 @@
         </p:nvSpPr>
         <p:spPr>
           <a:xfrm>
-            <a:off x="800100" y="1852101"/>
-            <a:ext cx="7551683" cy="1477328"/>
+            <a:off x="0" y="6496050"/>
+            <a:ext cx="7874271" cy="415498"/>
           </a:xfrm>
           <a:prstGeom prst="rect">
             <a:avLst/>
@@ -11104,85 +11431,6 @@
           <a:lstStyle/>
           <a:p>
             <a:r>
-              <a:rPr lang="ja-JP" altLang="ja-JP"/>
-              <a:t>GANMEX</a:t>
-            </a:r>
-            <a:r>
-              <a:rPr lang="en-US" altLang="ja-JP" baseline="30000" dirty="0"/>
-              <a:t>[2]</a:t>
-            </a:r>
-            <a:endParaRPr lang="ja-JP" altLang="ja-JP" baseline="30000"/>
-          </a:p>
-          <a:p>
-            <a:r>
-              <a:rPr lang="ja-JP" altLang="ja-JP"/>
-              <a:t>One-vs-One attributionを提案</a:t>
-            </a:r>
-            <a:endParaRPr lang="en-US" altLang="ja-JP" dirty="0"/>
-          </a:p>
-          <a:p>
-            <a:r>
-              <a:rPr lang="ja-JP" altLang="ja-JP"/>
-              <a:t>特定の2クラスを比較することで</a:t>
-            </a:r>
-            <a:r>
-              <a:rPr lang="ja-JP" altLang="en-US"/>
-              <a:t>，</a:t>
-            </a:r>
-            <a:endParaRPr lang="en-US" altLang="ja-JP" dirty="0"/>
-          </a:p>
-          <a:p>
-            <a:r>
-              <a:rPr lang="ja-JP" altLang="ja-JP"/>
-              <a:t>両クラスに共通する特徴よりも</a:t>
-            </a:r>
-            <a:r>
-              <a:rPr lang="ja-JP" altLang="en-US"/>
-              <a:t>，</a:t>
-            </a:r>
-            <a:r>
-              <a:rPr lang="ja-JP" altLang="ja-JP" b="1"/>
-              <a:t>2クラスを区別する特徴</a:t>
-            </a:r>
-            <a:r>
-              <a:rPr lang="ja-JP" altLang="ja-JP"/>
-              <a:t>へ注目できる</a:t>
-            </a:r>
-          </a:p>
-          <a:p>
-            <a:endParaRPr kumimoji="1" lang="ja-JP" altLang="en-US"/>
-          </a:p>
-        </p:txBody>
-      </p:sp>
-      <p:sp>
-        <p:nvSpPr>
-          <p:cNvPr id="9" name="テキスト ボックス 8">
-            <a:extLst>
-              <a:ext uri="{FF2B5EF4-FFF2-40B4-BE49-F238E27FC236}">
-                <a16:creationId xmlns:a16="http://schemas.microsoft.com/office/drawing/2014/main" id="{DE6B293B-66F0-DA79-47F1-1D7250D55922}"/>
-              </a:ext>
-            </a:extLst>
-          </p:cNvPr>
-          <p:cNvSpPr txBox="1"/>
-          <p:nvPr/>
-        </p:nvSpPr>
-        <p:spPr>
-          <a:xfrm>
-            <a:off x="0" y="6496050"/>
-            <a:ext cx="7874271" cy="415498"/>
-          </a:xfrm>
-          <a:prstGeom prst="rect">
-            <a:avLst/>
-          </a:prstGeom>
-          <a:noFill/>
-        </p:spPr>
-        <p:txBody>
-          <a:bodyPr wrap="none" rtlCol="0">
-            <a:spAutoFit/>
-          </a:bodyPr>
-          <a:lstStyle/>
-          <a:p>
-            <a:r>
               <a:rPr lang="en-US" altLang="ja-JP" sz="1050" dirty="0"/>
               <a:t>[2]</a:t>
             </a:r>
@@ -11206,78 +11454,6 @@
               <a:t>, 2021, pp. 9545–9555.</a:t>
             </a:r>
             <a:endParaRPr kumimoji="1" lang="ja-JP" altLang="en-US" sz="1050"/>
-          </a:p>
-        </p:txBody>
-      </p:sp>
-      <p:sp>
-        <p:nvSpPr>
-          <p:cNvPr id="11" name="テキスト ボックス 10">
-            <a:extLst>
-              <a:ext uri="{FF2B5EF4-FFF2-40B4-BE49-F238E27FC236}">
-                <a16:creationId xmlns:a16="http://schemas.microsoft.com/office/drawing/2014/main" id="{CCD6DEA1-EAE7-43B1-3DCB-F71E13B46BAF}"/>
-              </a:ext>
-            </a:extLst>
-          </p:cNvPr>
-          <p:cNvSpPr txBox="1"/>
-          <p:nvPr/>
-        </p:nvSpPr>
-        <p:spPr>
-          <a:xfrm>
-            <a:off x="819150" y="4040384"/>
-            <a:ext cx="6201569" cy="1754326"/>
-          </a:xfrm>
-          <a:prstGeom prst="rect">
-            <a:avLst/>
-          </a:prstGeom>
-          <a:noFill/>
-        </p:spPr>
-        <p:txBody>
-          <a:bodyPr wrap="none" rtlCol="0">
-            <a:spAutoFit/>
-          </a:bodyPr>
-          <a:lstStyle/>
-          <a:p>
-            <a:r>
-              <a:rPr lang="ja-JP" altLang="ja-JP"/>
-              <a:t>ただしGANMEXは、</a:t>
-            </a:r>
-            <a:endParaRPr lang="en-US" altLang="ja-JP" dirty="0"/>
-          </a:p>
-          <a:p>
-            <a:r>
-              <a:rPr lang="ja-JP" altLang="ja-JP"/>
-              <a:t>主に画像説明を対象とする</a:t>
-            </a:r>
-          </a:p>
-          <a:p>
-            <a:pPr marL="285750" indent="-285750">
-              <a:buFont typeface="Arial" panose="020B0604020202020204" pitchFamily="34" charset="0"/>
-              <a:buChar char="•"/>
-            </a:pPr>
-            <a:r>
-              <a:rPr lang="ja-JP" altLang="ja-JP"/>
-              <a:t>GANで比較対象クラスの画像を生成する</a:t>
-            </a:r>
-          </a:p>
-          <a:p>
-            <a:pPr marL="285750" indent="-285750">
-              <a:buFont typeface="Arial" panose="020B0604020202020204" pitchFamily="34" charset="0"/>
-              <a:buChar char="•"/>
-            </a:pPr>
-            <a:r>
-              <a:rPr lang="ja-JP" altLang="ja-JP"/>
-              <a:t>生成画像をattributionのベースラインにする</a:t>
-            </a:r>
-          </a:p>
-          <a:p>
-            <a:endParaRPr lang="en-US" altLang="ja-JP" b="1" dirty="0"/>
-          </a:p>
-          <a:p>
-            <a:r>
-              <a:rPr lang="ja-JP" altLang="ja-JP" b="1"/>
-              <a:t>LIMEの局所線形モデルによってOne-vs-One説明を作ること</a:t>
-            </a:r>
-            <a:endParaRPr lang="ja-JP" altLang="ja-JP"/>
           </a:p>
         </p:txBody>
       </p:sp>
@@ -11401,6 +11577,384 @@
           </a:prstGeom>
         </p:spPr>
       </p:pic>
+      <p:sp>
+        <p:nvSpPr>
+          <p:cNvPr id="950" name="card-bg"/>
+          <p:cNvSpPr>
+            <a:spLocks noGrp="1"/>
+          </p:cNvSpPr>
+          <p:nvPr/>
+        </p:nvSpPr>
+        <p:spPr>
+          <a:xfrm>
+            <a:off x="700000" y="1250000"/>
+            <a:ext cx="3450000" cy="4700000"/>
+          </a:xfrm>
+          <a:prstGeom prst="roundRect">
+            <a:avLst>
+              <a:gd name="adj" fmla="val 5000"/>
+            </a:avLst>
+          </a:prstGeom>
+          <a:solidFill>
+            <a:srgbClr val="EAF4FB"/>
+          </a:solidFill>
+          <a:ln w="12700">
+            <a:solidFill>
+              <a:srgbClr val="2F6BDE"/>
+            </a:solidFill>
+          </a:ln>
+        </p:spPr>
+        <p:txBody>
+          <a:bodyPr/>
+          <a:lstStyle/>
+          <a:p>
+            <a:endParaRPr lang="ja-JP" altLang="en-US"/>
+          </a:p>
+        </p:txBody>
+      </p:sp>
+      <p:sp>
+        <p:nvSpPr>
+          <p:cNvPr id="951" name="card-header"/>
+          <p:cNvSpPr>
+            <a:spLocks noGrp="1"/>
+          </p:cNvSpPr>
+          <p:nvPr/>
+        </p:nvSpPr>
+        <p:spPr>
+          <a:xfrm>
+            <a:off x="920000" y="1430000"/>
+            <a:ext cx="3010000" cy="380000"/>
+          </a:xfrm>
+          <a:prstGeom prst="rect">
+            <a:avLst/>
+          </a:prstGeom>
+          <a:noFill/>
+          <a:ln w="0">
+            <a:noFill/>
+            <a:prstDash val="solid"/>
+          </a:ln>
+        </p:spPr>
+        <p:txBody>
+          <a:bodyPr lIns="0" tIns="0" rIns="0" bIns="0" anchor="t">
+            <a:noAutofit/>
+          </a:bodyPr>
+          <a:lstStyle/>
+          <a:p>
+            <a:pPr algn="l">
+              <a:buNone/>
+              <a:defRPr sz="1500" b="1">
+                <a:solidFill>
+                  <a:srgbClr val="2F6BDE"/>
+                </a:solidFill>
+                <a:latin typeface="Hiragino Sans"/>
+                <a:ea typeface="Hiragino Sans"/>
+                <a:cs typeface="Hiragino Sans"/>
+              </a:defRPr>
+            </a:pPr>
+            <a:r>
+              <a:rPr sz="1500" b="1">
+                <a:solidFill>
+                  <a:srgbClr val="2F6BDE"/>
+                </a:solidFill>
+                <a:latin typeface="Hiragino Sans"/>
+                <a:ea typeface="Hiragino Sans"/>
+                <a:cs typeface="Hiragino Sans"/>
+              </a:rPr>
+              <a:t>GANMEXが提案したこと</a:t>
+            </a:r>
+          </a:p>
+        </p:txBody>
+      </p:sp>
+      <p:sp>
+        <p:nvSpPr>
+          <p:cNvPr id="952" name="card-bullets"/>
+          <p:cNvSpPr>
+            <a:spLocks noGrp="1"/>
+          </p:cNvSpPr>
+          <p:nvPr/>
+        </p:nvSpPr>
+        <p:spPr>
+          <a:xfrm>
+            <a:off x="920000" y="1900000"/>
+            <a:ext cx="3010000" cy="3850000"/>
+          </a:xfrm>
+          <a:prstGeom prst="rect">
+            <a:avLst/>
+          </a:prstGeom>
+          <a:noFill/>
+          <a:ln w="0">
+            <a:noFill/>
+            <a:prstDash val="solid"/>
+          </a:ln>
+        </p:spPr>
+        <p:txBody>
+          <a:bodyPr lIns="0" tIns="0" rIns="0" bIns="0" anchor="t">
+            <a:noAutofit/>
+          </a:bodyPr>
+          <a:lstStyle/>
+          <a:p>
+            <a:pPr algn="l">
+              <a:buNone/>
+              <a:defRPr sz="1250" b="0">
+                <a:solidFill>
+                  <a:srgbClr val="111827"/>
+                </a:solidFill>
+                <a:latin typeface="Hiragino Sans"/>
+                <a:ea typeface="Hiragino Sans"/>
+                <a:cs typeface="Hiragino Sans"/>
+              </a:defRPr>
+            </a:pPr>
+            <a:r>
+              <a:rPr sz="1250" b="0">
+                <a:solidFill>
+                  <a:srgbClr val="111827"/>
+                </a:solidFill>
+                <a:latin typeface="Hiragino Sans"/>
+                <a:ea typeface="Hiragino Sans"/>
+                <a:cs typeface="Hiragino Sans"/>
+              </a:rPr>
+              <a:t>・One-vs-One Attributionという考え方を提案</a:t>
+            </a:r>
+          </a:p>
+          <a:p>
+            <a:pPr algn="l">
+              <a:buNone/>
+              <a:defRPr sz="1250" b="0">
+                <a:solidFill>
+                  <a:srgbClr val="111827"/>
+                </a:solidFill>
+                <a:latin typeface="Hiragino Sans"/>
+                <a:ea typeface="Hiragino Sans"/>
+                <a:cs typeface="Hiragino Sans"/>
+              </a:defRPr>
+            </a:pPr>
+            <a:r>
+              <a:rPr sz="1250" b="0">
+                <a:solidFill>
+                  <a:srgbClr val="111827"/>
+                </a:solidFill>
+                <a:latin typeface="Hiragino Sans"/>
+                <a:ea typeface="Hiragino Sans"/>
+                <a:cs typeface="Hiragino Sans"/>
+              </a:rPr>
+              <a:t>・特定の2クラスを比較し、共通する特徴より2クラスを区別する特徴に注目する</a:t>
+            </a:r>
+          </a:p>
+          <a:p>
+            <a:pPr algn="l">
+              <a:buNone/>
+              <a:defRPr sz="1250" b="0">
+                <a:solidFill>
+                  <a:srgbClr val="111827"/>
+                </a:solidFill>
+                <a:latin typeface="Hiragino Sans"/>
+                <a:ea typeface="Hiragino Sans"/>
+                <a:cs typeface="Hiragino Sans"/>
+              </a:defRPr>
+            </a:pPr>
+            <a:r>
+              <a:rPr sz="1250" b="0">
+                <a:solidFill>
+                  <a:srgbClr val="111827"/>
+                </a:solidFill>
+                <a:latin typeface="Hiragino Sans"/>
+                <a:ea typeface="Hiragino Sans"/>
+                <a:cs typeface="Hiragino Sans"/>
+              </a:rPr>
+              <a:t>・GANで比較クラスの画像を生成し、attributionの基準にする（画像分類が対象）</a:t>
+            </a:r>
+          </a:p>
+        </p:txBody>
+      </p:sp>
+      <p:sp>
+        <p:nvSpPr>
+          <p:cNvPr id="953" name="card-bg"/>
+          <p:cNvSpPr>
+            <a:spLocks noGrp="1"/>
+          </p:cNvSpPr>
+          <p:nvPr/>
+        </p:nvSpPr>
+        <p:spPr>
+          <a:xfrm>
+            <a:off x="4400000" y="1250000"/>
+            <a:ext cx="3450000" cy="4700000"/>
+          </a:xfrm>
+          <a:prstGeom prst="roundRect">
+            <a:avLst>
+              <a:gd name="adj" fmla="val 5000"/>
+            </a:avLst>
+          </a:prstGeom>
+          <a:solidFill>
+            <a:srgbClr val="D1FAE5"/>
+          </a:solidFill>
+          <a:ln w="12700">
+            <a:solidFill>
+              <a:srgbClr val="2AA876"/>
+            </a:solidFill>
+          </a:ln>
+        </p:spPr>
+        <p:txBody>
+          <a:bodyPr/>
+          <a:lstStyle/>
+          <a:p>
+            <a:endParaRPr lang="ja-JP" altLang="en-US"/>
+          </a:p>
+        </p:txBody>
+      </p:sp>
+      <p:sp>
+        <p:nvSpPr>
+          <p:cNvPr id="954" name="card-header"/>
+          <p:cNvSpPr>
+            <a:spLocks noGrp="1"/>
+          </p:cNvSpPr>
+          <p:nvPr/>
+        </p:nvSpPr>
+        <p:spPr>
+          <a:xfrm>
+            <a:off x="4620000" y="1430000"/>
+            <a:ext cx="3010000" cy="380000"/>
+          </a:xfrm>
+          <a:prstGeom prst="rect">
+            <a:avLst/>
+          </a:prstGeom>
+          <a:noFill/>
+          <a:ln w="0">
+            <a:noFill/>
+            <a:prstDash val="solid"/>
+          </a:ln>
+        </p:spPr>
+        <p:txBody>
+          <a:bodyPr lIns="0" tIns="0" rIns="0" bIns="0" anchor="t">
+            <a:noAutofit/>
+          </a:bodyPr>
+          <a:lstStyle/>
+          <a:p>
+            <a:pPr algn="l">
+              <a:buNone/>
+              <a:defRPr sz="1500" b="1">
+                <a:solidFill>
+                  <a:srgbClr val="2AA876"/>
+                </a:solidFill>
+                <a:latin typeface="Hiragino Sans"/>
+                <a:ea typeface="Hiragino Sans"/>
+                <a:cs typeface="Hiragino Sans"/>
+              </a:defRPr>
+            </a:pPr>
+            <a:r>
+              <a:rPr sz="1500" b="1">
+                <a:solidFill>
+                  <a:srgbClr val="2AA876"/>
+                </a:solidFill>
+                <a:latin typeface="Hiragino Sans"/>
+                <a:ea typeface="Hiragino Sans"/>
+                <a:cs typeface="Hiragino Sans"/>
+              </a:rPr>
+              <a:t>本研究が活かす点</a:t>
+            </a:r>
+          </a:p>
+        </p:txBody>
+      </p:sp>
+      <p:sp>
+        <p:nvSpPr>
+          <p:cNvPr id="955" name="card-bullets"/>
+          <p:cNvSpPr>
+            <a:spLocks noGrp="1"/>
+          </p:cNvSpPr>
+          <p:nvPr/>
+        </p:nvSpPr>
+        <p:spPr>
+          <a:xfrm>
+            <a:off x="4620000" y="1900000"/>
+            <a:ext cx="3010000" cy="3850000"/>
+          </a:xfrm>
+          <a:prstGeom prst="rect">
+            <a:avLst/>
+          </a:prstGeom>
+          <a:noFill/>
+          <a:ln w="0">
+            <a:noFill/>
+            <a:prstDash val="solid"/>
+          </a:ln>
+        </p:spPr>
+        <p:txBody>
+          <a:bodyPr lIns="0" tIns="0" rIns="0" bIns="0" anchor="t">
+            <a:noAutofit/>
+          </a:bodyPr>
+          <a:lstStyle/>
+          <a:p>
+            <a:pPr algn="l">
+              <a:buNone/>
+              <a:defRPr sz="1250" b="0">
+                <a:solidFill>
+                  <a:srgbClr val="111827"/>
+                </a:solidFill>
+                <a:latin typeface="Hiragino Sans"/>
+                <a:ea typeface="Hiragino Sans"/>
+                <a:cs typeface="Hiragino Sans"/>
+              </a:defRPr>
+            </a:pPr>
+            <a:r>
+              <a:rPr sz="1250" b="0">
+                <a:solidFill>
+                  <a:srgbClr val="111827"/>
+                </a:solidFill>
+                <a:latin typeface="Hiragino Sans"/>
+                <a:ea typeface="Hiragino Sans"/>
+                <a:cs typeface="Hiragino Sans"/>
+              </a:rPr>
+              <a:t>・「特定の2クラスを比較する」という問いの立て方を採用</a:t>
+            </a:r>
+          </a:p>
+          <a:p>
+            <a:pPr algn="l">
+              <a:buNone/>
+              <a:defRPr sz="1250" b="0">
+                <a:solidFill>
+                  <a:srgbClr val="111827"/>
+                </a:solidFill>
+                <a:latin typeface="Hiragino Sans"/>
+                <a:ea typeface="Hiragino Sans"/>
+                <a:cs typeface="Hiragino Sans"/>
+              </a:defRPr>
+            </a:pPr>
+            <a:r>
+              <a:rPr sz="1250" b="0">
+                <a:solidFill>
+                  <a:srgbClr val="111827"/>
+                </a:solidFill>
+                <a:latin typeface="Hiragino Sans"/>
+                <a:ea typeface="Hiragino Sans"/>
+                <a:cs typeface="Hiragino Sans"/>
+              </a:rPr>
+              <a:t>・画像やGANには依存しない</a:t>
+            </a:r>
+          </a:p>
+          <a:p>
+            <a:pPr algn="l">
+              <a:buNone/>
+              <a:defRPr sz="1250" b="0">
+                <a:solidFill>
+                  <a:srgbClr val="111827"/>
+                </a:solidFill>
+                <a:latin typeface="Hiragino Sans"/>
+                <a:ea typeface="Hiragino Sans"/>
+                <a:cs typeface="Hiragino Sans"/>
+              </a:defRPr>
+            </a:pPr>
+            <a:r>
+              <a:rPr sz="1250" b="0">
+                <a:solidFill>
+                  <a:srgbClr val="111827"/>
+                </a:solidFill>
+                <a:latin typeface="Hiragino Sans"/>
+                <a:ea typeface="Hiragino Sans"/>
+                <a:cs typeface="Hiragino Sans"/>
+              </a:rPr>
+              <a:t>・LIMEの局所線形モデルで、一般の表形式データにOne-vs-One説明を作る</a:t>
+            </a:r>
+          </a:p>
+        </p:txBody>
+      </p:sp>
     </p:spTree>
     <p:extLst>
       <p:ext uri="{BB962C8B-B14F-4D97-AF65-F5344CB8AC3E}">
@@ -12061,6 +12615,410 @@
             <a:r>
               <a:rPr lang="ja-JP" altLang="ja-JP" sz="3200" b="1"/>
               <a:t>log-oddsを局所的に説明する</a:t>
+            </a:r>
+          </a:p>
+        </p:txBody>
+      </p:sp>
+      <p:sp>
+        <p:nvSpPr>
+          <p:cNvPr id="950" name="climax-left-header"/>
+          <p:cNvSpPr>
+            <a:spLocks noGrp="1"/>
+          </p:cNvSpPr>
+          <p:nvPr/>
+        </p:nvSpPr>
+        <p:spPr>
+          <a:xfrm>
+            <a:off x="700000" y="2450000"/>
+            <a:ext cx="2700000" cy="350000"/>
+          </a:xfrm>
+          <a:prstGeom prst="rect">
+            <a:avLst/>
+          </a:prstGeom>
+          <a:noFill/>
+          <a:ln w="0">
+            <a:noFill/>
+            <a:prstDash val="solid"/>
+          </a:ln>
+        </p:spPr>
+        <p:txBody>
+          <a:bodyPr lIns="0" tIns="0" rIns="0" bIns="0" anchor="t">
+            <a:noAutofit/>
+          </a:bodyPr>
+          <a:lstStyle/>
+          <a:p>
+            <a:pPr algn="l">
+              <a:buNone/>
+              <a:defRPr sz="1350" b="1">
+                <a:solidFill>
+                  <a:srgbClr val="2F6BDE"/>
+                </a:solidFill>
+                <a:latin typeface="Hiragino Sans"/>
+                <a:ea typeface="Hiragino Sans"/>
+                <a:cs typeface="Hiragino Sans"/>
+              </a:defRPr>
+            </a:pPr>
+            <a:r>
+              <a:rPr sz="1350" b="1">
+                <a:solidFill>
+                  <a:srgbClr val="2F6BDE"/>
+                </a:solidFill>
+                <a:latin typeface="Hiragino Sans"/>
+                <a:ea typeface="Hiragino Sans"/>
+                <a:cs typeface="Hiragino Sans"/>
+              </a:rPr>
+              <a:t>CLIMAXが提案したこと</a:t>
+            </a:r>
+          </a:p>
+        </p:txBody>
+      </p:sp>
+      <p:sp>
+        <p:nvSpPr>
+          <p:cNvPr id="951" name="climax-left-body"/>
+          <p:cNvSpPr>
+            <a:spLocks noGrp="1"/>
+          </p:cNvSpPr>
+          <p:nvPr/>
+        </p:nvSpPr>
+        <p:spPr>
+          <a:xfrm>
+            <a:off x="700000" y="2870000"/>
+            <a:ext cx="2700000" cy="1830000"/>
+          </a:xfrm>
+          <a:prstGeom prst="rect">
+            <a:avLst/>
+          </a:prstGeom>
+          <a:noFill/>
+          <a:ln w="0">
+            <a:noFill/>
+            <a:prstDash val="solid"/>
+          </a:ln>
+        </p:spPr>
+        <p:txBody>
+          <a:bodyPr lIns="0" tIns="0" rIns="0" bIns="0" anchor="t">
+            <a:noAutofit/>
+          </a:bodyPr>
+          <a:lstStyle/>
+          <a:p>
+            <a:pPr algn="l">
+              <a:buNone/>
+              <a:defRPr sz="1150" b="0">
+                <a:solidFill>
+                  <a:srgbClr val="111827"/>
+                </a:solidFill>
+                <a:latin typeface="Hiragino Sans"/>
+                <a:ea typeface="Hiragino Sans"/>
+                <a:cs typeface="Hiragino Sans"/>
+              </a:defRPr>
+            </a:pPr>
+            <a:r>
+              <a:rPr sz="1150" b="0">
+                <a:solidFill>
+                  <a:srgbClr val="111827"/>
+                </a:solidFill>
+                <a:latin typeface="Hiragino Sans"/>
+                <a:ea typeface="Hiragino Sans"/>
+                <a:cs typeface="Hiragino Sans"/>
+              </a:rPr>
+              <a:t>・局所的なモデルで説明</a:t>
+            </a:r>
+          </a:p>
+          <a:p>
+            <a:pPr algn="l">
+              <a:buNone/>
+              <a:defRPr sz="1150" b="0">
+                <a:solidFill>
+                  <a:srgbClr val="111827"/>
+                </a:solidFill>
+                <a:latin typeface="Hiragino Sans"/>
+                <a:ea typeface="Hiragino Sans"/>
+                <a:cs typeface="Hiragino Sans"/>
+              </a:defRPr>
+            </a:pPr>
+            <a:r>
+              <a:rPr sz="1150" b="0">
+                <a:solidFill>
+                  <a:srgbClr val="111827"/>
+                </a:solidFill>
+                <a:latin typeface="Hiragino Sans"/>
+                <a:ea typeface="Hiragino Sans"/>
+                <a:cs typeface="Hiragino Sans"/>
+              </a:rPr>
+              <a:t>・対数オッズを回帰</a:t>
+            </a:r>
+          </a:p>
+          <a:p>
+            <a:pPr algn="l">
+              <a:buNone/>
+              <a:defRPr sz="1150" b="0">
+                <a:solidFill>
+                  <a:srgbClr val="111827"/>
+                </a:solidFill>
+                <a:latin typeface="Hiragino Sans"/>
+                <a:ea typeface="Hiragino Sans"/>
+                <a:cs typeface="Hiragino Sans"/>
+              </a:defRPr>
+            </a:pPr>
+            <a:r>
+              <a:rPr sz="1150" b="0">
+                <a:solidFill>
+                  <a:srgbClr val="111827"/>
+                </a:solidFill>
+                <a:latin typeface="Hiragino Sans"/>
+                <a:ea typeface="Hiragino Sans"/>
+                <a:cs typeface="Hiragino Sans"/>
+              </a:rPr>
+              <a:t>（L-CLIMAX）</a:t>
+            </a:r>
+          </a:p>
+          <a:p>
+            <a:pPr algn="l">
+              <a:buNone/>
+              <a:defRPr sz="1150" b="0">
+                <a:solidFill>
+                  <a:srgbClr val="111827"/>
+                </a:solidFill>
+                <a:latin typeface="Hiragino Sans"/>
+                <a:ea typeface="Hiragino Sans"/>
+                <a:cs typeface="Hiragino Sans"/>
+              </a:defRPr>
+            </a:pPr>
+            <a:r>
+              <a:rPr sz="1150" b="0">
+                <a:solidFill>
+                  <a:srgbClr val="111827"/>
+                </a:solidFill>
+                <a:latin typeface="Hiragino Sans"/>
+                <a:ea typeface="Hiragino Sans"/>
+                <a:cs typeface="Hiragino Sans"/>
+              </a:rPr>
+              <a:t>・確率を交差エントロピー</a:t>
+            </a:r>
+          </a:p>
+          <a:p>
+            <a:pPr algn="l">
+              <a:buNone/>
+              <a:defRPr sz="1150" b="0">
+                <a:solidFill>
+                  <a:srgbClr val="111827"/>
+                </a:solidFill>
+                <a:latin typeface="Hiragino Sans"/>
+                <a:ea typeface="Hiragino Sans"/>
+                <a:cs typeface="Hiragino Sans"/>
+              </a:defRPr>
+            </a:pPr>
+            <a:r>
+              <a:rPr sz="1150" b="0">
+                <a:solidFill>
+                  <a:srgbClr val="111827"/>
+                </a:solidFill>
+                <a:latin typeface="Hiragino Sans"/>
+                <a:ea typeface="Hiragino Sans"/>
+                <a:cs typeface="Hiragino Sans"/>
+              </a:rPr>
+              <a:t>で回帰（CE-CLIMAX）</a:t>
+            </a:r>
+          </a:p>
+        </p:txBody>
+      </p:sp>
+      <p:sp>
+        <p:nvSpPr>
+          <p:cNvPr id="952" name="climax-right-header"/>
+          <p:cNvSpPr>
+            <a:spLocks noGrp="1"/>
+          </p:cNvSpPr>
+          <p:nvPr/>
+        </p:nvSpPr>
+        <p:spPr>
+          <a:xfrm>
+            <a:off x="8450000" y="2450000"/>
+            <a:ext cx="2980000" cy="350000"/>
+          </a:xfrm>
+          <a:prstGeom prst="rect">
+            <a:avLst/>
+          </a:prstGeom>
+          <a:noFill/>
+          <a:ln w="0">
+            <a:noFill/>
+            <a:prstDash val="solid"/>
+          </a:ln>
+        </p:spPr>
+        <p:txBody>
+          <a:bodyPr lIns="0" tIns="0" rIns="0" bIns="0" anchor="t">
+            <a:noAutofit/>
+          </a:bodyPr>
+          <a:lstStyle/>
+          <a:p>
+            <a:pPr algn="l">
+              <a:buNone/>
+              <a:defRPr sz="1350" b="1">
+                <a:solidFill>
+                  <a:srgbClr val="2AA876"/>
+                </a:solidFill>
+                <a:latin typeface="Hiragino Sans"/>
+                <a:ea typeface="Hiragino Sans"/>
+                <a:cs typeface="Hiragino Sans"/>
+              </a:defRPr>
+            </a:pPr>
+            <a:r>
+              <a:rPr sz="1350" b="1">
+                <a:solidFill>
+                  <a:srgbClr val="2AA876"/>
+                </a:solidFill>
+                <a:latin typeface="Hiragino Sans"/>
+                <a:ea typeface="Hiragino Sans"/>
+                <a:cs typeface="Hiragino Sans"/>
+              </a:rPr>
+              <a:t>本研究が活かす点</a:t>
+            </a:r>
+          </a:p>
+        </p:txBody>
+      </p:sp>
+      <p:sp>
+        <p:nvSpPr>
+          <p:cNvPr id="953" name="climax-right-body"/>
+          <p:cNvSpPr>
+            <a:spLocks noGrp="1"/>
+          </p:cNvSpPr>
+          <p:nvPr/>
+        </p:nvSpPr>
+        <p:spPr>
+          <a:xfrm>
+            <a:off x="8450000" y="2870000"/>
+            <a:ext cx="2980000" cy="1830000"/>
+          </a:xfrm>
+          <a:prstGeom prst="rect">
+            <a:avLst/>
+          </a:prstGeom>
+          <a:noFill/>
+          <a:ln w="0">
+            <a:noFill/>
+            <a:prstDash val="solid"/>
+          </a:ln>
+        </p:spPr>
+        <p:txBody>
+          <a:bodyPr lIns="0" tIns="0" rIns="0" bIns="0" anchor="t">
+            <a:noAutofit/>
+          </a:bodyPr>
+          <a:lstStyle/>
+          <a:p>
+            <a:pPr algn="l">
+              <a:buNone/>
+              <a:defRPr sz="1150" b="0">
+                <a:solidFill>
+                  <a:srgbClr val="111827"/>
+                </a:solidFill>
+                <a:latin typeface="Hiragino Sans"/>
+                <a:ea typeface="Hiragino Sans"/>
+                <a:cs typeface="Hiragino Sans"/>
+              </a:defRPr>
+            </a:pPr>
+            <a:r>
+              <a:rPr sz="1150" b="0">
+                <a:solidFill>
+                  <a:srgbClr val="111827"/>
+                </a:solidFill>
+                <a:latin typeface="Hiragino Sans"/>
+                <a:ea typeface="Hiragino Sans"/>
+                <a:cs typeface="Hiragino Sans"/>
+              </a:rPr>
+              <a:t>・確率でなく対数比・交差</a:t>
+            </a:r>
+          </a:p>
+          <a:p>
+            <a:pPr algn="l">
+              <a:buNone/>
+              <a:defRPr sz="1150" b="0">
+                <a:solidFill>
+                  <a:srgbClr val="111827"/>
+                </a:solidFill>
+                <a:latin typeface="Hiragino Sans"/>
+                <a:ea typeface="Hiragino Sans"/>
+                <a:cs typeface="Hiragino Sans"/>
+              </a:defRPr>
+            </a:pPr>
+            <a:r>
+              <a:rPr sz="1150" b="0">
+                <a:solidFill>
+                  <a:srgbClr val="111827"/>
+                </a:solidFill>
+                <a:latin typeface="Hiragino Sans"/>
+                <a:ea typeface="Hiragino Sans"/>
+                <a:cs typeface="Hiragino Sans"/>
+              </a:rPr>
+              <a:t>エントロピーで近似</a:t>
+            </a:r>
+          </a:p>
+          <a:p>
+            <a:pPr algn="l">
+              <a:buNone/>
+              <a:defRPr sz="1150" b="0">
+                <a:solidFill>
+                  <a:srgbClr val="111827"/>
+                </a:solidFill>
+                <a:latin typeface="Hiragino Sans"/>
+                <a:ea typeface="Hiragino Sans"/>
+                <a:cs typeface="Hiragino Sans"/>
+              </a:defRPr>
+            </a:pPr>
+            <a:r>
+              <a:rPr sz="1150" b="0">
+                <a:solidFill>
+                  <a:srgbClr val="111827"/>
+                </a:solidFill>
+                <a:latin typeface="Hiragino Sans"/>
+                <a:ea typeface="Hiragino Sans"/>
+                <a:cs typeface="Hiragino Sans"/>
+              </a:rPr>
+              <a:t>・比較対象は「それ以外</a:t>
+            </a:r>
+          </a:p>
+          <a:p>
+            <a:pPr algn="l">
+              <a:buNone/>
+              <a:defRPr sz="1150" b="0">
+                <a:solidFill>
+                  <a:srgbClr val="111827"/>
+                </a:solidFill>
+                <a:latin typeface="Hiragino Sans"/>
+                <a:ea typeface="Hiragino Sans"/>
+                <a:cs typeface="Hiragino Sans"/>
+              </a:defRPr>
+            </a:pPr>
+            <a:r>
+              <a:rPr sz="1150" b="0">
+                <a:solidFill>
+                  <a:srgbClr val="111827"/>
+                </a:solidFill>
+                <a:latin typeface="Hiragino Sans"/>
+                <a:ea typeface="Hiragino Sans"/>
+                <a:cs typeface="Hiragino Sans"/>
+              </a:rPr>
+              <a:t>全部」でなく予測1位・</a:t>
+            </a:r>
+          </a:p>
+          <a:p>
+            <a:pPr algn="l">
+              <a:buNone/>
+              <a:defRPr sz="1150" b="0">
+                <a:solidFill>
+                  <a:srgbClr val="111827"/>
+                </a:solidFill>
+                <a:latin typeface="Hiragino Sans"/>
+                <a:ea typeface="Hiragino Sans"/>
+                <a:cs typeface="Hiragino Sans"/>
+              </a:defRPr>
+            </a:pPr>
+            <a:r>
+              <a:rPr sz="1150" b="0">
+                <a:solidFill>
+                  <a:srgbClr val="111827"/>
+                </a:solidFill>
+                <a:latin typeface="Hiragino Sans"/>
+                <a:ea typeface="Hiragino Sans"/>
+                <a:cs typeface="Hiragino Sans"/>
+              </a:rPr>
+              <a:t>2位の2クラスに絞る</a:t>
             </a:r>
           </a:p>
         </p:txBody>
@@ -19611,6 +20569,116 @@
           </a:p>
         </p:txBody>
       </p:sp>
+      <p:sp>
+        <p:nvSpPr>
+          <p:cNvPr id="950" name="metric-explain-bg"/>
+          <p:cNvSpPr>
+            <a:spLocks noGrp="1"/>
+          </p:cNvSpPr>
+          <p:nvPr/>
+        </p:nvSpPr>
+        <p:spPr>
+          <a:xfrm>
+            <a:off x="700000" y="1130000"/>
+            <a:ext cx="8300000" cy="1350000"/>
+          </a:xfrm>
+          <a:prstGeom prst="roundRect">
+            <a:avLst>
+              <a:gd name="adj" fmla="val 6000"/>
+            </a:avLst>
+          </a:prstGeom>
+          <a:solidFill>
+            <a:srgbClr val="EAF4FB"/>
+          </a:solidFill>
+          <a:ln w="0">
+            <a:noFill/>
+          </a:ln>
+        </p:spPr>
+        <p:txBody>
+          <a:bodyPr/>
+          <a:lstStyle/>
+          <a:p>
+            <a:endParaRPr lang="ja-JP" altLang="en-US"/>
+          </a:p>
+        </p:txBody>
+      </p:sp>
+      <p:sp>
+        <p:nvSpPr>
+          <p:cNvPr id="951" name="metric-explain-text"/>
+          <p:cNvSpPr>
+            <a:spLocks noGrp="1"/>
+          </p:cNvSpPr>
+          <p:nvPr/>
+        </p:nvSpPr>
+        <p:spPr>
+          <a:xfrm>
+            <a:off x="950000" y="1250000"/>
+            <a:ext cx="7800000" cy="1150000"/>
+          </a:xfrm>
+          <a:prstGeom prst="rect">
+            <a:avLst/>
+          </a:prstGeom>
+          <a:noFill/>
+          <a:ln w="0">
+            <a:noFill/>
+            <a:prstDash val="solid"/>
+          </a:ln>
+        </p:spPr>
+        <p:txBody>
+          <a:bodyPr lIns="0" tIns="0" rIns="0" bIns="0" anchor="t">
+            <a:noAutofit/>
+          </a:bodyPr>
+          <a:lstStyle/>
+          <a:p>
+            <a:pPr algn="l">
+              <a:buNone/>
+              <a:defRPr sz="1300" b="0">
+                <a:solidFill>
+                  <a:srgbClr val="111827"/>
+                </a:solidFill>
+                <a:latin typeface="Hiragino Sans"/>
+                <a:ea typeface="Hiragino Sans"/>
+                <a:cs typeface="Hiragino Sans"/>
+              </a:defRPr>
+            </a:pPr>
+            <a:r>
+              <a:rPr sz="1300" b="0">
+                <a:solidFill>
+                  <a:srgbClr val="111827"/>
+                </a:solidFill>
+                <a:latin typeface="Hiragino Sans"/>
+                <a:ea typeface="Hiragino Sans"/>
+                <a:cs typeface="Hiragino Sans"/>
+              </a:rPr>
+              <a:t>評価指標：各説明点で、AとBの確率比を実際に動かしている「本当に重要な特徴」上位5個を</a:t>
+            </a:r>
+          </a:p>
+          <a:p>
+            <a:pPr algn="l">
+              <a:buNone/>
+              <a:defRPr sz="1300" b="0">
+                <a:solidFill>
+                  <a:srgbClr val="111827"/>
+                </a:solidFill>
+                <a:latin typeface="Hiragino Sans"/>
+                <a:ea typeface="Hiragino Sans"/>
+                <a:cs typeface="Hiragino Sans"/>
+              </a:defRPr>
+            </a:pPr>
+            <a:r>
+              <a:rPr sz="1300" b="0">
+                <a:solidFill>
+                  <a:srgbClr val="111827"/>
+                </a:solidFill>
+                <a:latin typeface="Hiragino Sans"/>
+                <a:ea typeface="Hiragino Sans"/>
+                <a:cs typeface="Hiragino Sans"/>
+              </a:rPr>
+              <a:t>あらかじめ数値計算で求めておき、各手法が選んだ上位5特徴と何個一致したかを再現率として測る</a:t>
+            </a:r>
+          </a:p>
+        </p:txBody>
+      </p:sp>
     </p:spTree>
     <p:extLst>
       <p:ext uri="{BB962C8B-B14F-4D97-AF65-F5344CB8AC3E}">
@@ -20268,6 +21336,116 @@
                 <a:cs typeface="Hiragino Sans"/>
               </a:rPr>
               <a:t>両方式とも6/6条件で有意</a:t>
+            </a:r>
+          </a:p>
+        </p:txBody>
+      </p:sp>
+      <p:sp>
+        <p:nvSpPr>
+          <p:cNvPr id="950" name="metric-explain-bg"/>
+          <p:cNvSpPr>
+            <a:spLocks noGrp="1"/>
+          </p:cNvSpPr>
+          <p:nvPr/>
+        </p:nvSpPr>
+        <p:spPr>
+          <a:xfrm>
+            <a:off x="700000" y="1130000"/>
+            <a:ext cx="8300000" cy="1350000"/>
+          </a:xfrm>
+          <a:prstGeom prst="roundRect">
+            <a:avLst>
+              <a:gd name="adj" fmla="val 6000"/>
+            </a:avLst>
+          </a:prstGeom>
+          <a:solidFill>
+            <a:srgbClr val="EAF4FB"/>
+          </a:solidFill>
+          <a:ln w="0">
+            <a:noFill/>
+          </a:ln>
+        </p:spPr>
+        <p:txBody>
+          <a:bodyPr/>
+          <a:lstStyle/>
+          <a:p>
+            <a:endParaRPr lang="ja-JP" altLang="en-US"/>
+          </a:p>
+        </p:txBody>
+      </p:sp>
+      <p:sp>
+        <p:nvSpPr>
+          <p:cNvPr id="951" name="metric-explain-text"/>
+          <p:cNvSpPr>
+            <a:spLocks noGrp="1"/>
+          </p:cNvSpPr>
+          <p:nvPr/>
+        </p:nvSpPr>
+        <p:spPr>
+          <a:xfrm>
+            <a:off x="950000" y="1250000"/>
+            <a:ext cx="7800000" cy="1150000"/>
+          </a:xfrm>
+          <a:prstGeom prst="rect">
+            <a:avLst/>
+          </a:prstGeom>
+          <a:noFill/>
+          <a:ln w="0">
+            <a:noFill/>
+            <a:prstDash val="solid"/>
+          </a:ln>
+        </p:spPr>
+        <p:txBody>
+          <a:bodyPr lIns="0" tIns="0" rIns="0" bIns="0" anchor="t">
+            <a:noAutofit/>
+          </a:bodyPr>
+          <a:lstStyle/>
+          <a:p>
+            <a:pPr algn="l">
+              <a:buNone/>
+              <a:defRPr sz="1300" b="0">
+                <a:solidFill>
+                  <a:srgbClr val="111827"/>
+                </a:solidFill>
+                <a:latin typeface="Hiragino Sans"/>
+                <a:ea typeface="Hiragino Sans"/>
+                <a:cs typeface="Hiragino Sans"/>
+              </a:defRPr>
+            </a:pPr>
+            <a:r>
+              <a:rPr sz="1300" b="0">
+                <a:solidFill>
+                  <a:srgbClr val="111827"/>
+                </a:solidFill>
+                <a:latin typeface="Hiragino Sans"/>
+                <a:ea typeface="Hiragino Sans"/>
+                <a:cs typeface="Hiragino Sans"/>
+              </a:rPr>
+              <a:t>評価指標：学習には使っていない未知の摂動点400個を用意し、各手法の説明が</a:t>
+            </a:r>
+          </a:p>
+          <a:p>
+            <a:pPr algn="l">
+              <a:buNone/>
+              <a:defRPr sz="1300" b="0">
+                <a:solidFill>
+                  <a:srgbClr val="111827"/>
+                </a:solidFill>
+                <a:latin typeface="Hiragino Sans"/>
+                <a:ea typeface="Hiragino Sans"/>
+                <a:cs typeface="Hiragino Sans"/>
+              </a:defRPr>
+            </a:pPr>
+            <a:r>
+              <a:rPr sz="1300" b="0">
+                <a:solidFill>
+                  <a:srgbClr val="111827"/>
+                </a:solidFill>
+                <a:latin typeface="Hiragino Sans"/>
+                <a:ea typeface="Hiragino Sans"/>
+                <a:cs typeface="Hiragino Sans"/>
+              </a:rPr>
+              <a:t>「AとBどちらが優勢か」をブラックボックスの実際の判定とどれだけ一致させられるかを測る</a:t>
             </a:r>
           </a:p>
         </p:txBody>
@@ -21244,7 +22422,7 @@
                 <a:ea typeface="Hiragino Sans"/>
                 <a:cs typeface="Hiragino Sans"/>
               </a:rPr>
-              <a:t>結果のまとめ</a:t>
+              <a:t>まとめと今後の展望</a:t>
             </a:r>
           </a:p>
         </p:txBody>
@@ -21301,7 +22479,7 @@
                 <a:ea typeface="Hiragino Sans"/>
                 <a:cs typeface="Hiragino Sans"/>
               </a:rPr>
-              <a:t>本編では、提案の価値を最も明確に示す3つの結果に絞る</a:t>
+              <a:t>本編で示した価値を3点に絞って振り返り、残る課題を示す</a:t>
             </a:r>
           </a:p>
         </p:txBody>
@@ -21454,7 +22632,7 @@
                 <a:ea typeface="Hiragino Sans"/>
                 <a:cs typeface="Hiragino Sans"/>
               </a:rPr>
-              <a:t>真のTop-5を約10pt多く回収</a:t>
+              <a:t>「AとBの違い」を直接説明できる</a:t>
             </a:r>
           </a:p>
         </p:txBody>
@@ -21607,7 +22785,7 @@
                 <a:ea typeface="Hiragino Sans"/>
                 <a:cs typeface="Hiragino Sans"/>
               </a:rPr>
-              <a:t>改善は約1ポイント</a:t>
+              <a:t>従来(OVR)より精度は落ちない</a:t>
             </a:r>
           </a:p>
         </p:txBody>
@@ -21761,6 +22939,240 @@
                 <a:cs typeface="Hiragino Sans"/>
               </a:rPr>
               <a:t>クラス数に対してほぼ一定</a:t>
+            </a:r>
+          </a:p>
+        </p:txBody>
+      </p:sp>
+      <p:cxnSp>
+        <p:nvCxnSpPr>
+          <p:cNvPr id="900" name="outlook-divider"/>
+          <p:cNvCxnSpPr/>
+          <p:nvPr/>
+        </p:nvCxnSpPr>
+        <p:spPr>
+          <a:xfrm>
+            <a:off x="762000" y="5140000"/>
+            <a:ext cx="10668000" cy="0"/>
+          </a:xfrm>
+          <a:prstGeom prst="straightConnector1">
+            <a:avLst/>
+          </a:prstGeom>
+          <a:ln w="19050">
+            <a:solidFill>
+              <a:srgbClr val="CBD5E1"/>
+            </a:solidFill>
+            <a:prstDash val="solid"/>
+          </a:ln>
+        </p:spPr>
+      </p:cxnSp>
+      <p:sp>
+        <p:nvSpPr>
+          <p:cNvPr id="901" name="outlook-label"/>
+          <p:cNvSpPr>
+            <a:spLocks noGrp="1"/>
+          </p:cNvSpPr>
+          <p:nvPr/>
+        </p:nvSpPr>
+        <p:spPr>
+          <a:xfrm>
+            <a:off x="762000" y="5230000"/>
+            <a:ext cx="4000000" cy="320000"/>
+          </a:xfrm>
+          <a:prstGeom prst="rect">
+            <a:avLst/>
+          </a:prstGeom>
+          <a:noFill/>
+          <a:ln w="0">
+            <a:noFill/>
+            <a:prstDash val="solid"/>
+          </a:ln>
+        </p:spPr>
+        <p:txBody>
+          <a:bodyPr lIns="0" tIns="0" rIns="0" bIns="0" anchor="t">
+            <a:noAutofit/>
+          </a:bodyPr>
+          <a:lstStyle/>
+          <a:p>
+            <a:pPr algn="l">
+              <a:buNone/>
+              <a:defRPr sz="1800" b="1">
+                <a:solidFill>
+                  <a:srgbClr val="17233D"/>
+                </a:solidFill>
+                <a:latin typeface="Hiragino Sans"/>
+                <a:ea typeface="Hiragino Sans"/>
+                <a:cs typeface="Hiragino Sans"/>
+              </a:defRPr>
+            </a:pPr>
+            <a:r>
+              <a:rPr sz="1800" b="1">
+                <a:solidFill>
+                  <a:srgbClr val="17233D"/>
+                </a:solidFill>
+                <a:latin typeface="Hiragino Sans"/>
+                <a:ea typeface="Hiragino Sans"/>
+                <a:cs typeface="Hiragino Sans"/>
+              </a:rPr>
+              <a:t>今後の展望</a:t>
+            </a:r>
+          </a:p>
+        </p:txBody>
+      </p:sp>
+      <p:sp>
+        <p:nvSpPr>
+          <p:cNvPr id="902" name="outlook-item-0"/>
+          <p:cNvSpPr>
+            <a:spLocks noGrp="1"/>
+          </p:cNvSpPr>
+          <p:nvPr/>
+        </p:nvSpPr>
+        <p:spPr>
+          <a:xfrm>
+            <a:off x="900000" y="5620000"/>
+            <a:ext cx="10200000" cy="300000"/>
+          </a:xfrm>
+          <a:prstGeom prst="rect">
+            <a:avLst/>
+          </a:prstGeom>
+          <a:noFill/>
+          <a:ln w="0">
+            <a:noFill/>
+            <a:prstDash val="solid"/>
+          </a:ln>
+        </p:spPr>
+        <p:txBody>
+          <a:bodyPr lIns="0" tIns="0" rIns="0" bIns="0" anchor="t">
+            <a:noAutofit/>
+          </a:bodyPr>
+          <a:lstStyle/>
+          <a:p>
+            <a:pPr algn="l">
+              <a:buNone/>
+              <a:defRPr sz="1300" b="0">
+                <a:solidFill>
+                  <a:srgbClr val="111827"/>
+                </a:solidFill>
+                <a:latin typeface="Hiragino Sans"/>
+                <a:ea typeface="Hiragino Sans"/>
+                <a:cs typeface="Hiragino Sans"/>
+              </a:defRPr>
+            </a:pPr>
+            <a:r>
+              <a:rPr sz="1300" b="0">
+                <a:solidFill>
+                  <a:srgbClr val="111827"/>
+                </a:solidFill>
+                <a:latin typeface="Hiragino Sans"/>
+                <a:ea typeface="Hiragino Sans"/>
+                <a:cs typeface="Hiragino Sans"/>
+              </a:rPr>
+              <a:t>・解釈性の向上を定量的に測る方法の検討（人による理解しやすさの評価など）</a:t>
+            </a:r>
+          </a:p>
+        </p:txBody>
+      </p:sp>
+      <p:sp>
+        <p:nvSpPr>
+          <p:cNvPr id="903" name="outlook-item-1"/>
+          <p:cNvSpPr>
+            <a:spLocks noGrp="1"/>
+          </p:cNvSpPr>
+          <p:nvPr/>
+        </p:nvSpPr>
+        <p:spPr>
+          <a:xfrm>
+            <a:off x="900000" y="5960000"/>
+            <a:ext cx="10200000" cy="300000"/>
+          </a:xfrm>
+          <a:prstGeom prst="rect">
+            <a:avLst/>
+          </a:prstGeom>
+          <a:noFill/>
+          <a:ln w="0">
+            <a:noFill/>
+            <a:prstDash val="solid"/>
+          </a:ln>
+        </p:spPr>
+        <p:txBody>
+          <a:bodyPr lIns="0" tIns="0" rIns="0" bIns="0" anchor="t">
+            <a:noAutofit/>
+          </a:bodyPr>
+          <a:lstStyle/>
+          <a:p>
+            <a:pPr algn="l">
+              <a:buNone/>
+              <a:defRPr sz="1300" b="0">
+                <a:solidFill>
+                  <a:srgbClr val="111827"/>
+                </a:solidFill>
+                <a:latin typeface="Hiragino Sans"/>
+                <a:ea typeface="Hiragino Sans"/>
+                <a:cs typeface="Hiragino Sans"/>
+              </a:defRPr>
+            </a:pPr>
+            <a:r>
+              <a:rPr sz="1300" b="0">
+                <a:solidFill>
+                  <a:srgbClr val="111827"/>
+                </a:solidFill>
+                <a:latin typeface="Hiragino Sans"/>
+                <a:ea typeface="Hiragino Sans"/>
+                <a:cs typeface="Hiragino Sans"/>
+              </a:rPr>
+              <a:t>・実データでの検証</a:t>
+            </a:r>
+          </a:p>
+        </p:txBody>
+      </p:sp>
+      <p:sp>
+        <p:nvSpPr>
+          <p:cNvPr id="904" name="outlook-item-2"/>
+          <p:cNvSpPr>
+            <a:spLocks noGrp="1"/>
+          </p:cNvSpPr>
+          <p:nvPr/>
+        </p:nvSpPr>
+        <p:spPr>
+          <a:xfrm>
+            <a:off x="900000" y="6300000"/>
+            <a:ext cx="10200000" cy="300000"/>
+          </a:xfrm>
+          <a:prstGeom prst="rect">
+            <a:avLst/>
+          </a:prstGeom>
+          <a:noFill/>
+          <a:ln w="0">
+            <a:noFill/>
+            <a:prstDash val="solid"/>
+          </a:ln>
+        </p:spPr>
+        <p:txBody>
+          <a:bodyPr lIns="0" tIns="0" rIns="0" bIns="0" anchor="t">
+            <a:noAutofit/>
+          </a:bodyPr>
+          <a:lstStyle/>
+          <a:p>
+            <a:pPr algn="l">
+              <a:buNone/>
+              <a:defRPr sz="1300" b="0">
+                <a:solidFill>
+                  <a:srgbClr val="111827"/>
+                </a:solidFill>
+                <a:latin typeface="Hiragino Sans"/>
+                <a:ea typeface="Hiragino Sans"/>
+                <a:cs typeface="Hiragino Sans"/>
+              </a:defRPr>
+            </a:pPr>
+            <a:r>
+              <a:rPr sz="1300" b="0">
+                <a:solidFill>
+                  <a:srgbClr val="111827"/>
+                </a:solidFill>
+                <a:latin typeface="Hiragino Sans"/>
+                <a:ea typeface="Hiragino Sans"/>
+                <a:cs typeface="Hiragino Sans"/>
+              </a:rPr>
+              <a:t>・競合クラスがTop-2以外や入力ごとに変わる場合への対応</a:t>
             </a:r>
           </a:p>
         </p:txBody>

--- a/pptx/MIDTERM_PRESENTATION_v3.pptx
+++ b/pptx/MIDTERM_PRESENTATION_v3.pptx
@@ -360,35 +360,8 @@
           <a:lstStyle/>
           <a:p>
             <a:r>
-              <a:rPr dirty="0" err="1"/>
-              <a:t>LIMEの基本的な仕組みを二値分類の例から説明し、Slide</a:t>
-            </a:r>
-            <a:r>
-              <a:rPr dirty="0"/>
-              <a:t> 6以降で多クラス分類へ話を広げる。今回はFisherの提案手法や実験結果には踏み込まず、研究の出発点を整理する。</a:t>
-            </a:r>
-          </a:p>
-          <a:p>
-            <a:endParaRPr dirty="0"/>
-          </a:p>
-          <a:p>
-            <a:r>
-              <a:rPr dirty="0"/>
-              <a:t>[Sources]</a:t>
-            </a:r>
-          </a:p>
-          <a:p>
-            <a:r>
-              <a:rPr dirty="0"/>
-              <a:t>- https://</a:t>
-            </a:r>
-            <a:r>
-              <a:rPr dirty="0" err="1"/>
-              <a:t>arxiv.org</a:t>
-            </a:r>
-            <a:r>
-              <a:rPr dirty="0"/>
-              <a:t>/abs/1602.04938</a:t>
+              <a:rPr lang="ja-JP" dirty="0"/>
+              <a:t>はじめに、齊藤研究室M1の池亀です。今日は「多クラス分類におけるLIMEの説明方法と課題」というテーマで、修士研究の中間発表をします。よろしくお願いします。</a:t>
             </a:r>
           </a:p>
         </p:txBody>
@@ -465,7 +438,8 @@
           <a:lstStyle/>
           <a:p>
             <a:r>
-              <a:t>実験設定の出典: src/run_ovo_vs_ovr_experiment.py, src/run_blackbox_comparison_experiment.py, src/run_feature_role_experiment.py, src/run_timing_experiment.py</a:t>
+              <a:rPr lang="ja-JP" dirty="0"/>
+              <a:t>ここで問題になるのが、このクラス別の説明を並べるだけだと、全体像がとても読み取りにくいということです。例えば、クラスA・B・Cそれぞれの説明で、使われている特徴も、その重みの符号もバラバラだったとします。すると利用者は、「Aに効いている特徴は分かった。でもAとBを分けている特徴は何？」という疑問に、3つの説明を自分で見比べて答えを組み立てないといけません。これは、どれかの説明が間違っているという話ではなく、クラスをまたいで比較するときの負担が大きい、という問題です。</a:t>
             </a:r>
           </a:p>
         </p:txBody>
@@ -542,27 +516,9 @@
           <a:lstStyle/>
           <a:p>
             <a:r>
-              <a:t>出典: results/challenging_groundtruth_recall.png, challenging_groundtruth_results.csv。真値は各説明点で数値計算したlog(p_A/p_B)の局所勾配。競合特徴数とKを一致させた旧実験とは異なり、弱い密ノイズを含む30次元からTop-5を選ぶ。</a:t>
-            </a:r>
-          </a:p>
-        </p:txBody>
-      </p:sp>
-      <p:sp>
-        <p:nvSpPr>
-          <p:cNvPr id="4" name="Slide Number Placeholder 3"/>
-          <p:cNvSpPr>
-            <a:spLocks noGrp="1"/>
-          </p:cNvSpPr>
-          <p:nvPr>
-            <p:ph type="sldNum" idx="5"/>
-          </p:nvPr>
-        </p:nvSpPr>
-        <p:spPr/>
-        <p:txBody>
-          <a:bodyPr/>
-          <a:lstStyle/>
-          <a:p>
-            <a:endParaRPr/>
+              <a:rPr lang="ja-JP" dirty="0"/>
+              <a:t>この課題に対して、先行研究がどうアプローチしているかを2つ紹介します。</a:t>
+            </a:r>
           </a:p>
         </p:txBody>
       </p:sp>
@@ -593,7 +549,7 @@
       </p:grpSpPr>
       <p:sp>
         <p:nvSpPr>
-          <p:cNvPr id="2" name="Slide Image Placeholder 1"/>
+          <p:cNvPr id="2" name="スライド イメージ プレースホルダー 1"/>
           <p:cNvSpPr>
             <a:spLocks noGrp="1" noRot="1" noChangeAspect="1"/>
           </p:cNvSpPr>
@@ -605,7 +561,7 @@
       </p:sp>
       <p:sp>
         <p:nvSpPr>
-          <p:cNvPr id="3" name="Notes Placeholder 2"/>
+          <p:cNvPr id="3" name="ノート プレースホルダー 2"/>
           <p:cNvSpPr>
             <a:spLocks noGrp="1"/>
           </p:cNvSpPr>
@@ -619,19 +575,20 @@
           <a:lstStyle/>
           <a:p>
             <a:r>
-              <a:t>出典: results/challenging_groundtruth_fidelity.png。全条件平均はOVR 0.8871、2クラス通常LIME 0.8983、Contrastive 0.9005。20独立BBの対応検定で両方式とも6/6条件有意だが、実用差は約1.1〜1.3ポイント。</a:t>
-            </a:r>
-          </a:p>
-        </p:txBody>
-      </p:sp>
-      <p:sp>
-        <p:nvSpPr>
-          <p:cNvPr id="4" name="Slide Number Placeholder 3"/>
+              <a:rPr lang="ja-JP" dirty="0"/>
+              <a:t>1つ目はGANMEXという研究です。左側にある通り、GANMEXはOne-vs-One Attribution、つまり全部のクラスではなく特定の2クラスだけを比較する、という考え方を提案しています。2クラスに絞ることで、両方のクラスに共通する特徴ではなく、その2クラスを区別する特徴に注目できる、というのがポイントです。ただしGANMEXは主に画像分類を対象としていて、GANで比較クラスの画像を生成し、それをattributionの基準にする、という仕組みです。右側の通り、本研究が活かすのはこの「特定の2クラスを比較する」という問いの立て方です。画像やGANには依存せず、LIMEの局所線形モデルを使って、一般の表形式データでOne-vs-One的な説明を作る、というのが今回の方向性です。</a:t>
+            </a:r>
+          </a:p>
+        </p:txBody>
+      </p:sp>
+      <p:sp>
+        <p:nvSpPr>
+          <p:cNvPr id="4" name="スライド番号プレースホルダー 3"/>
           <p:cNvSpPr>
             <a:spLocks noGrp="1"/>
           </p:cNvSpPr>
           <p:nvPr>
-            <p:ph type="sldNum" idx="5"/>
+            <p:ph type="sldNum" sz="quarter" idx="5"/>
           </p:nvPr>
         </p:nvSpPr>
         <p:spPr/>
@@ -639,11 +596,16 @@
           <a:bodyPr/>
           <a:lstStyle/>
           <a:p>
-            <a:endParaRPr/>
+            <a:endParaRPr lang="ja-JP" altLang="en-US"/>
           </a:p>
         </p:txBody>
       </p:sp>
     </p:spTree>
+    <p:extLst>
+      <p:ext uri="{BB962C8B-B14F-4D97-AF65-F5344CB8AC3E}">
+        <p14:creationId xmlns:p14="http://schemas.microsoft.com/office/powerpoint/2010/main" val="1149279096"/>
+      </p:ext>
+    </p:extLst>
   </p:cSld>
   <p:clrMapOvr>
     <a:masterClrMapping/>
@@ -696,27 +658,9 @@
           <a:lstStyle/>
           <a:p>
             <a:r>
-              <a:t>出典: results/timing_scaling.png。BB推論と摂動生成は含まない。全クラス対ではなく、Top-1/Top-2の1ペアだけを説明する設定。</a:t>
-            </a:r>
-          </a:p>
-        </p:txBody>
-      </p:sp>
-      <p:sp>
-        <p:nvSpPr>
-          <p:cNvPr id="4" name="Slide Number Placeholder 3"/>
-          <p:cNvSpPr>
-            <a:spLocks noGrp="1"/>
-          </p:cNvSpPr>
-          <p:nvPr>
-            <p:ph type="sldNum" idx="5"/>
-          </p:nvPr>
-        </p:nvSpPr>
-        <p:spPr/>
-        <p:txBody>
-          <a:bodyPr/>
-          <a:lstStyle/>
-          <a:p>
-            <a:endParaRPr/>
+              <a:rPr lang="ja-JP" dirty="0"/>
+              <a:t>2つ目はCLIMAXという研究です。左側にある通り、CLIMAXはブラックボックス分類器を局所的な小さい分類モデルで説明する手法で、対象クラスの対数オッズを回帰するL-CLIMAXと、確率を交差エントロピーで回帰するCE-CLIMAXの2種類があります。下の式にある通り、CLIMAXの比較対象は「クラスA対それ以外全部」で、これはLIMEのone-vs-restと同じ構造です。右側の通り、本研究が活かすのは、確率をそのまま見るのではなく、対数比や交差エントロピーで近似するという当てはめ方です。ただし比較対象は「それ以外全部」ではなく、予測1位・2位という特定の2クラスに絞る、という点が今回の提案の違いになります。</a:t>
+            </a:r>
           </a:p>
         </p:txBody>
       </p:sp>
@@ -773,27 +717,9 @@
           <a:lstStyle/>
           <a:p>
             <a:r>
-              <a:t>一般化範囲は今回の合成データとTop-1/Top-2。実データとユーザ評価は今後の課題として口頭で補足する。</a:t>
-            </a:r>
-          </a:p>
-        </p:txBody>
-      </p:sp>
-      <p:sp>
-        <p:nvSpPr>
-          <p:cNvPr id="4" name="Slide Number Placeholder 3"/>
-          <p:cNvSpPr>
-            <a:spLocks noGrp="1"/>
-          </p:cNvSpPr>
-          <p:nvPr>
-            <p:ph type="sldNum" idx="5"/>
-          </p:nvPr>
-        </p:nvSpPr>
-        <p:spPr/>
-        <p:txBody>
-          <a:bodyPr/>
-          <a:lstStyle/>
-          <a:p>
-            <a:endParaRPr/>
+              <a:rPr lang="ja-JP" dirty="0"/>
+              <a:t>それでは、この2つの先行研究を踏まえた、今回の提案手法の話に入ります。</a:t>
+            </a:r>
           </a:p>
         </p:txBody>
       </p:sp>
@@ -850,28 +776,9 @@
           <a:lstStyle/>
           <a:p>
             <a:r>
-              <a:rPr dirty="0"/>
-              <a:t>説明時は、OVRとpairwiseが異なる問いへ答える点を明示する。解釈性を断定せず、既知の真値に対する特徴関連性が改善したと述べる。</a:t>
-            </a:r>
-          </a:p>
-        </p:txBody>
-      </p:sp>
-      <p:sp>
-        <p:nvSpPr>
-          <p:cNvPr id="4" name="Slide Number Placeholder 3"/>
-          <p:cNvSpPr>
-            <a:spLocks noGrp="1"/>
-          </p:cNvSpPr>
-          <p:nvPr>
-            <p:ph type="sldNum" idx="5"/>
-          </p:nvPr>
-        </p:nvSpPr>
-        <p:spPr/>
-        <p:txBody>
-          <a:bodyPr/>
-          <a:lstStyle/>
-          <a:p>
-            <a:endParaRPr/>
+              <a:rPr lang="ja-JP" dirty="0"/>
+              <a:t>提案手法の全体像です。上の段が従来のOne-vs-Rest、下の段が今回の提案です。最初の2ステップ、説明対象を選ぶと近傍サンプルを作るのところは、実は共通のLIMEの仕組みをそのまま使っています。違いが出るのはその先です。One-vs-Restでは、クラスの数だけ各クラスの確率をそれぞれ回帰するので、クラスが増えるとその分だけモデルを作る回数も増えますし、できあがる説明もクラスの数だけバラバラにできます。一方、今回の提案では、まず予測の1位と2位のクラスだけを選び、その2クラスの確率比、あるいは対数比を1回だけ回帰します。特徴選択も1回で済み、最終的にできる説明は「AとBを分ける」という1つの説明だけです。つまり、クラスが増えても回帰する回数は変わらず、説明の数も常に1つ、というのが大きな違いです。</a:t>
+            </a:r>
           </a:p>
         </p:txBody>
       </p:sp>
@@ -884,6 +791,113 @@
 </file>
 
 <file path=ppt/notesSlides/notesSlide16.xml><?xml version="1.0" encoding="utf-8"?>
+<p:notes xmlns:a="http://schemas.openxmlformats.org/drawingml/2006/main" xmlns:r="http://schemas.openxmlformats.org/officeDocument/2006/relationships" xmlns:p="http://schemas.openxmlformats.org/presentationml/2006/main">
+  <p:cSld>
+    <p:spTree>
+      <p:nvGrpSpPr>
+        <p:cNvPr id="1" name="">
+          <a:extLst>
+            <a:ext uri="{FF2B5EF4-FFF2-40B4-BE49-F238E27FC236}">
+              <a16:creationId xmlns:a16="http://schemas.microsoft.com/office/drawing/2014/main" id="{C37FA4D1-27DC-75CE-FA2C-FAE76CABB1FD}"/>
+            </a:ext>
+          </a:extLst>
+        </p:cNvPr>
+        <p:cNvGrpSpPr/>
+        <p:nvPr/>
+      </p:nvGrpSpPr>
+      <p:grpSpPr>
+        <a:xfrm>
+          <a:off x="0" y="0"/>
+          <a:ext cx="0" cy="0"/>
+          <a:chOff x="0" y="0"/>
+          <a:chExt cx="0" cy="0"/>
+        </a:xfrm>
+      </p:grpSpPr>
+      <p:sp>
+        <p:nvSpPr>
+          <p:cNvPr id="2" name="Slide Image Placeholder 1">
+            <a:extLst>
+              <a:ext uri="{FF2B5EF4-FFF2-40B4-BE49-F238E27FC236}">
+                <a16:creationId xmlns:a16="http://schemas.microsoft.com/office/drawing/2014/main" id="{EC216DB3-FE59-6366-B24A-C9A9B0DCD2AE}"/>
+              </a:ext>
+            </a:extLst>
+          </p:cNvPr>
+          <p:cNvSpPr>
+            <a:spLocks noGrp="1" noRot="1" noChangeAspect="1"/>
+          </p:cNvSpPr>
+          <p:nvPr>
+            <p:ph type="sldImg"/>
+          </p:nvPr>
+        </p:nvSpPr>
+        <p:spPr/>
+      </p:sp>
+      <p:sp>
+        <p:nvSpPr>
+          <p:cNvPr id="3" name="Notes Placeholder 2">
+            <a:extLst>
+              <a:ext uri="{FF2B5EF4-FFF2-40B4-BE49-F238E27FC236}">
+                <a16:creationId xmlns:a16="http://schemas.microsoft.com/office/drawing/2014/main" id="{7D765345-4BD1-7350-DD5A-80795B0EB808}"/>
+              </a:ext>
+            </a:extLst>
+          </p:cNvPr>
+          <p:cNvSpPr>
+            <a:spLocks noGrp="1"/>
+          </p:cNvSpPr>
+          <p:nvPr>
+            <p:ph type="body" idx="1"/>
+          </p:nvPr>
+        </p:nvSpPr>
+        <p:spPr/>
+        <p:txBody>
+          <a:bodyPr/>
+          <a:lstStyle/>
+          <a:p>
+            <a:r>
+              <a:rPr lang="ja-JP" dirty="0"/>
+              <a:t>この「2クラスに絞る」という部分は共通にして、そこから先の当てはめ方を3通り試しました。1つ目は基準となる2クラスLIMEで、2クラスの確率比qを、そのまま通常のLIMEと同じRidge回帰で学習する、一番シンプルな方法です。2つ目のContrastiveは、回帰する対象を比ではなく対数比 log(p1/p2) に変えたもので、3つ目のOVO Logisticは、損失関数を二乗誤差ではなく交差エントロピーに変えたものです。なぜ2つも追加したのかというと、2クラスLIMEを基準にして、Contrastiveでは何を回帰するかを、OVO Logisticではどんな損失で学習するかを、それぞれ1か所だけ変えて比較するためです。こうすることで、単に手法を増やしたのではなく、どの工夫がどれだけ効いているかを切り分けて確認できるようにしています。</a:t>
+            </a:r>
+          </a:p>
+        </p:txBody>
+      </p:sp>
+      <p:sp>
+        <p:nvSpPr>
+          <p:cNvPr id="4" name="Slide Number Placeholder 3">
+            <a:extLst>
+              <a:ext uri="{FF2B5EF4-FFF2-40B4-BE49-F238E27FC236}">
+                <a16:creationId xmlns:a16="http://schemas.microsoft.com/office/drawing/2014/main" id="{56B9496E-5127-5FF8-CCBC-AB216CB404A5}"/>
+              </a:ext>
+            </a:extLst>
+          </p:cNvPr>
+          <p:cNvSpPr>
+            <a:spLocks noGrp="1"/>
+          </p:cNvSpPr>
+          <p:nvPr>
+            <p:ph type="sldNum" idx="5"/>
+          </p:nvPr>
+        </p:nvSpPr>
+        <p:spPr/>
+        <p:txBody>
+          <a:bodyPr/>
+          <a:lstStyle/>
+          <a:p>
+            <a:endParaRPr/>
+          </a:p>
+        </p:txBody>
+      </p:sp>
+    </p:spTree>
+    <p:extLst>
+      <p:ext uri="{BB962C8B-B14F-4D97-AF65-F5344CB8AC3E}">
+        <p14:creationId xmlns:p14="http://schemas.microsoft.com/office/powerpoint/2010/main" val="899921037"/>
+      </p:ext>
+    </p:extLst>
+  </p:cSld>
+  <p:clrMapOvr>
+    <a:masterClrMapping/>
+  </p:clrMapOvr>
+</p:notes>
+</file>
+
+<file path=ppt/notesSlides/notesSlide17.xml><?xml version="1.0" encoding="utf-8"?>
 <p:notes xmlns:a="http://schemas.openxmlformats.org/drawingml/2006/main" xmlns:r="http://schemas.openxmlformats.org/officeDocument/2006/relationships" xmlns:p="http://schemas.openxmlformats.org/presentationml/2006/main">
   <p:cSld>
     <p:spTree>
@@ -928,8 +942,145 @@
           <a:lstStyle/>
           <a:p>
             <a:r>
-              <a:rPr dirty="0"/>
-              <a:t>OVO Logisticは失敗扱いではなく、正則化C、サンプル数、局所幅との相互作用を今後調べる。今回の結論は合成データとTop-1/Top-2に限定。</a:t>
+              <a:rPr lang="ja-JP" dirty="0"/>
+              <a:t>それでは、実際にこの3つの方式を比較した実験の設定と結果を見ていきます。</a:t>
+            </a:r>
+          </a:p>
+        </p:txBody>
+      </p:sp>
+    </p:spTree>
+  </p:cSld>
+  <p:clrMapOvr>
+    <a:masterClrMapping/>
+  </p:clrMapOvr>
+</p:notes>
+</file>
+
+<file path=ppt/notesSlides/notesSlide18.xml><?xml version="1.0" encoding="utf-8"?>
+<p:notes xmlns:a="http://schemas.openxmlformats.org/drawingml/2006/main" xmlns:r="http://schemas.openxmlformats.org/officeDocument/2006/relationships" xmlns:p="http://schemas.openxmlformats.org/presentationml/2006/main">
+  <p:cSld>
+    <p:spTree>
+      <p:nvGrpSpPr>
+        <p:cNvPr id="1" name=""/>
+        <p:cNvGrpSpPr/>
+        <p:nvPr/>
+      </p:nvGrpSpPr>
+      <p:grpSpPr>
+        <a:xfrm>
+          <a:off x="0" y="0"/>
+          <a:ext cx="0" cy="0"/>
+          <a:chOff x="0" y="0"/>
+          <a:chExt cx="0" cy="0"/>
+        </a:xfrm>
+      </p:grpSpPr>
+      <p:sp>
+        <p:nvSpPr>
+          <p:cNvPr id="2" name="Slide Image Placeholder 1"/>
+          <p:cNvSpPr>
+            <a:spLocks noGrp="1" noRot="1" noChangeAspect="1"/>
+          </p:cNvSpPr>
+          <p:nvPr>
+            <p:ph type="sldImg"/>
+          </p:nvPr>
+        </p:nvSpPr>
+        <p:spPr/>
+      </p:sp>
+      <p:sp>
+        <p:nvSpPr>
+          <p:cNvPr id="3" name="Notes Placeholder 2"/>
+          <p:cNvSpPr>
+            <a:spLocks noGrp="1"/>
+          </p:cNvSpPr>
+          <p:nvPr>
+            <p:ph type="body" idx="1"/>
+          </p:nvPr>
+        </p:nvSpPr>
+        <p:spPr/>
+        <p:txBody>
+          <a:bodyPr/>
+          <a:lstStyle/>
+          <a:p>
+            <a:r>
+              <a:rPr lang="ja-JP" dirty="0"/>
+              <a:t>実験設定です。データは人工的に生成した多クラスのデータセットを使っています。詳しい設定は表の通りですが、ポイントだけお伝えすると、すべての手法で同じ摂動点・同じ重み付け・同じ説明対象を使って条件を揃えて比較しています。そのうえで、このあと説明する3つの観点、特徴の関連性、忠実度、計算時間を、それぞれ別の実験で測っています。</a:t>
+            </a:r>
+          </a:p>
+        </p:txBody>
+      </p:sp>
+      <p:sp>
+        <p:nvSpPr>
+          <p:cNvPr id="4" name="Slide Number Placeholder 3"/>
+          <p:cNvSpPr>
+            <a:spLocks noGrp="1"/>
+          </p:cNvSpPr>
+          <p:nvPr>
+            <p:ph type="sldNum" idx="5"/>
+          </p:nvPr>
+        </p:nvSpPr>
+        <p:spPr/>
+        <p:txBody>
+          <a:bodyPr/>
+          <a:lstStyle/>
+          <a:p>
+            <a:endParaRPr/>
+          </a:p>
+        </p:txBody>
+      </p:sp>
+    </p:spTree>
+  </p:cSld>
+  <p:clrMapOvr>
+    <a:masterClrMapping/>
+  </p:clrMapOvr>
+</p:notes>
+</file>
+
+<file path=ppt/notesSlides/notesSlide19.xml><?xml version="1.0" encoding="utf-8"?>
+<p:notes xmlns:a="http://schemas.openxmlformats.org/drawingml/2006/main" xmlns:r="http://schemas.openxmlformats.org/officeDocument/2006/relationships" xmlns:p="http://schemas.openxmlformats.org/presentationml/2006/main">
+  <p:cSld>
+    <p:spTree>
+      <p:nvGrpSpPr>
+        <p:cNvPr id="1" name=""/>
+        <p:cNvGrpSpPr/>
+        <p:nvPr/>
+      </p:nvGrpSpPr>
+      <p:grpSpPr>
+        <a:xfrm>
+          <a:off x="0" y="0"/>
+          <a:ext cx="0" cy="0"/>
+          <a:chOff x="0" y="0"/>
+          <a:chExt cx="0" cy="0"/>
+        </a:xfrm>
+      </p:grpSpPr>
+      <p:sp>
+        <p:nvSpPr>
+          <p:cNvPr id="2" name="Slide Image Placeholder 1"/>
+          <p:cNvSpPr>
+            <a:spLocks noGrp="1" noRot="1" noChangeAspect="1"/>
+          </p:cNvSpPr>
+          <p:nvPr>
+            <p:ph type="sldImg"/>
+          </p:nvPr>
+        </p:nvSpPr>
+        <p:spPr/>
+      </p:sp>
+      <p:sp>
+        <p:nvSpPr>
+          <p:cNvPr id="3" name="Notes Placeholder 2"/>
+          <p:cNvSpPr>
+            <a:spLocks noGrp="1"/>
+          </p:cNvSpPr>
+          <p:nvPr>
+            <p:ph type="body" idx="1"/>
+          </p:nvPr>
+        </p:nvSpPr>
+        <p:spPr/>
+        <p:txBody>
+          <a:bodyPr/>
+          <a:lstStyle/>
+          <a:p>
+            <a:r>
+              <a:rPr lang="ja-JP" dirty="0"/>
+              <a:t>1つ目の結果です。非線形で、特徴同士に相関があり、ノイズも含むような、やや難しいブラックボックスを使って、各説明点で「AとBの確率比を実際に動かしている、本当に重要な特徴」を、あらかじめ数値計算で正解として求めておきます。そのうえで、各手法が選んだ上位5個の特徴が、その正解と何個一致しているかを再現率として測りました。結果は、One-vs-Restが0.82なのに対して、2クラス通常LIMEが0.913、Contrastiveが0.926と、どちらも大きく上回っています。この差は6つの条件すべてで統計的にも有意でした。2クラスに絞ることで、本当に効いている特徴をより正確に選べている、ということです。</a:t>
             </a:r>
           </a:p>
         </p:txBody>
@@ -1006,35 +1157,438 @@
           <a:lstStyle/>
           <a:p>
             <a:r>
-              <a:rPr dirty="0" err="1"/>
-              <a:t>XAIはExplainable</a:t>
-            </a:r>
+              <a:rPr lang="ja-JP" dirty="0"/>
+              <a:t>発表の流れです。まずXAIとLIMEの基本をおさらいしたあと、それを多クラス分類に広げたときに出てくる課題を確認します。そのうえで関連研究を2つ紹介し、今回の提案手法、実験と考察、最後にまとめと今後の展望、という順番で進めます。</a:t>
+            </a:r>
+          </a:p>
+        </p:txBody>
+      </p:sp>
+    </p:spTree>
+  </p:cSld>
+  <p:clrMapOvr>
+    <a:masterClrMapping/>
+  </p:clrMapOvr>
+</p:notes>
+</file>
+
+<file path=ppt/notesSlides/notesSlide20.xml><?xml version="1.0" encoding="utf-8"?>
+<p:notes xmlns:a="http://schemas.openxmlformats.org/drawingml/2006/main" xmlns:r="http://schemas.openxmlformats.org/officeDocument/2006/relationships" xmlns:p="http://schemas.openxmlformats.org/presentationml/2006/main">
+  <p:cSld>
+    <p:spTree>
+      <p:nvGrpSpPr>
+        <p:cNvPr id="1" name=""/>
+        <p:cNvGrpSpPr/>
+        <p:nvPr/>
+      </p:nvGrpSpPr>
+      <p:grpSpPr>
+        <a:xfrm>
+          <a:off x="0" y="0"/>
+          <a:ext cx="0" cy="0"/>
+          <a:chOff x="0" y="0"/>
+          <a:chExt cx="0" cy="0"/>
+        </a:xfrm>
+      </p:grpSpPr>
+      <p:sp>
+        <p:nvSpPr>
+          <p:cNvPr id="2" name="Slide Image Placeholder 1"/>
+          <p:cNvSpPr>
+            <a:spLocks noGrp="1" noRot="1" noChangeAspect="1"/>
+          </p:cNvSpPr>
+          <p:nvPr>
+            <p:ph type="sldImg"/>
+          </p:nvPr>
+        </p:nvSpPr>
+        <p:spPr/>
+      </p:sp>
+      <p:sp>
+        <p:nvSpPr>
+          <p:cNvPr id="3" name="Notes Placeholder 2"/>
+          <p:cNvSpPr>
+            <a:spLocks noGrp="1"/>
+          </p:cNvSpPr>
+          <p:nvPr>
+            <p:ph type="body" idx="1"/>
+          </p:nvPr>
+        </p:nvSpPr>
+        <p:spPr/>
+        <p:txBody>
+          <a:bodyPr/>
+          <a:lstStyle/>
+          <a:p>
+            <a:r>
+              <a:rPr lang="ja-JP" dirty="0"/>
+              <a:t>2つ目は、同じブラックボックスに対して、学習には使っていない未知の摂動点400個を用意して、各手法が作った説明が「AとBどちらが優勢か」を、元のブラックボックスの判定とどれだけ一致させられるかを測ったものです。結果はOne-vs-Restが0.887、2クラス通常LIMEが0.898、Contrastiveが0.901と、こちらも6条件すべてで有意な改善はあるものの、差はだいたい1ポイントほどで、大きな差ではありません。ここで大事なのは、精度が大きく上がったというより、精度を落とさずに、さきほどの関連性の改善が得られている、という点です。</a:t>
+            </a:r>
+          </a:p>
+        </p:txBody>
+      </p:sp>
+      <p:sp>
+        <p:nvSpPr>
+          <p:cNvPr id="4" name="Slide Number Placeholder 3"/>
+          <p:cNvSpPr>
+            <a:spLocks noGrp="1"/>
+          </p:cNvSpPr>
+          <p:nvPr>
+            <p:ph type="sldNum" idx="5"/>
+          </p:nvPr>
+        </p:nvSpPr>
+        <p:spPr/>
+        <p:txBody>
+          <a:bodyPr/>
+          <a:lstStyle/>
+          <a:p>
+            <a:endParaRPr/>
+          </a:p>
+        </p:txBody>
+      </p:sp>
+    </p:spTree>
+  </p:cSld>
+  <p:clrMapOvr>
+    <a:masterClrMapping/>
+  </p:clrMapOvr>
+</p:notes>
+</file>
+
+<file path=ppt/notesSlides/notesSlide21.xml><?xml version="1.0" encoding="utf-8"?>
+<p:notes xmlns:a="http://schemas.openxmlformats.org/drawingml/2006/main" xmlns:r="http://schemas.openxmlformats.org/officeDocument/2006/relationships" xmlns:p="http://schemas.openxmlformats.org/presentationml/2006/main">
+  <p:cSld>
+    <p:spTree>
+      <p:nvGrpSpPr>
+        <p:cNvPr id="1" name=""/>
+        <p:cNvGrpSpPr/>
+        <p:nvPr/>
+      </p:nvGrpSpPr>
+      <p:grpSpPr>
+        <a:xfrm>
+          <a:off x="0" y="0"/>
+          <a:ext cx="0" cy="0"/>
+          <a:chOff x="0" y="0"/>
+          <a:chExt cx="0" cy="0"/>
+        </a:xfrm>
+      </p:grpSpPr>
+      <p:sp>
+        <p:nvSpPr>
+          <p:cNvPr id="2" name="Slide Image Placeholder 1"/>
+          <p:cNvSpPr>
+            <a:spLocks noGrp="1" noRot="1" noChangeAspect="1"/>
+          </p:cNvSpPr>
+          <p:nvPr>
+            <p:ph type="sldImg"/>
+          </p:nvPr>
+        </p:nvSpPr>
+        <p:spPr/>
+      </p:sp>
+      <p:sp>
+        <p:nvSpPr>
+          <p:cNvPr id="3" name="Notes Placeholder 2"/>
+          <p:cNvSpPr>
+            <a:spLocks noGrp="1"/>
+          </p:cNvSpPr>
+          <p:nvPr>
+            <p:ph type="body" idx="1"/>
+          </p:nvPr>
+        </p:nvSpPr>
+        <p:spPr/>
+        <p:txBody>
+          <a:bodyPr/>
+          <a:lstStyle/>
+          <a:p>
+            <a:r>
+              <a:rPr lang="ja-JP" dirty="0"/>
+              <a:t>3つ目は計算時間です。今回の提案は、予測1位と2位の1ペアだけを説明するので、クラスの数が増えても学習するモデルの数は増えません。実際、クラス数が10のとき、One-vs-Restが63.46ミリ秒かかるのに対して、2クラスLIMEとContrastiveはどちらも6.5ミリ秒程度で、約10分の1に抑えられています。</a:t>
+            </a:r>
+          </a:p>
+        </p:txBody>
+      </p:sp>
+      <p:sp>
+        <p:nvSpPr>
+          <p:cNvPr id="4" name="Slide Number Placeholder 3"/>
+          <p:cNvSpPr>
+            <a:spLocks noGrp="1"/>
+          </p:cNvSpPr>
+          <p:nvPr>
+            <p:ph type="sldNum" idx="5"/>
+          </p:nvPr>
+        </p:nvSpPr>
+        <p:spPr/>
+        <p:txBody>
+          <a:bodyPr/>
+          <a:lstStyle/>
+          <a:p>
+            <a:endParaRPr/>
+          </a:p>
+        </p:txBody>
+      </p:sp>
+    </p:spTree>
+  </p:cSld>
+  <p:clrMapOvr>
+    <a:masterClrMapping/>
+  </p:clrMapOvr>
+</p:notes>
+</file>
+
+<file path=ppt/notesSlides/notesSlide22.xml><?xml version="1.0" encoding="utf-8"?>
+<p:notes xmlns:a="http://schemas.openxmlformats.org/drawingml/2006/main" xmlns:r="http://schemas.openxmlformats.org/officeDocument/2006/relationships" xmlns:p="http://schemas.openxmlformats.org/presentationml/2006/main">
+  <p:cSld>
+    <p:spTree>
+      <p:nvGrpSpPr>
+        <p:cNvPr id="1" name=""/>
+        <p:cNvGrpSpPr/>
+        <p:nvPr/>
+      </p:nvGrpSpPr>
+      <p:grpSpPr>
+        <a:xfrm>
+          <a:off x="0" y="0"/>
+          <a:ext cx="0" cy="0"/>
+          <a:chOff x="0" y="0"/>
+          <a:chExt cx="0" cy="0"/>
+        </a:xfrm>
+      </p:grpSpPr>
+      <p:sp>
+        <p:nvSpPr>
+          <p:cNvPr id="2" name="Slide Image Placeholder 1"/>
+          <p:cNvSpPr>
+            <a:spLocks noGrp="1" noRot="1" noChangeAspect="1"/>
+          </p:cNvSpPr>
+          <p:nvPr>
+            <p:ph type="sldImg"/>
+          </p:nvPr>
+        </p:nvSpPr>
+        <p:spPr/>
+      </p:sp>
+      <p:sp>
+        <p:nvSpPr>
+          <p:cNvPr id="3" name="Notes Placeholder 2"/>
+          <p:cNvSpPr>
+            <a:spLocks noGrp="1"/>
+          </p:cNvSpPr>
+          <p:nvPr>
+            <p:ph type="body" idx="1"/>
+          </p:nvPr>
+        </p:nvSpPr>
+        <p:spPr/>
+        <p:txBody>
+          <a:bodyPr/>
+          <a:lstStyle/>
+          <a:p>
+            <a:r>
+              <a:rPr lang="ja-JP" dirty="0"/>
+              <a:t>最後に、これまでの結果を踏まえたまとめと、今後の展望をお話しします。</a:t>
+            </a:r>
+          </a:p>
+        </p:txBody>
+      </p:sp>
+    </p:spTree>
+  </p:cSld>
+  <p:clrMapOvr>
+    <a:masterClrMapping/>
+  </p:clrMapOvr>
+</p:notes>
+</file>
+
+<file path=ppt/notesSlides/notesSlide23.xml><?xml version="1.0" encoding="utf-8"?>
+<p:notes xmlns:a="http://schemas.openxmlformats.org/drawingml/2006/main" xmlns:r="http://schemas.openxmlformats.org/officeDocument/2006/relationships" xmlns:p="http://schemas.openxmlformats.org/presentationml/2006/main">
+  <p:cSld>
+    <p:spTree>
+      <p:nvGrpSpPr>
+        <p:cNvPr id="1" name=""/>
+        <p:cNvGrpSpPr/>
+        <p:nvPr/>
+      </p:nvGrpSpPr>
+      <p:grpSpPr>
+        <a:xfrm>
+          <a:off x="0" y="0"/>
+          <a:ext cx="0" cy="0"/>
+          <a:chOff x="0" y="0"/>
+          <a:chExt cx="0" cy="0"/>
+        </a:xfrm>
+      </p:grpSpPr>
+      <p:sp>
+        <p:nvSpPr>
+          <p:cNvPr id="2" name="Slide Image Placeholder 1"/>
+          <p:cNvSpPr>
+            <a:spLocks noGrp="1" noRot="1" noChangeAspect="1"/>
+          </p:cNvSpPr>
+          <p:nvPr>
+            <p:ph type="sldImg"/>
+          </p:nvPr>
+        </p:nvSpPr>
+        <p:spPr/>
+      </p:sp>
+      <p:sp>
+        <p:nvSpPr>
+          <p:cNvPr id="3" name="Notes Placeholder 2"/>
+          <p:cNvSpPr>
+            <a:spLocks noGrp="1"/>
+          </p:cNvSpPr>
+          <p:nvPr>
+            <p:ph type="body" idx="1"/>
+          </p:nvPr>
+        </p:nvSpPr>
+        <p:spPr/>
+        <p:txBody>
+          <a:bodyPr/>
+          <a:lstStyle/>
+          <a:p>
+            <a:r>
+              <a:rPr lang="ja-JP" dirty="0"/>
+              <a:t>まとめです。今回の提案の一番の価値は、Aとその他全部ではなく、実際に競合しているAとBという2つのクラスに対して、直接説明を出せるようになったことだと考えています。しかも、それでいて忠実度は従来のOne-vs-Restより落ちていません。むしろわずかに改善していて、加えて計算時間はクラス数が増えてもほぼ変わらない、という結果になりました。今後の展望としては、まず、この解釈性の向上を「分かりやすくなった」という言葉だけで終わらせず、定量的に測る方法を検討したいと考えています。例えば、人に実際に説明を見てもらって、理解のしやすさを評価してもらう、といった方向です。それ以外にも、今回は人工データでの検証だったので、実データでの検証や、競合するクラスがTop-2以外だったり、入力によって競合クラスが変わったりする場合への対応も、今後の課題として取り組んでいきたいと思います。以上で発表を終わります。ご清聴ありがとうございました。</a:t>
+            </a:r>
+          </a:p>
+        </p:txBody>
+      </p:sp>
+      <p:sp>
+        <p:nvSpPr>
+          <p:cNvPr id="4" name="Slide Number Placeholder 3"/>
+          <p:cNvSpPr>
+            <a:spLocks noGrp="1"/>
+          </p:cNvSpPr>
+          <p:nvPr>
+            <p:ph type="sldNum" idx="5"/>
+          </p:nvPr>
+        </p:nvSpPr>
+        <p:spPr/>
+        <p:txBody>
+          <a:bodyPr/>
+          <a:lstStyle/>
+          <a:p>
+            <a:endParaRPr/>
+          </a:p>
+        </p:txBody>
+      </p:sp>
+    </p:spTree>
+  </p:cSld>
+  <p:clrMapOvr>
+    <a:masterClrMapping/>
+  </p:clrMapOvr>
+</p:notes>
+</file>
+
+<file path=ppt/notesSlides/notesSlide24.xml><?xml version="1.0" encoding="utf-8"?>
+<p:notes xmlns:a="http://schemas.openxmlformats.org/drawingml/2006/main" xmlns:r="http://schemas.openxmlformats.org/officeDocument/2006/relationships" xmlns:p="http://schemas.openxmlformats.org/presentationml/2006/main">
+  <p:cSld>
+    <p:spTree>
+      <p:nvGrpSpPr>
+        <p:cNvPr id="1" name=""/>
+        <p:cNvGrpSpPr/>
+        <p:nvPr/>
+      </p:nvGrpSpPr>
+      <p:grpSpPr>
+        <a:xfrm>
+          <a:off x="0" y="0"/>
+          <a:ext cx="0" cy="0"/>
+          <a:chOff x="0" y="0"/>
+          <a:chExt cx="0" cy="0"/>
+        </a:xfrm>
+      </p:grpSpPr>
+      <p:sp>
+        <p:nvSpPr>
+          <p:cNvPr id="2" name="Slide Image Placeholder 1"/>
+          <p:cNvSpPr>
+            <a:spLocks noGrp="1" noRot="1" noChangeAspect="1"/>
+          </p:cNvSpPr>
+          <p:nvPr>
+            <p:ph type="sldImg"/>
+          </p:nvPr>
+        </p:nvSpPr>
+        <p:spPr/>
+      </p:sp>
+      <p:sp>
+        <p:nvSpPr>
+          <p:cNvPr id="3" name="Notes Placeholder 2"/>
+          <p:cNvSpPr>
+            <a:spLocks noGrp="1"/>
+          </p:cNvSpPr>
+          <p:nvPr>
+            <p:ph type="body" idx="1"/>
+          </p:nvPr>
+        </p:nvSpPr>
+        <p:spPr/>
+        <p:txBody>
+          <a:bodyPr/>
+          <a:lstStyle/>
+          <a:p>
             <a:r>
               <a:rPr dirty="0"/>
-              <a:t> Artificial Intelligenceの略。予測値だけでは分からない判断根拠を示し、予測の確認だけでなく、モデルが本質的でない特徴を学んでいないかを調べるデバッグにも役立つ。図の値は実験結果ではなく模式例。</a:t>
-            </a:r>
-          </a:p>
-          <a:p>
-            <a:endParaRPr dirty="0"/>
-          </a:p>
+              <a:t>説明時は、OVRとpairwiseが異なる問いへ答える点を明示する。解釈性を断定せず、既知の真値に対する特徴関連性が改善したと述べる。</a:t>
+            </a:r>
+          </a:p>
+        </p:txBody>
+      </p:sp>
+      <p:sp>
+        <p:nvSpPr>
+          <p:cNvPr id="4" name="Slide Number Placeholder 3"/>
+          <p:cNvSpPr>
+            <a:spLocks noGrp="1"/>
+          </p:cNvSpPr>
+          <p:nvPr>
+            <p:ph type="sldNum" idx="5"/>
+          </p:nvPr>
+        </p:nvSpPr>
+        <p:spPr/>
+        <p:txBody>
+          <a:bodyPr/>
+          <a:lstStyle/>
+          <a:p>
+            <a:endParaRPr/>
+          </a:p>
+        </p:txBody>
+      </p:sp>
+    </p:spTree>
+  </p:cSld>
+  <p:clrMapOvr>
+    <a:masterClrMapping/>
+  </p:clrMapOvr>
+</p:notes>
+</file>
+
+<file path=ppt/notesSlides/notesSlide25.xml><?xml version="1.0" encoding="utf-8"?>
+<p:notes xmlns:a="http://schemas.openxmlformats.org/drawingml/2006/main" xmlns:r="http://schemas.openxmlformats.org/officeDocument/2006/relationships" xmlns:p="http://schemas.openxmlformats.org/presentationml/2006/main">
+  <p:cSld>
+    <p:spTree>
+      <p:nvGrpSpPr>
+        <p:cNvPr id="1" name=""/>
+        <p:cNvGrpSpPr/>
+        <p:nvPr/>
+      </p:nvGrpSpPr>
+      <p:grpSpPr>
+        <a:xfrm>
+          <a:off x="0" y="0"/>
+          <a:ext cx="0" cy="0"/>
+          <a:chOff x="0" y="0"/>
+          <a:chExt cx="0" cy="0"/>
+        </a:xfrm>
+      </p:grpSpPr>
+      <p:sp>
+        <p:nvSpPr>
+          <p:cNvPr id="2" name="Slide Image Placeholder 1"/>
+          <p:cNvSpPr>
+            <a:spLocks noGrp="1" noRot="1" noChangeAspect="1"/>
+          </p:cNvSpPr>
+          <p:nvPr>
+            <p:ph type="sldImg"/>
+          </p:nvPr>
+        </p:nvSpPr>
+        <p:spPr/>
+      </p:sp>
+      <p:sp>
+        <p:nvSpPr>
+          <p:cNvPr id="3" name="Notes Placeholder 2"/>
+          <p:cNvSpPr>
+            <a:spLocks noGrp="1"/>
+          </p:cNvSpPr>
+          <p:nvPr>
+            <p:ph type="body" idx="1"/>
+          </p:nvPr>
+        </p:nvSpPr>
+        <p:spPr/>
+        <p:txBody>
+          <a:bodyPr/>
+          <a:lstStyle/>
           <a:p>
             <a:r>
               <a:rPr dirty="0"/>
-              <a:t>[Sources]</a:t>
-            </a:r>
-          </a:p>
-          <a:p>
-            <a:r>
-              <a:rPr dirty="0"/>
-              <a:t>- https://</a:t>
-            </a:r>
-            <a:r>
-              <a:rPr dirty="0" err="1"/>
-              <a:t>arxiv.org</a:t>
-            </a:r>
-            <a:r>
-              <a:rPr dirty="0"/>
-              <a:t>/abs/1602.04938</a:t>
+              <a:t>OVO Logisticは失敗扱いではなく、正則化C、サンプル数、局所幅との相互作用を今後調べる。今回の結論は合成データとTop-1/Top-2に限定。</a:t>
             </a:r>
           </a:p>
         </p:txBody>
@@ -1067,6 +1621,84 @@
 </file>
 
 <file path=ppt/notesSlides/notesSlide3.xml><?xml version="1.0" encoding="utf-8"?>
+<p:notes xmlns:a="http://schemas.openxmlformats.org/drawingml/2006/main" xmlns:r="http://schemas.openxmlformats.org/officeDocument/2006/relationships" xmlns:p="http://schemas.openxmlformats.org/presentationml/2006/main">
+  <p:cSld>
+    <p:spTree>
+      <p:nvGrpSpPr>
+        <p:cNvPr id="1" name=""/>
+        <p:cNvGrpSpPr/>
+        <p:nvPr/>
+      </p:nvGrpSpPr>
+      <p:grpSpPr>
+        <a:xfrm>
+          <a:off x="0" y="0"/>
+          <a:ext cx="0" cy="0"/>
+          <a:chOff x="0" y="0"/>
+          <a:chExt cx="0" cy="0"/>
+        </a:xfrm>
+      </p:grpSpPr>
+      <p:sp>
+        <p:nvSpPr>
+          <p:cNvPr id="2" name="Slide Image Placeholder 1"/>
+          <p:cNvSpPr>
+            <a:spLocks noGrp="1" noRot="1" noChangeAspect="1"/>
+          </p:cNvSpPr>
+          <p:nvPr>
+            <p:ph type="sldImg"/>
+          </p:nvPr>
+        </p:nvSpPr>
+        <p:spPr/>
+      </p:sp>
+      <p:sp>
+        <p:nvSpPr>
+          <p:cNvPr id="3" name="Notes Placeholder 2"/>
+          <p:cNvSpPr>
+            <a:spLocks noGrp="1"/>
+          </p:cNvSpPr>
+          <p:nvPr>
+            <p:ph type="body" idx="1"/>
+          </p:nvPr>
+        </p:nvSpPr>
+        <p:spPr/>
+        <p:txBody>
+          <a:bodyPr/>
+          <a:lstStyle/>
+          <a:p>
+            <a:r>
+              <a:rPr lang="ja-JP" dirty="0"/>
+              <a:t>まず、なぜXAI、説明可能なAIが必要かという話からです。ニューラルネットワークやランダムフォレストのような複雑なモデルは、精度は高いのですが、「なぜその予測になったのか」を人が理解するのはほぼ不可能です。予測精度と解釈可能性はトレードオフの関係にあると言われていて、医療や金融のように判断の根拠を説明する責任がある現場では、この解釈可能性がとても重要になります。</a:t>
+            </a:r>
+          </a:p>
+        </p:txBody>
+      </p:sp>
+      <p:sp>
+        <p:nvSpPr>
+          <p:cNvPr id="4" name="Slide Number Placeholder 3"/>
+          <p:cNvSpPr>
+            <a:spLocks noGrp="1"/>
+          </p:cNvSpPr>
+          <p:nvPr>
+            <p:ph type="sldNum" idx="5"/>
+          </p:nvPr>
+        </p:nvSpPr>
+        <p:spPr/>
+        <p:txBody>
+          <a:bodyPr/>
+          <a:lstStyle/>
+          <a:p>
+            <a:endParaRPr/>
+          </a:p>
+        </p:txBody>
+      </p:sp>
+    </p:spTree>
+  </p:cSld>
+  <p:clrMapOvr>
+    <a:masterClrMapping/>
+  </p:clrMapOvr>
+</p:notes>
+</file>
+
+<file path=ppt/notesSlides/notesSlide4.xml><?xml version="1.0" encoding="utf-8"?>
 <p:notes xmlns:a="http://schemas.openxmlformats.org/drawingml/2006/main" xmlns:r="http://schemas.openxmlformats.org/officeDocument/2006/relationships" xmlns:p="http://schemas.openxmlformats.org/presentationml/2006/main">
   <p:cSld>
     <p:spTree>
@@ -1129,35 +1761,8 @@
           <a:lstStyle/>
           <a:p>
             <a:r>
-              <a:rPr dirty="0" err="1"/>
-              <a:t>XAIはExplainable</a:t>
-            </a:r>
-            <a:r>
-              <a:rPr dirty="0"/>
-              <a:t> Artificial Intelligenceの略。予測値だけでは分からない判断根拠を示し、予測の確認だけでなく、モデルが本質的でない特徴を学んでいないかを調べるデバッグにも役立つ。図の値は実験結果ではなく模式例。</a:t>
-            </a:r>
-          </a:p>
-          <a:p>
-            <a:endParaRPr dirty="0"/>
-          </a:p>
-          <a:p>
-            <a:r>
-              <a:rPr dirty="0"/>
-              <a:t>[Sources]</a:t>
-            </a:r>
-          </a:p>
-          <a:p>
-            <a:r>
-              <a:rPr dirty="0"/>
-              <a:t>- https://</a:t>
-            </a:r>
-            <a:r>
-              <a:rPr dirty="0" err="1"/>
-              <a:t>arxiv.org</a:t>
-            </a:r>
-            <a:r>
-              <a:rPr dirty="0"/>
-              <a:t>/abs/1602.04938</a:t>
+              <a:rPr lang="ja-JP" dirty="0"/>
+              <a:t>XAIは、このブラックボックスの中身を覗かずに、「なぜその判断に至ったのか」を後から説明するための技術です。使い道は大きく2つあって、1つは予測の理由を人に見せて納得してもらうこと、もう1つはモデルが誤った学習をしていないかをチェックするデバッグです。有名な例として、ハスキー犬と狼を見分けるモデルが、実は犬自体ではなく背景の雪を見て判断していた、という話があります。精度は高くても、モデルが本質的でない特徴を学習してしまっていた例で、XAIがあればこうした誤学習にも気づくことができます。</a:t>
             </a:r>
           </a:p>
         </p:txBody>
@@ -1193,132 +1798,6 @@
         <p14:creationId xmlns:p14="http://schemas.microsoft.com/office/powerpoint/2010/main" val="2969378689"/>
       </p:ext>
     </p:extLst>
-  </p:cSld>
-  <p:clrMapOvr>
-    <a:masterClrMapping/>
-  </p:clrMapOvr>
-</p:notes>
-</file>
-
-<file path=ppt/notesSlides/notesSlide4.xml><?xml version="1.0" encoding="utf-8"?>
-<p:notes xmlns:a="http://schemas.openxmlformats.org/drawingml/2006/main" xmlns:r="http://schemas.openxmlformats.org/officeDocument/2006/relationships" xmlns:p="http://schemas.openxmlformats.org/presentationml/2006/main">
-  <p:cSld>
-    <p:spTree>
-      <p:nvGrpSpPr>
-        <p:cNvPr id="1" name=""/>
-        <p:cNvGrpSpPr/>
-        <p:nvPr/>
-      </p:nvGrpSpPr>
-      <p:grpSpPr>
-        <a:xfrm>
-          <a:off x="0" y="0"/>
-          <a:ext cx="0" cy="0"/>
-          <a:chOff x="0" y="0"/>
-          <a:chExt cx="0" cy="0"/>
-        </a:xfrm>
-      </p:grpSpPr>
-      <p:sp>
-        <p:nvSpPr>
-          <p:cNvPr id="2" name="Slide Image Placeholder 1"/>
-          <p:cNvSpPr>
-            <a:spLocks noGrp="1" noRot="1" noChangeAspect="1"/>
-          </p:cNvSpPr>
-          <p:nvPr>
-            <p:ph type="sldImg"/>
-          </p:nvPr>
-        </p:nvSpPr>
-        <p:spPr/>
-      </p:sp>
-      <p:sp>
-        <p:nvSpPr>
-          <p:cNvPr id="3" name="Notes Placeholder 2"/>
-          <p:cNvSpPr>
-            <a:spLocks noGrp="1"/>
-          </p:cNvSpPr>
-          <p:nvPr>
-            <p:ph type="body" idx="1"/>
-          </p:nvPr>
-        </p:nvSpPr>
-        <p:spPr/>
-        <p:txBody>
-          <a:bodyPr/>
-          <a:lstStyle/>
-          <a:p>
-            <a:r>
-              <a:rPr dirty="0"/>
-              <a:t>LIMEはブラックボックス全体を一本の単純なモデルに置き換えるのではない。説明対象の入力周辺だけに重みを置き、その狭い範囲で元モデルと似た出力を返す解釈可能なモデルを学習する。したがって説明は局所的であり、別の入力では別の説明になりうる。</a:t>
-            </a:r>
-          </a:p>
-          <a:p>
-            <a:endParaRPr dirty="0"/>
-          </a:p>
-          <a:p>
-            <a:r>
-              <a:rPr dirty="0"/>
-              <a:t>[Sources]</a:t>
-            </a:r>
-          </a:p>
-          <a:p>
-            <a:r>
-              <a:rPr dirty="0"/>
-              <a:t>- https://</a:t>
-            </a:r>
-            <a:r>
-              <a:rPr dirty="0" err="1"/>
-              <a:t>arxiv.org</a:t>
-            </a:r>
-            <a:r>
-              <a:rPr dirty="0"/>
-              <a:t>/abs/1602.04938</a:t>
-            </a:r>
-          </a:p>
-          <a:p>
-            <a:r>
-              <a:rPr dirty="0"/>
-              <a:t>
-[Sources]
-- Ribeiro, Singh &amp; </a:t>
-            </a:r>
-            <a:r>
-              <a:rPr dirty="0" err="1"/>
-              <a:t>Guestrin</a:t>
-            </a:r>
-            <a:r>
-              <a:rPr dirty="0"/>
-              <a:t>, ‘Why Should I Trust You?’, KDD 2016（LIMEの概念的根拠）
-- Open Design Local </a:t>
-            </a:r>
-            <a:r>
-              <a:rPr dirty="0" err="1"/>
-              <a:t>Codexで作成した模式図。実験結果ではない</a:t>
-            </a:r>
-            <a:r>
-              <a:rPr dirty="0"/>
-              <a:t>。</a:t>
-            </a:r>
-          </a:p>
-        </p:txBody>
-      </p:sp>
-      <p:sp>
-        <p:nvSpPr>
-          <p:cNvPr id="4" name="Slide Number Placeholder 3"/>
-          <p:cNvSpPr>
-            <a:spLocks noGrp="1"/>
-          </p:cNvSpPr>
-          <p:nvPr>
-            <p:ph type="sldNum" idx="5"/>
-          </p:nvPr>
-        </p:nvSpPr>
-        <p:spPr/>
-        <p:txBody>
-          <a:bodyPr/>
-          <a:lstStyle/>
-          <a:p>
-            <a:endParaRPr/>
-          </a:p>
-        </p:txBody>
-      </p:sp>
-    </p:spTree>
   </p:cSld>
   <p:clrMapOvr>
     <a:masterClrMapping/>
@@ -1371,73 +1850,9 @@
           <a:lstStyle/>
           <a:p>
             <a:r>
-              <a:rPr dirty="0"/>
-              <a:t>1件の入力を選び、周辺に人工サンプルを生成し、ブラックボックスの予測を取得する。元の入力に近いサンプルほど強く重み付けし、少数の特徴を使う局所モデルを学習する。目的関数の第1項は局所的な予測のずれ、第2項は説明モデルの複雑さを表す。</a:t>
-            </a:r>
-          </a:p>
-          <a:p>
-            <a:endParaRPr dirty="0"/>
-          </a:p>
-          <a:p>
-            <a:r>
-              <a:rPr dirty="0"/>
-              <a:t>[Sources]</a:t>
-            </a:r>
-          </a:p>
-          <a:p>
-            <a:r>
-              <a:rPr dirty="0"/>
-              <a:t>- https://</a:t>
-            </a:r>
-            <a:r>
-              <a:rPr dirty="0" err="1"/>
-              <a:t>arxiv.org</a:t>
-            </a:r>
-            <a:r>
-              <a:rPr dirty="0"/>
-              <a:t>/abs/1602.04938</a:t>
-            </a:r>
-          </a:p>
-          <a:p>
-            <a:r>
-              <a:rPr dirty="0"/>
-              <a:t>- https://</a:t>
-            </a:r>
-            <a:r>
-              <a:rPr dirty="0" err="1"/>
-              <a:t>github.com</a:t>
-            </a:r>
-            <a:r>
-              <a:rPr dirty="0"/>
-              <a:t>/</a:t>
-            </a:r>
-            <a:r>
-              <a:rPr dirty="0" err="1"/>
-              <a:t>marcotcr</a:t>
-            </a:r>
-            <a:r>
-              <a:rPr dirty="0"/>
-              <a:t>/lime</a:t>
-            </a:r>
-          </a:p>
-        </p:txBody>
-      </p:sp>
-      <p:sp>
-        <p:nvSpPr>
-          <p:cNvPr id="4" name="Slide Number Placeholder 3"/>
-          <p:cNvSpPr>
-            <a:spLocks noGrp="1"/>
-          </p:cNvSpPr>
-          <p:nvPr>
-            <p:ph type="sldNum" idx="5"/>
-          </p:nvPr>
-        </p:nvSpPr>
-        <p:spPr/>
-        <p:txBody>
-          <a:bodyPr/>
-          <a:lstStyle/>
-          <a:p>
-            <a:endParaRPr/>
+              <a:rPr lang="ja-JP" dirty="0"/>
+              <a:t>それでは、代表的なXAI手法の一つであるLIMEについて見ていきます。</a:t>
+            </a:r>
           </a:p>
         </p:txBody>
       </p:sp>
@@ -1495,7 +1910,7 @@
           <a:p>
             <a:r>
               <a:rPr dirty="0"/>
-              <a:t>ここで初めて多クラス分類へ広げる。one-vs-restは各クラスについて、そのクラス対その他という二値問題を作る代表的な多クラス化戦略。LIMEも多クラス分類器へ適用できるが、指定したラベルの確率列をクラスごとに別々に近似する。近傍は共有できても、局所モデルと特徴選択は別々になる。</a:t>
+              <a:t>LIMEはブラックボックス全体を一本の単純なモデルに置き換えるのではない。説明対象の入力周辺だけに重みを置き、その狭い範囲で元モデルと似た出力を返す解釈可能なモデルを学習する。したがって説明は局所的であり、別の入力では別の説明になりうる。</a:t>
             </a:r>
           </a:p>
           <a:p>
@@ -1524,48 +1939,27 @@
           <a:p>
             <a:r>
               <a:rPr dirty="0"/>
-              <a:t>- https://</a:t>
+              <a:t>
+[Sources]
+- Ribeiro, Singh &amp; </a:t>
             </a:r>
             <a:r>
               <a:rPr dirty="0" err="1"/>
-              <a:t>github.com</a:t>
+              <a:t>Guestrin</a:t>
             </a:r>
             <a:r>
               <a:rPr dirty="0"/>
-              <a:t>/</a:t>
+              <a:t>, ‘Why Should I Trust You?’, KDD 2016（LIMEの概念的根拠）
+- Open Design Local </a:t>
             </a:r>
             <a:r>
               <a:rPr dirty="0" err="1"/>
-              <a:t>marcotcr</a:t>
+              <a:t>Codexで作成した模式図。実験結果ではない</a:t>
             </a:r>
             <a:r>
               <a:rPr dirty="0"/>
-              <a:t>/lime/blob/master/lime/</a:t>
-            </a:r>
-            <a:r>
-              <a:rPr dirty="0" err="1"/>
-              <a:t>lime_base.py</a:t>
-            </a:r>
-            <a:endParaRPr dirty="0"/>
-          </a:p>
-          <a:p>
-            <a:r>
-              <a:rPr dirty="0"/>
-              <a:t>- https://scikit-</a:t>
-            </a:r>
-            <a:r>
-              <a:rPr dirty="0" err="1"/>
-              <a:t>learn.org</a:t>
-            </a:r>
-            <a:r>
-              <a:rPr dirty="0"/>
-              <a:t>/stable/modules/generated/</a:t>
-            </a:r>
-            <a:r>
-              <a:rPr dirty="0" err="1"/>
-              <a:t>sklearn.multiclass.OneVsRestClassifier.html</a:t>
-            </a:r>
-            <a:endParaRPr dirty="0"/>
+              <a:t>。</a:t>
+            </a:r>
           </a:p>
         </p:txBody>
       </p:sp>
@@ -1584,7 +1978,10 @@
           <a:bodyPr/>
           <a:lstStyle/>
           <a:p>
-            <a:endParaRPr/>
+            <a:r>
+              <a:rPr lang="ja-JP" dirty="0"/>
+              <a:t>LIMEは、Local Interpretable Model-agnostic Explanationsの略で、モデルの中身を見ずに、入力と出力の対応関係だけから説明を作る手法です。ポイントは「局所的」というところで、複雑なモデル全体を一つの単純なモデルに置き換えるのではなく、説明したい1点の周りだけを、単純な直線のようなモデル、サロゲートモデルで近似します。狭い範囲に限れば、複雑な曲線も直線でだいたい近似できる、というイメージです。</a:t>
+            </a:r>
           </a:p>
         </p:txBody>
       </p:sp>
@@ -1641,31 +2038,8 @@
           <a:lstStyle/>
           <a:p>
             <a:r>
-              <a:rPr dirty="0"/>
-              <a:t>クラス別の説明それぞれには意味がある。しかし、クラスごとに選ばれる特徴、順位、符号が異なると、利用者は複数の説明を横断してAとBの違いを組み立てなければならない。ここで問題にしているのは数理的な矛盾ではなく、多クラス全体を読む負担である。</a:t>
-            </a:r>
-          </a:p>
-          <a:p>
-            <a:endParaRPr dirty="0"/>
-          </a:p>
-          <a:p>
-            <a:r>
-              <a:rPr dirty="0"/>
-              <a:t>[Sources]</a:t>
-            </a:r>
-          </a:p>
-          <a:p>
-            <a:r>
-              <a:rPr dirty="0"/>
-              <a:t>- https://</a:t>
-            </a:r>
-            <a:r>
-              <a:rPr dirty="0" err="1"/>
-              <a:t>arxiv.org</a:t>
-            </a:r>
-            <a:r>
-              <a:rPr dirty="0"/>
-              <a:t>/abs/2005.01427</a:t>
+              <a:rPr lang="ja-JP" dirty="0"/>
+              <a:t>具体的な手順は5つのステップです。まず説明したい入力を1つ選びます。次に、その周りにランダムな摂動を加えたサンプルをたくさん作ります。それぞれのサンプルをブラックボックスモデルに入れて予測を得ます。元の入力に近いサンプルほど強く重み付けをして、最後に、少数の特徴だけを使う単純な局所モデルを学習します。目的関数は2つの項からできていて、1つ目は元のモデルの予測をどれだけ再現できているか、2つ目は使う特徴の数をどれだけ絞れているかという単純さのペナルティです。この2つのバランスを取って学習します。</a:t>
             </a:r>
           </a:p>
         </p:txBody>
@@ -1716,7 +2090,7 @@
       </p:grpSpPr>
       <p:sp>
         <p:nvSpPr>
-          <p:cNvPr id="2" name="スライド イメージ プレースホルダー 1"/>
+          <p:cNvPr id="2" name="Slide Image Placeholder 1"/>
           <p:cNvSpPr>
             <a:spLocks noGrp="1" noRot="1" noChangeAspect="1"/>
           </p:cNvSpPr>
@@ -1728,7 +2102,7 @@
       </p:sp>
       <p:sp>
         <p:nvSpPr>
-          <p:cNvPr id="3" name="ノート プレースホルダー 2"/>
+          <p:cNvPr id="3" name="Notes Placeholder 2"/>
           <p:cNvSpPr>
             <a:spLocks noGrp="1"/>
           </p:cNvSpPr>
@@ -1741,35 +2115,14 @@
           <a:bodyPr/>
           <a:lstStyle/>
           <a:p>
-            <a:endParaRPr kumimoji="1" lang="ja-JP" altLang="en-US"/>
-          </a:p>
-        </p:txBody>
-      </p:sp>
-      <p:sp>
-        <p:nvSpPr>
-          <p:cNvPr id="4" name="スライド番号プレースホルダー 3"/>
-          <p:cNvSpPr>
-            <a:spLocks noGrp="1"/>
-          </p:cNvSpPr>
-          <p:nvPr>
-            <p:ph type="sldNum" sz="quarter" idx="5"/>
-          </p:nvPr>
-        </p:nvSpPr>
-        <p:spPr/>
-        <p:txBody>
-          <a:bodyPr/>
-          <a:lstStyle/>
-          <a:p>
-            <a:endParaRPr lang="ja-JP" altLang="en-US"/>
+            <a:r>
+              <a:rPr lang="ja-JP" dirty="0"/>
+              <a:t>ここまでは2値分類、つまりクラスが2つの場合の話でした。ここからは、クラスが3つ以上ある多クラス分類にLIMEを広げたときの話に入ります。</a:t>
+            </a:r>
           </a:p>
         </p:txBody>
       </p:sp>
     </p:spTree>
-    <p:extLst>
-      <p:ext uri="{BB962C8B-B14F-4D97-AF65-F5344CB8AC3E}">
-        <p14:creationId xmlns:p14="http://schemas.microsoft.com/office/powerpoint/2010/main" val="1149279096"/>
-      </p:ext>
-    </p:extLst>
   </p:cSld>
   <p:clrMapOvr>
     <a:masterClrMapping/>
@@ -1782,13 +2135,7 @@
   <p:cSld>
     <p:spTree>
       <p:nvGrpSpPr>
-        <p:cNvPr id="1" name="">
-          <a:extLst>
-            <a:ext uri="{FF2B5EF4-FFF2-40B4-BE49-F238E27FC236}">
-              <a16:creationId xmlns:a16="http://schemas.microsoft.com/office/drawing/2014/main" id="{C37FA4D1-27DC-75CE-FA2C-FAE76CABB1FD}"/>
-            </a:ext>
-          </a:extLst>
-        </p:cNvPr>
+        <p:cNvPr id="1" name=""/>
         <p:cNvGrpSpPr/>
         <p:nvPr/>
       </p:nvGrpSpPr>
@@ -1802,13 +2149,7 @@
       </p:grpSpPr>
       <p:sp>
         <p:nvSpPr>
-          <p:cNvPr id="2" name="Slide Image Placeholder 1">
-            <a:extLst>
-              <a:ext uri="{FF2B5EF4-FFF2-40B4-BE49-F238E27FC236}">
-                <a16:creationId xmlns:a16="http://schemas.microsoft.com/office/drawing/2014/main" id="{EC216DB3-FE59-6366-B24A-C9A9B0DCD2AE}"/>
-              </a:ext>
-            </a:extLst>
-          </p:cNvPr>
+          <p:cNvPr id="2" name="Slide Image Placeholder 1"/>
           <p:cNvSpPr>
             <a:spLocks noGrp="1" noRot="1" noChangeAspect="1"/>
           </p:cNvSpPr>
@@ -1820,13 +2161,7 @@
       </p:sp>
       <p:sp>
         <p:nvSpPr>
-          <p:cNvPr id="3" name="Notes Placeholder 2">
-            <a:extLst>
-              <a:ext uri="{FF2B5EF4-FFF2-40B4-BE49-F238E27FC236}">
-                <a16:creationId xmlns:a16="http://schemas.microsoft.com/office/drawing/2014/main" id="{7D765345-4BD1-7350-DD5A-80795B0EB808}"/>
-              </a:ext>
-            </a:extLst>
-          </p:cNvPr>
+          <p:cNvPr id="3" name="Notes Placeholder 2"/>
           <p:cNvSpPr>
             <a:spLocks noGrp="1"/>
           </p:cNvSpPr>
@@ -1839,19 +2174,16 @@
           <a:bodyPr/>
           <a:lstStyle/>
           <a:p>
-            <a:endParaRPr/>
-          </a:p>
-        </p:txBody>
-      </p:sp>
-      <p:sp>
-        <p:nvSpPr>
-          <p:cNvPr id="4" name="Slide Number Placeholder 3">
-            <a:extLst>
-              <a:ext uri="{FF2B5EF4-FFF2-40B4-BE49-F238E27FC236}">
-                <a16:creationId xmlns:a16="http://schemas.microsoft.com/office/drawing/2014/main" id="{56B9496E-5127-5FF8-CCBC-AB216CB404A5}"/>
-              </a:ext>
-            </a:extLst>
-          </p:cNvPr>
+            <a:r>
+              <a:rPr lang="ja-JP" dirty="0"/>
+              <a:t>クラスが3つ以上ある場合、LIMEをそのまま使うと、one-vs-rest、一対他という考え方で拡張するのが一般的です。つまり、クラスAならA対「A以外すべて」、クラスBならB対「B以外すべて」というように、クラスの数だけ2値分類の問題を作って、それぞれに対して別々の局所モデルを学習します。近傍のサンプル自体は共有できますが、学習される説明モデルと、そこで使われる特徴は、クラスごとにバラバラになります。</a:t>
+            </a:r>
+          </a:p>
+        </p:txBody>
+      </p:sp>
+      <p:sp>
+        <p:nvSpPr>
+          <p:cNvPr id="4" name="Slide Number Placeholder 3"/>
           <p:cNvSpPr>
             <a:spLocks noGrp="1"/>
           </p:cNvSpPr>
@@ -1869,11 +2201,6 @@
         </p:txBody>
       </p:sp>
     </p:spTree>
-    <p:extLst>
-      <p:ext uri="{BB962C8B-B14F-4D97-AF65-F5344CB8AC3E}">
-        <p14:creationId xmlns:p14="http://schemas.microsoft.com/office/powerpoint/2010/main" val="899921037"/>
-      </p:ext>
-    </p:extLst>
   </p:cSld>
   <p:clrMapOvr>
     <a:masterClrMapping/>
@@ -11077,10 +11404,10 @@
       </p:grpSpPr>
       <p:sp>
         <p:nvSpPr>
-          <p:cNvPr id="7" name="テキスト ボックス 6">
-            <a:extLst>
-              <a:ext uri="{FF2B5EF4-FFF2-40B4-BE49-F238E27FC236}">
-                <a16:creationId xmlns:a16="http://schemas.microsoft.com/office/drawing/2014/main" id="{C774CF58-B894-3797-ABAC-CED235C711A7}"/>
+          <p:cNvPr id="9" name="テキスト ボックス 8">
+            <a:extLst>
+              <a:ext uri="{FF2B5EF4-FFF2-40B4-BE49-F238E27FC236}">
+                <a16:creationId xmlns:a16="http://schemas.microsoft.com/office/drawing/2014/main" id="{DE6B293B-66F0-DA79-47F1-1D7250D55922}"/>
               </a:ext>
             </a:extLst>
           </p:cNvPr>
@@ -11089,8 +11416,8 @@
         </p:nvSpPr>
         <p:spPr>
           <a:xfrm>
-            <a:off x="800100" y="1852101"/>
-            <a:ext cx="7551683" cy="1477328"/>
+            <a:off x="0" y="6496050"/>
+            <a:ext cx="7874271" cy="415498"/>
           </a:xfrm>
           <a:prstGeom prst="rect">
             <a:avLst/>
@@ -11104,180 +11431,25 @@
           <a:lstStyle/>
           <a:p>
             <a:r>
-              <a:rPr lang="ja-JP" altLang="ja-JP"/>
-              <a:t>GANMEX</a:t>
-            </a:r>
-            <a:r>
-              <a:rPr lang="en-US" altLang="ja-JP" baseline="30000" dirty="0"/>
-              <a:t>[2]</a:t>
-            </a:r>
-            <a:endParaRPr lang="ja-JP" altLang="ja-JP" baseline="30000"/>
-          </a:p>
-          <a:p>
-            <a:r>
-              <a:rPr lang="ja-JP" altLang="ja-JP"/>
-              <a:t>One-vs-One attributionを提案</a:t>
-            </a:r>
-            <a:endParaRPr lang="en-US" altLang="ja-JP" dirty="0"/>
-          </a:p>
-          <a:p>
-            <a:r>
-              <a:rPr lang="ja-JP" altLang="ja-JP"/>
-              <a:t>特定の2クラスを比較することで</a:t>
-            </a:r>
-            <a:r>
-              <a:rPr lang="ja-JP" altLang="en-US"/>
-              <a:t>，</a:t>
-            </a:r>
-            <a:endParaRPr lang="en-US" altLang="ja-JP" dirty="0"/>
-          </a:p>
-          <a:p>
-            <a:r>
-              <a:rPr lang="ja-JP" altLang="ja-JP"/>
-              <a:t>両クラスに共通する特徴よりも</a:t>
-            </a:r>
-            <a:r>
-              <a:rPr lang="ja-JP" altLang="en-US"/>
-              <a:t>，</a:t>
-            </a:r>
-            <a:r>
-              <a:rPr lang="ja-JP" altLang="ja-JP" b="1"/>
-              <a:t>2クラスを区別する特徴</a:t>
-            </a:r>
-            <a:r>
-              <a:rPr lang="ja-JP" altLang="ja-JP"/>
-              <a:t>へ注目できる</a:t>
-            </a:r>
-          </a:p>
-          <a:p>
-            <a:endParaRPr kumimoji="1" lang="ja-JP" altLang="en-US"/>
-          </a:p>
-        </p:txBody>
-      </p:sp>
-      <p:sp>
-        <p:nvSpPr>
-          <p:cNvPr id="9" name="テキスト ボックス 8">
-            <a:extLst>
-              <a:ext uri="{FF2B5EF4-FFF2-40B4-BE49-F238E27FC236}">
-                <a16:creationId xmlns:a16="http://schemas.microsoft.com/office/drawing/2014/main" id="{DE6B293B-66F0-DA79-47F1-1D7250D55922}"/>
-              </a:ext>
-            </a:extLst>
-          </p:cNvPr>
-          <p:cNvSpPr txBox="1"/>
-          <p:nvPr/>
-        </p:nvSpPr>
-        <p:spPr>
-          <a:xfrm>
-            <a:off x="0" y="6496050"/>
-            <a:ext cx="7874271" cy="415498"/>
-          </a:xfrm>
-          <a:prstGeom prst="rect">
-            <a:avLst/>
-          </a:prstGeom>
-          <a:noFill/>
-        </p:spPr>
-        <p:txBody>
-          <a:bodyPr wrap="none" rtlCol="0">
-            <a:spAutoFit/>
-          </a:bodyPr>
-          <a:lstStyle/>
-          <a:p>
-            <a:r>
-              <a:rPr lang="en-US" altLang="ja-JP" sz="1050" dirty="0"/>
-              <a:t>[2]</a:t>
-            </a:r>
-            <a:r>
-              <a:rPr lang="ja-JP" altLang="ja-JP" sz="1050"/>
-              <a:t>P. J. Shih, C. C. Chang, and Y. J. Lee, "GANMEX: One-vs-One Attributions using GAN-based Model Explainability," </a:t>
+              <a:rPr lang="ja-JP" sz="1050" noProof="0"/>
+              <a:t>[2]P. J. Shih, C. C. Chang, and Y. J. Lee, "GANMEX: One-vs-One Attributions using GAN-based Model Explainability," </a:t>
             </a:r>
             <a:br>
-              <a:rPr lang="en-US" altLang="ja-JP" sz="1050" dirty="0"/>
+              <a:rPr lang="ja-JP" sz="1050" noProof="0"/>
             </a:br>
             <a:r>
-              <a:rPr lang="ja-JP" altLang="ja-JP" sz="1050"/>
+              <a:rPr lang="ja-JP" sz="1050" noProof="0"/>
               <a:t>in </a:t>
             </a:r>
             <a:r>
-              <a:rPr lang="ja-JP" altLang="ja-JP" sz="1050" i="1"/>
+              <a:rPr lang="ja-JP" sz="1050" i="1" noProof="0"/>
               <a:t>Proceedings of the 38th International Conference on Machine Learning</a:t>
             </a:r>
             <a:r>
-              <a:rPr lang="ja-JP" altLang="ja-JP" sz="1050"/>
+              <a:rPr lang="ja-JP" sz="1050" noProof="0"/>
               <a:t>, 2021, pp. 9545–9555.</a:t>
             </a:r>
-            <a:endParaRPr kumimoji="1" lang="ja-JP" altLang="en-US" sz="1050"/>
-          </a:p>
-        </p:txBody>
-      </p:sp>
-      <p:sp>
-        <p:nvSpPr>
-          <p:cNvPr id="11" name="テキスト ボックス 10">
-            <a:extLst>
-              <a:ext uri="{FF2B5EF4-FFF2-40B4-BE49-F238E27FC236}">
-                <a16:creationId xmlns:a16="http://schemas.microsoft.com/office/drawing/2014/main" id="{CCD6DEA1-EAE7-43B1-3DCB-F71E13B46BAF}"/>
-              </a:ext>
-            </a:extLst>
-          </p:cNvPr>
-          <p:cNvSpPr txBox="1"/>
-          <p:nvPr/>
-        </p:nvSpPr>
-        <p:spPr>
-          <a:xfrm>
-            <a:off x="819150" y="4040384"/>
-            <a:ext cx="6201569" cy="1754326"/>
-          </a:xfrm>
-          <a:prstGeom prst="rect">
-            <a:avLst/>
-          </a:prstGeom>
-          <a:noFill/>
-        </p:spPr>
-        <p:txBody>
-          <a:bodyPr wrap="none" rtlCol="0">
-            <a:spAutoFit/>
-          </a:bodyPr>
-          <a:lstStyle/>
-          <a:p>
-            <a:r>
-              <a:rPr lang="ja-JP" altLang="ja-JP"/>
-              <a:t>ただしGANMEXは、</a:t>
-            </a:r>
-            <a:endParaRPr lang="en-US" altLang="ja-JP" dirty="0"/>
-          </a:p>
-          <a:p>
-            <a:r>
-              <a:rPr lang="ja-JP" altLang="ja-JP"/>
-              <a:t>主に画像説明を対象とする</a:t>
-            </a:r>
-          </a:p>
-          <a:p>
-            <a:pPr marL="285750" indent="-285750">
-              <a:buFont typeface="Arial" panose="020B0604020202020204" pitchFamily="34" charset="0"/>
-              <a:buChar char="•"/>
-            </a:pPr>
-            <a:r>
-              <a:rPr lang="ja-JP" altLang="ja-JP"/>
-              <a:t>GANで比較対象クラスの画像を生成する</a:t>
-            </a:r>
-          </a:p>
-          <a:p>
-            <a:pPr marL="285750" indent="-285750">
-              <a:buFont typeface="Arial" panose="020B0604020202020204" pitchFamily="34" charset="0"/>
-              <a:buChar char="•"/>
-            </a:pPr>
-            <a:r>
-              <a:rPr lang="ja-JP" altLang="ja-JP"/>
-              <a:t>生成画像をattributionのベースラインにする</a:t>
-            </a:r>
-          </a:p>
-          <a:p>
-            <a:endParaRPr lang="en-US" altLang="ja-JP" b="1" dirty="0"/>
-          </a:p>
-          <a:p>
-            <a:r>
-              <a:rPr lang="ja-JP" altLang="ja-JP" b="1"/>
-              <a:t>LIMEの局所線形モデルによってOne-vs-One説明を作ること</a:t>
-            </a:r>
-            <a:endParaRPr lang="ja-JP" altLang="ja-JP"/>
+            <a:endParaRPr kumimoji="1" lang="ja-JP" sz="1050" noProof="0"/>
           </a:p>
         </p:txBody>
       </p:sp>
@@ -11317,7 +11489,7 @@
           <a:bodyPr/>
           <a:lstStyle/>
           <a:p>
-            <a:endParaRPr lang="ja-JP" noProof="1"/>
+            <a:endParaRPr lang="ja-JP" noProof="0"/>
           </a:p>
         </p:txBody>
       </p:sp>
@@ -11356,18 +11528,14 @@
           <a:lstStyle/>
           <a:p>
             <a:r>
-              <a:rPr lang="ja-JP" altLang="en-US" sz="3200"/>
-              <a:t>関連研究</a:t>
-            </a:r>
-            <a:r>
-              <a:rPr lang="en-US" altLang="ja-JP" sz="3200" dirty="0"/>
-              <a:t>① : </a:t>
-            </a:r>
-            <a:r>
-              <a:rPr lang="ja-JP" altLang="ja-JP" sz="3200" b="1"/>
+              <a:rPr lang="ja-JP" sz="3200" noProof="0"/>
+              <a:t>関連研究① : </a:t>
+            </a:r>
+            <a:r>
+              <a:rPr lang="ja-JP" sz="3200" b="1" noProof="0"/>
               <a:t>One-vs-One</a:t>
             </a:r>
-            <a:endParaRPr lang="ja-JP" altLang="en-US" sz="3200"/>
+            <a:endParaRPr lang="ja-JP" sz="3200" noProof="0"/>
           </a:p>
         </p:txBody>
       </p:sp>
@@ -11393,7 +11561,7 @@
         </p:blipFill>
         <p:spPr>
           <a:xfrm>
-            <a:off x="8299557" y="2472903"/>
+            <a:off x="8387256" y="2360135"/>
             <a:ext cx="3073293" cy="2825780"/>
           </a:xfrm>
           <a:prstGeom prst="rect">
@@ -11401,6 +11569,314 @@
           </a:prstGeom>
         </p:spPr>
       </p:pic>
+      <p:sp>
+        <p:nvSpPr>
+          <p:cNvPr id="951" name="card-header"/>
+          <p:cNvSpPr>
+            <a:spLocks noGrp="1"/>
+          </p:cNvSpPr>
+          <p:nvPr/>
+        </p:nvSpPr>
+        <p:spPr>
+          <a:xfrm>
+            <a:off x="919999" y="1430000"/>
+            <a:ext cx="4461297" cy="380000"/>
+          </a:xfrm>
+          <a:prstGeom prst="rect">
+            <a:avLst/>
+          </a:prstGeom>
+          <a:noFill/>
+          <a:ln w="0">
+            <a:noFill/>
+            <a:prstDash val="solid"/>
+          </a:ln>
+        </p:spPr>
+        <p:txBody>
+          <a:bodyPr lIns="0" tIns="0" rIns="0" bIns="0" anchor="t">
+            <a:noAutofit/>
+          </a:bodyPr>
+          <a:lstStyle/>
+          <a:p>
+            <a:pPr algn="l">
+              <a:buNone/>
+              <a:defRPr sz="1500" b="1">
+                <a:solidFill>
+                  <a:srgbClr val="2F6BDE"/>
+                </a:solidFill>
+                <a:latin typeface="Hiragino Sans"/>
+                <a:ea typeface="Hiragino Sans"/>
+                <a:cs typeface="Hiragino Sans"/>
+              </a:defRPr>
+            </a:pPr>
+            <a:r>
+              <a:rPr lang="ja-JP" sz="2400" b="1" noProof="0">
+                <a:solidFill>
+                  <a:srgbClr val="2F6BDE"/>
+                </a:solidFill>
+                <a:latin typeface="Hiragino Sans"/>
+                <a:ea typeface="Hiragino Sans"/>
+                <a:cs typeface="Hiragino Sans"/>
+              </a:rPr>
+              <a:t>GANMEXが提案したこと</a:t>
+            </a:r>
+          </a:p>
+        </p:txBody>
+      </p:sp>
+      <p:sp>
+        <p:nvSpPr>
+          <p:cNvPr id="952" name="card-bullets"/>
+          <p:cNvSpPr>
+            <a:spLocks noGrp="1"/>
+          </p:cNvSpPr>
+          <p:nvPr/>
+        </p:nvSpPr>
+        <p:spPr>
+          <a:xfrm>
+            <a:off x="920000" y="1900000"/>
+            <a:ext cx="7467256" cy="1242593"/>
+          </a:xfrm>
+          <a:prstGeom prst="rect">
+            <a:avLst/>
+          </a:prstGeom>
+          <a:noFill/>
+          <a:ln w="0">
+            <a:noFill/>
+            <a:prstDash val="solid"/>
+          </a:ln>
+        </p:spPr>
+        <p:txBody>
+          <a:bodyPr lIns="0" tIns="0" rIns="0" bIns="0" anchor="t">
+            <a:noAutofit/>
+          </a:bodyPr>
+          <a:lstStyle/>
+          <a:p>
+            <a:pPr algn="l">
+              <a:buNone/>
+              <a:defRPr sz="1250" b="0">
+                <a:solidFill>
+                  <a:srgbClr val="111827"/>
+                </a:solidFill>
+                <a:latin typeface="Hiragino Sans"/>
+                <a:ea typeface="Hiragino Sans"/>
+                <a:cs typeface="Hiragino Sans"/>
+              </a:defRPr>
+            </a:pPr>
+            <a:r>
+              <a:rPr lang="ja-JP" sz="2000" b="0" noProof="0">
+                <a:solidFill>
+                  <a:srgbClr val="111827"/>
+                </a:solidFill>
+                <a:latin typeface="Hiragino Sans"/>
+                <a:ea typeface="Hiragino Sans"/>
+                <a:cs typeface="Hiragino Sans"/>
+              </a:rPr>
+              <a:t>・One-vs-One Attributionという考え方を提案</a:t>
+            </a:r>
+          </a:p>
+          <a:p>
+            <a:pPr algn="l">
+              <a:buNone/>
+              <a:defRPr sz="1250" b="0">
+                <a:solidFill>
+                  <a:srgbClr val="111827"/>
+                </a:solidFill>
+                <a:latin typeface="Hiragino Sans"/>
+                <a:ea typeface="Hiragino Sans"/>
+                <a:cs typeface="Hiragino Sans"/>
+              </a:defRPr>
+            </a:pPr>
+            <a:r>
+              <a:rPr lang="ja-JP" sz="2000" b="0" noProof="0">
+                <a:solidFill>
+                  <a:srgbClr val="111827"/>
+                </a:solidFill>
+                <a:latin typeface="Hiragino Sans"/>
+                <a:ea typeface="Hiragino Sans"/>
+                <a:cs typeface="Hiragino Sans"/>
+              </a:rPr>
+              <a:t>・特定の2クラスを比較し、共通する特徴より2クラスを区別する特徴に注目する</a:t>
+            </a:r>
+          </a:p>
+          <a:p>
+            <a:pPr algn="l">
+              <a:buNone/>
+              <a:defRPr sz="1250" b="0">
+                <a:solidFill>
+                  <a:srgbClr val="111827"/>
+                </a:solidFill>
+                <a:latin typeface="Hiragino Sans"/>
+                <a:ea typeface="Hiragino Sans"/>
+                <a:cs typeface="Hiragino Sans"/>
+              </a:defRPr>
+            </a:pPr>
+            <a:r>
+              <a:rPr lang="ja-JP" sz="2000" b="0" noProof="0">
+                <a:solidFill>
+                  <a:srgbClr val="111827"/>
+                </a:solidFill>
+                <a:latin typeface="Hiragino Sans"/>
+                <a:ea typeface="Hiragino Sans"/>
+                <a:cs typeface="Hiragino Sans"/>
+              </a:rPr>
+              <a:t>・GANで比較クラスの画像を生成し、attributionの基準にする（画像分類が対象）</a:t>
+            </a:r>
+          </a:p>
+        </p:txBody>
+      </p:sp>
+      <p:sp>
+        <p:nvSpPr>
+          <p:cNvPr id="954" name="card-header"/>
+          <p:cNvSpPr>
+            <a:spLocks noGrp="1"/>
+          </p:cNvSpPr>
+          <p:nvPr/>
+        </p:nvSpPr>
+        <p:spPr>
+          <a:xfrm>
+            <a:off x="882444" y="4003061"/>
+            <a:ext cx="3010000" cy="380000"/>
+          </a:xfrm>
+          <a:prstGeom prst="rect">
+            <a:avLst/>
+          </a:prstGeom>
+          <a:noFill/>
+          <a:ln w="0">
+            <a:noFill/>
+            <a:prstDash val="solid"/>
+          </a:ln>
+        </p:spPr>
+        <p:txBody>
+          <a:bodyPr lIns="0" tIns="0" rIns="0" bIns="0" anchor="t">
+            <a:noAutofit/>
+          </a:bodyPr>
+          <a:lstStyle/>
+          <a:p>
+            <a:pPr algn="l">
+              <a:buNone/>
+              <a:defRPr sz="1500" b="1">
+                <a:solidFill>
+                  <a:srgbClr val="2AA876"/>
+                </a:solidFill>
+                <a:latin typeface="Hiragino Sans"/>
+                <a:ea typeface="Hiragino Sans"/>
+                <a:cs typeface="Hiragino Sans"/>
+              </a:defRPr>
+            </a:pPr>
+            <a:r>
+              <a:rPr lang="ja-JP" sz="2400" b="1" noProof="0">
+                <a:solidFill>
+                  <a:srgbClr val="2AA876"/>
+                </a:solidFill>
+                <a:latin typeface="Hiragino Sans"/>
+                <a:ea typeface="Hiragino Sans"/>
+                <a:cs typeface="Hiragino Sans"/>
+              </a:rPr>
+              <a:t>本研究が活かす点</a:t>
+            </a:r>
+          </a:p>
+        </p:txBody>
+      </p:sp>
+      <p:sp>
+        <p:nvSpPr>
+          <p:cNvPr id="955" name="card-bullets"/>
+          <p:cNvSpPr>
+            <a:spLocks noGrp="1"/>
+          </p:cNvSpPr>
+          <p:nvPr/>
+        </p:nvSpPr>
+        <p:spPr>
+          <a:xfrm>
+            <a:off x="1014951" y="4403457"/>
+            <a:ext cx="7284606" cy="1084938"/>
+          </a:xfrm>
+          <a:prstGeom prst="rect">
+            <a:avLst/>
+          </a:prstGeom>
+          <a:noFill/>
+          <a:ln w="0">
+            <a:noFill/>
+            <a:prstDash val="solid"/>
+          </a:ln>
+        </p:spPr>
+        <p:txBody>
+          <a:bodyPr lIns="0" tIns="0" rIns="0" bIns="0" anchor="t">
+            <a:noAutofit/>
+          </a:bodyPr>
+          <a:lstStyle/>
+          <a:p>
+            <a:pPr algn="l">
+              <a:buNone/>
+              <a:defRPr sz="1250" b="0">
+                <a:solidFill>
+                  <a:srgbClr val="111827"/>
+                </a:solidFill>
+                <a:latin typeface="Hiragino Sans"/>
+                <a:ea typeface="Hiragino Sans"/>
+                <a:cs typeface="Hiragino Sans"/>
+              </a:defRPr>
+            </a:pPr>
+            <a:r>
+              <a:rPr lang="ja-JP" sz="2000" b="0" noProof="0">
+                <a:solidFill>
+                  <a:srgbClr val="111827"/>
+                </a:solidFill>
+                <a:latin typeface="Hiragino Sans"/>
+                <a:ea typeface="Hiragino Sans"/>
+                <a:cs typeface="Hiragino Sans"/>
+              </a:rPr>
+              <a:t>・「特定の2クラスを比較する」という問いの立て方を採用</a:t>
+            </a:r>
+          </a:p>
+          <a:p>
+            <a:pPr algn="l">
+              <a:buNone/>
+              <a:defRPr sz="1250" b="0">
+                <a:solidFill>
+                  <a:srgbClr val="111827"/>
+                </a:solidFill>
+                <a:latin typeface="Hiragino Sans"/>
+                <a:ea typeface="Hiragino Sans"/>
+                <a:cs typeface="Hiragino Sans"/>
+              </a:defRPr>
+            </a:pPr>
+            <a:r>
+              <a:rPr lang="ja-JP" sz="2000" b="0" noProof="0">
+                <a:solidFill>
+                  <a:srgbClr val="111827"/>
+                </a:solidFill>
+                <a:latin typeface="Hiragino Sans"/>
+                <a:ea typeface="Hiragino Sans"/>
+                <a:cs typeface="Hiragino Sans"/>
+              </a:rPr>
+              <a:t>・画像やGANには依存しない</a:t>
+            </a:r>
+          </a:p>
+          <a:p>
+            <a:pPr algn="l">
+              <a:buNone/>
+              <a:defRPr sz="1250" b="0">
+                <a:solidFill>
+                  <a:srgbClr val="111827"/>
+                </a:solidFill>
+                <a:latin typeface="Hiragino Sans"/>
+                <a:ea typeface="Hiragino Sans"/>
+                <a:cs typeface="Hiragino Sans"/>
+              </a:defRPr>
+            </a:pPr>
+            <a:r>
+              <a:rPr lang="ja-JP" sz="2000" b="0" noProof="0">
+                <a:solidFill>
+                  <a:srgbClr val="111827"/>
+                </a:solidFill>
+                <a:latin typeface="Hiragino Sans"/>
+                <a:ea typeface="Hiragino Sans"/>
+                <a:cs typeface="Hiragino Sans"/>
+              </a:rPr>
+              <a:t>・LIMEの局所線形モデルで、一般の表形式データにOne-vs-One説明を作る</a:t>
+            </a:r>
+          </a:p>
+        </p:txBody>
+      </p:sp>
     </p:spTree>
     <p:extLst>
       <p:ext uri="{BB962C8B-B14F-4D97-AF65-F5344CB8AC3E}">
@@ -11486,85 +11962,12 @@
           </a:p>
         </p:txBody>
       </p:sp>
-      <p:sp>
-        <p:nvSpPr>
-          <p:cNvPr id="3" name="テキスト ボックス 2">
-            <a:extLst>
-              <a:ext uri="{FF2B5EF4-FFF2-40B4-BE49-F238E27FC236}">
-                <a16:creationId xmlns:a16="http://schemas.microsoft.com/office/drawing/2014/main" id="{22C19D57-B849-A123-2F97-D665381C6579}"/>
-              </a:ext>
-            </a:extLst>
-          </p:cNvPr>
-          <p:cNvSpPr txBox="1"/>
-          <p:nvPr/>
-        </p:nvSpPr>
-        <p:spPr>
-          <a:xfrm>
-            <a:off x="800100" y="1917034"/>
-            <a:ext cx="9642383" cy="369332"/>
-          </a:xfrm>
-          <a:prstGeom prst="rect">
-            <a:avLst/>
-          </a:prstGeom>
-          <a:noFill/>
-        </p:spPr>
-        <p:txBody>
-          <a:bodyPr wrap="none" rtlCol="0">
-            <a:spAutoFit/>
-          </a:bodyPr>
-          <a:lstStyle/>
-          <a:p>
-            <a:r>
-              <a:rPr lang="ja-JP" altLang="ja-JP"/>
-              <a:t>CLIMAX</a:t>
-            </a:r>
-            <a:r>
-              <a:rPr lang="en-US" altLang="ja-JP" baseline="30000" dirty="0"/>
-              <a:t>[3]</a:t>
-            </a:r>
-            <a:r>
-              <a:rPr lang="ja-JP" altLang="ja-JP"/>
-              <a:t>は、ブラックボックス分類器を局所的な分類モデルで説明する方法を提案している</a:t>
-            </a:r>
-          </a:p>
-        </p:txBody>
-      </p:sp>
       <p:pic>
         <p:nvPicPr>
           <p:cNvPr id="4" name="図 3">
             <a:extLst>
               <a:ext uri="{FF2B5EF4-FFF2-40B4-BE49-F238E27FC236}">
                 <a16:creationId xmlns:a16="http://schemas.microsoft.com/office/drawing/2014/main" id="{5FD7DDE9-9424-21F5-CAEE-D80CD5A4A340}"/>
-              </a:ext>
-            </a:extLst>
-          </p:cNvPr>
-          <p:cNvPicPr>
-            <a:picLocks noChangeAspect="1"/>
-          </p:cNvPicPr>
-          <p:nvPr/>
-        </p:nvPicPr>
-        <p:blipFill>
-          <a:blip r:embed="rId2"/>
-          <a:stretch>
-            <a:fillRect/>
-          </a:stretch>
-        </p:blipFill>
-        <p:spPr>
-          <a:xfrm>
-            <a:off x="3536950" y="2377245"/>
-            <a:ext cx="4838700" cy="1092200"/>
-          </a:xfrm>
-          <a:prstGeom prst="rect">
-            <a:avLst/>
-          </a:prstGeom>
-        </p:spPr>
-      </p:pic>
-      <p:pic>
-        <p:nvPicPr>
-          <p:cNvPr id="5" name="図 4">
-            <a:extLst>
-              <a:ext uri="{FF2B5EF4-FFF2-40B4-BE49-F238E27FC236}">
-                <a16:creationId xmlns:a16="http://schemas.microsoft.com/office/drawing/2014/main" id="{A5D77F8D-6CC4-DF78-AE67-BC87D75D98BB}"/>
               </a:ext>
             </a:extLst>
           </p:cNvPr>
@@ -11581,7 +11984,37 @@
         </p:blipFill>
         <p:spPr>
           <a:xfrm>
-            <a:off x="4146550" y="3687539"/>
+            <a:off x="6696403" y="2784298"/>
+            <a:ext cx="4838700" cy="1092200"/>
+          </a:xfrm>
+          <a:prstGeom prst="rect">
+            <a:avLst/>
+          </a:prstGeom>
+        </p:spPr>
+      </p:pic>
+      <p:pic>
+        <p:nvPicPr>
+          <p:cNvPr id="5" name="図 4">
+            <a:extLst>
+              <a:ext uri="{FF2B5EF4-FFF2-40B4-BE49-F238E27FC236}">
+                <a16:creationId xmlns:a16="http://schemas.microsoft.com/office/drawing/2014/main" id="{A5D77F8D-6CC4-DF78-AE67-BC87D75D98BB}"/>
+              </a:ext>
+            </a:extLst>
+          </p:cNvPr>
+          <p:cNvPicPr>
+            <a:picLocks noChangeAspect="1"/>
+          </p:cNvPicPr>
+          <p:nvPr/>
+        </p:nvPicPr>
+        <p:blipFill>
+          <a:blip r:embed="rId4"/>
+          <a:stretch>
+            <a:fillRect/>
+          </a:stretch>
+        </p:blipFill>
+        <p:spPr>
+          <a:xfrm>
+            <a:off x="2065426" y="3063698"/>
             <a:ext cx="3898900" cy="533400"/>
           </a:xfrm>
           <a:prstGeom prst="rect">
@@ -11589,393 +12022,6 @@
           </a:prstGeom>
         </p:spPr>
       </p:pic>
-      <mc:AlternateContent xmlns:mc="http://schemas.openxmlformats.org/markup-compatibility/2006" xmlns:a14="http://schemas.microsoft.com/office/drawing/2010/main">
-        <mc:Choice Requires="a14">
-          <p:sp>
-            <p:nvSpPr>
-              <p:cNvPr id="6" name="テキスト ボックス 5">
-                <a:extLst>
-                  <a:ext uri="{FF2B5EF4-FFF2-40B4-BE49-F238E27FC236}">
-                    <a16:creationId xmlns:a16="http://schemas.microsoft.com/office/drawing/2014/main" id="{E7CC717D-3D8E-A9E2-6D2B-3E64075AB32B}"/>
-                  </a:ext>
-                </a:extLst>
-              </p:cNvPr>
-              <p:cNvSpPr txBox="1"/>
-              <p:nvPr/>
-            </p:nvSpPr>
-            <p:spPr>
-              <a:xfrm>
-                <a:off x="818569" y="4800601"/>
-                <a:ext cx="7316362" cy="957121"/>
-              </a:xfrm>
-              <a:prstGeom prst="rect">
-                <a:avLst/>
-              </a:prstGeom>
-              <a:noFill/>
-            </p:spPr>
-            <p:txBody>
-              <a:bodyPr wrap="none" rtlCol="0">
-                <a:spAutoFit/>
-              </a:bodyPr>
-              <a:lstStyle/>
-              <a:p>
-                <a:r>
-                  <a:rPr lang="ja-JP" altLang="ja-JP"/>
-                  <a:t>CLIMAXの比較対象は、</a:t>
-                </a:r>
-              </a:p>
-              <a:p>
-                <a:pPr/>
-                <a14:m>
-                  <m:oMathPara xmlns:m="http://schemas.openxmlformats.org/officeDocument/2006/math">
-                    <m:oMathParaPr>
-                      <m:jc m:val="centerGroup"/>
-                    </m:oMathParaPr>
-                    <m:oMath xmlns:m="http://schemas.openxmlformats.org/officeDocument/2006/math">
-                      <m:r>
-                        <m:rPr>
-                          <m:lit/>
-                        </m:rPr>
-                        <a:rPr lang="ja-JP" altLang="ja-JP" i="1" smtClean="0">
-                          <a:latin typeface="Cambria Math" panose="02040503050406030204" pitchFamily="18" charset="0"/>
-                        </a:rPr>
-                        <m:t>[</m:t>
-                      </m:r>
-                      <m:r>
-                        <a:rPr lang="ja-JP" altLang="ja-JP" i="1">
-                          <a:latin typeface="Cambria Math" panose="02040503050406030204" pitchFamily="18" charset="0"/>
-                        </a:rPr>
-                        <m:t>𝐴</m:t>
-                      </m:r>
-                      <m:r>
-                        <a:rPr lang="ja-JP" altLang="ja-JP" i="1">
-                          <a:latin typeface="Cambria Math" panose="02040503050406030204" pitchFamily="18" charset="0"/>
-                        </a:rPr>
-                        <m:t> </m:t>
-                      </m:r>
-                      <m:r>
-                        <m:rPr>
-                          <m:nor/>
-                        </m:rPr>
-                        <a:rPr lang="ja-JP" altLang="ja-JP" i="0">
-                          <a:latin typeface="Cambria Math" panose="02040503050406030204" pitchFamily="18" charset="0"/>
-                        </a:rPr>
-                        <m:t>対</m:t>
-                      </m:r>
-                      <m:r>
-                        <a:rPr lang="ja-JP" altLang="ja-JP" i="1">
-                          <a:latin typeface="Cambria Math" panose="02040503050406030204" pitchFamily="18" charset="0"/>
-                        </a:rPr>
-                        <m:t> </m:t>
-                      </m:r>
-                      <m:r>
-                        <m:rPr>
-                          <m:nor/>
-                        </m:rPr>
-                        <a:rPr lang="ja-JP" altLang="ja-JP" i="0">
-                          <a:latin typeface="Cambria Math" panose="02040503050406030204" pitchFamily="18" charset="0"/>
-                        </a:rPr>
-                        <m:t>それ以外すべて</m:t>
-                      </m:r>
-                      <m:r>
-                        <m:rPr>
-                          <m:lit/>
-                        </m:rPr>
-                        <a:rPr lang="ja-JP" altLang="ja-JP" i="1" smtClean="0">
-                          <a:latin typeface="Cambria Math" panose="02040503050406030204" pitchFamily="18" charset="0"/>
-                        </a:rPr>
-                        <m:t>]</m:t>
-                      </m:r>
-                      <m:r>
-                        <m:rPr>
-                          <m:lit/>
-                        </m:rPr>
-                        <a:rPr lang="en-US" altLang="ja-JP" b="0" i="0" smtClean="0">
-                          <a:latin typeface="Cambria Math" panose="02040503050406030204" pitchFamily="18" charset="0"/>
-                        </a:rPr>
-                        <m:t> (</m:t>
-                      </m:r>
-                      <m:r>
-                        <m:rPr>
-                          <m:lit/>
-                        </m:rPr>
-                        <a:rPr lang="ja-JP" altLang="ja-JP" i="1" smtClean="0">
-                          <a:latin typeface="Cambria Math" panose="02040503050406030204" pitchFamily="18" charset="0"/>
-                        </a:rPr>
-                        <m:t>[</m:t>
-                      </m:r>
-                      <m:r>
-                        <a:rPr lang="ja-JP" altLang="ja-JP" i="1">
-                          <a:latin typeface="Cambria Math" panose="02040503050406030204" pitchFamily="18" charset="0"/>
-                        </a:rPr>
-                        <m:t>1−</m:t>
-                      </m:r>
-                      <m:sSub>
-                        <m:sSubPr>
-                          <m:ctrlPr>
-                            <a:rPr lang="ja-JP" altLang="ja-JP" i="1">
-                              <a:latin typeface="Cambria Math" panose="02040503050406030204" pitchFamily="18" charset="0"/>
-                            </a:rPr>
-                          </m:ctrlPr>
-                        </m:sSubPr>
-                        <m:e>
-                          <m:r>
-                            <a:rPr lang="ja-JP" altLang="ja-JP" i="1">
-                              <a:latin typeface="Cambria Math" panose="02040503050406030204" pitchFamily="18" charset="0"/>
-                            </a:rPr>
-                            <m:t>𝑝</m:t>
-                          </m:r>
-                        </m:e>
-                        <m:sub>
-                          <m:r>
-                            <a:rPr lang="ja-JP" altLang="ja-JP" i="1">
-                              <a:latin typeface="Cambria Math" panose="02040503050406030204" pitchFamily="18" charset="0"/>
-                            </a:rPr>
-                            <m:t>𝐴</m:t>
-                          </m:r>
-                        </m:sub>
-                      </m:sSub>
-                      <m:d>
-                        <m:dPr>
-                          <m:ctrlPr>
-                            <a:rPr lang="ja-JP" altLang="ja-JP" i="1">
-                              <a:latin typeface="Cambria Math" panose="02040503050406030204" pitchFamily="18" charset="0"/>
-                            </a:rPr>
-                          </m:ctrlPr>
-                        </m:dPr>
-                        <m:e>
-                          <m:r>
-                            <a:rPr lang="ja-JP" altLang="ja-JP" i="1">
-                              <a:latin typeface="Cambria Math" panose="02040503050406030204" pitchFamily="18" charset="0"/>
-                            </a:rPr>
-                            <m:t>𝑧</m:t>
-                          </m:r>
-                        </m:e>
-                      </m:d>
-                      <m:r>
-                        <a:rPr lang="ja-JP" altLang="ja-JP" i="1">
-                          <a:latin typeface="Cambria Math" panose="02040503050406030204" pitchFamily="18" charset="0"/>
-                        </a:rPr>
-                        <m:t>=</m:t>
-                      </m:r>
-                      <m:sSub>
-                        <m:sSubPr>
-                          <m:ctrlPr>
-                            <a:rPr lang="ja-JP" altLang="ja-JP" i="1">
-                              <a:latin typeface="Cambria Math" panose="02040503050406030204" pitchFamily="18" charset="0"/>
-                            </a:rPr>
-                          </m:ctrlPr>
-                        </m:sSubPr>
-                        <m:e>
-                          <m:r>
-                            <a:rPr lang="ja-JP" altLang="ja-JP" i="1">
-                              <a:latin typeface="Cambria Math" panose="02040503050406030204" pitchFamily="18" charset="0"/>
-                            </a:rPr>
-                            <m:t>𝑝</m:t>
-                          </m:r>
-                        </m:e>
-                        <m:sub>
-                          <m:r>
-                            <a:rPr lang="ja-JP" altLang="ja-JP" i="1">
-                              <a:latin typeface="Cambria Math" panose="02040503050406030204" pitchFamily="18" charset="0"/>
-                            </a:rPr>
-                            <m:t>𝐵</m:t>
-                          </m:r>
-                        </m:sub>
-                      </m:sSub>
-                      <m:d>
-                        <m:dPr>
-                          <m:ctrlPr>
-                            <a:rPr lang="ja-JP" altLang="ja-JP" i="1">
-                              <a:latin typeface="Cambria Math" panose="02040503050406030204" pitchFamily="18" charset="0"/>
-                            </a:rPr>
-                          </m:ctrlPr>
-                        </m:dPr>
-                        <m:e>
-                          <m:r>
-                            <a:rPr lang="ja-JP" altLang="ja-JP" i="1">
-                              <a:latin typeface="Cambria Math" panose="02040503050406030204" pitchFamily="18" charset="0"/>
-                            </a:rPr>
-                            <m:t>𝑧</m:t>
-                          </m:r>
-                        </m:e>
-                      </m:d>
-                      <m:r>
-                        <a:rPr lang="ja-JP" altLang="ja-JP" i="1">
-                          <a:latin typeface="Cambria Math" panose="02040503050406030204" pitchFamily="18" charset="0"/>
-                        </a:rPr>
-                        <m:t>+</m:t>
-                      </m:r>
-                      <m:sSub>
-                        <m:sSubPr>
-                          <m:ctrlPr>
-                            <a:rPr lang="ja-JP" altLang="ja-JP" i="1">
-                              <a:latin typeface="Cambria Math" panose="02040503050406030204" pitchFamily="18" charset="0"/>
-                            </a:rPr>
-                          </m:ctrlPr>
-                        </m:sSubPr>
-                        <m:e>
-                          <m:r>
-                            <a:rPr lang="ja-JP" altLang="ja-JP" i="1">
-                              <a:latin typeface="Cambria Math" panose="02040503050406030204" pitchFamily="18" charset="0"/>
-                            </a:rPr>
-                            <m:t>𝑝</m:t>
-                          </m:r>
-                        </m:e>
-                        <m:sub>
-                          <m:r>
-                            <a:rPr lang="ja-JP" altLang="ja-JP" i="1">
-                              <a:latin typeface="Cambria Math" panose="02040503050406030204" pitchFamily="18" charset="0"/>
-                            </a:rPr>
-                            <m:t>𝐶</m:t>
-                          </m:r>
-                        </m:sub>
-                      </m:sSub>
-                      <m:d>
-                        <m:dPr>
-                          <m:ctrlPr>
-                            <a:rPr lang="ja-JP" altLang="ja-JP" i="1">
-                              <a:latin typeface="Cambria Math" panose="02040503050406030204" pitchFamily="18" charset="0"/>
-                            </a:rPr>
-                          </m:ctrlPr>
-                        </m:dPr>
-                        <m:e>
-                          <m:r>
-                            <a:rPr lang="ja-JP" altLang="ja-JP" i="1">
-                              <a:latin typeface="Cambria Math" panose="02040503050406030204" pitchFamily="18" charset="0"/>
-                            </a:rPr>
-                            <m:t>𝑧</m:t>
-                          </m:r>
-                        </m:e>
-                      </m:d>
-                      <m:r>
-                        <a:rPr lang="ja-JP" altLang="ja-JP" i="1">
-                          <a:latin typeface="Cambria Math" panose="02040503050406030204" pitchFamily="18" charset="0"/>
-                        </a:rPr>
-                        <m:t>+</m:t>
-                      </m:r>
-                      <m:sSub>
-                        <m:sSubPr>
-                          <m:ctrlPr>
-                            <a:rPr lang="ja-JP" altLang="ja-JP" i="1">
-                              <a:latin typeface="Cambria Math" panose="02040503050406030204" pitchFamily="18" charset="0"/>
-                            </a:rPr>
-                          </m:ctrlPr>
-                        </m:sSubPr>
-                        <m:e>
-                          <m:r>
-                            <a:rPr lang="ja-JP" altLang="ja-JP" i="1">
-                              <a:latin typeface="Cambria Math" panose="02040503050406030204" pitchFamily="18" charset="0"/>
-                            </a:rPr>
-                            <m:t>𝑝</m:t>
-                          </m:r>
-                        </m:e>
-                        <m:sub>
-                          <m:r>
-                            <a:rPr lang="ja-JP" altLang="ja-JP" i="1">
-                              <a:latin typeface="Cambria Math" panose="02040503050406030204" pitchFamily="18" charset="0"/>
-                            </a:rPr>
-                            <m:t>𝐷</m:t>
-                          </m:r>
-                        </m:sub>
-                      </m:sSub>
-                      <m:d>
-                        <m:dPr>
-                          <m:ctrlPr>
-                            <a:rPr lang="ja-JP" altLang="ja-JP" i="1">
-                              <a:latin typeface="Cambria Math" panose="02040503050406030204" pitchFamily="18" charset="0"/>
-                            </a:rPr>
-                          </m:ctrlPr>
-                        </m:dPr>
-                        <m:e>
-                          <m:r>
-                            <a:rPr lang="ja-JP" altLang="ja-JP" i="1">
-                              <a:latin typeface="Cambria Math" panose="02040503050406030204" pitchFamily="18" charset="0"/>
-                            </a:rPr>
-                            <m:t>𝑧</m:t>
-                          </m:r>
-                        </m:e>
-                      </m:d>
-                      <m:r>
-                        <a:rPr lang="ja-JP" altLang="ja-JP" i="1">
-                          <a:latin typeface="Cambria Math" panose="02040503050406030204" pitchFamily="18" charset="0"/>
-                        </a:rPr>
-                        <m:t>+⋯</m:t>
-                      </m:r>
-                      <m:r>
-                        <m:rPr>
-                          <m:lit/>
-                        </m:rPr>
-                        <a:rPr lang="ja-JP" altLang="ja-JP" i="1">
-                          <a:latin typeface="Cambria Math" panose="02040503050406030204" pitchFamily="18" charset="0"/>
-                        </a:rPr>
-                        <m:t>]</m:t>
-                      </m:r>
-                      <m:r>
-                        <m:rPr>
-                          <m:lit/>
-                        </m:rPr>
-                        <a:rPr lang="en-US" altLang="ja-JP" b="0" i="1" smtClean="0">
-                          <a:latin typeface="Cambria Math" panose="02040503050406030204" pitchFamily="18" charset="0"/>
-                        </a:rPr>
-                        <m:t>)</m:t>
-                      </m:r>
-                    </m:oMath>
-                  </m:oMathPara>
-                </a14:m>
-                <a:endParaRPr lang="ja-JP" altLang="ja-JP"/>
-              </a:p>
-              <a:p>
-                <a:endParaRPr kumimoji="1" lang="ja-JP" altLang="en-US"/>
-              </a:p>
-            </p:txBody>
-          </p:sp>
-        </mc:Choice>
-        <mc:Fallback xmlns="">
-          <p:sp>
-            <p:nvSpPr>
-              <p:cNvPr id="6" name="テキスト ボックス 5">
-                <a:extLst>
-                  <a:ext uri="{FF2B5EF4-FFF2-40B4-BE49-F238E27FC236}">
-                    <a16:creationId xmlns:a16="http://schemas.microsoft.com/office/drawing/2014/main" id="{E7CC717D-3D8E-A9E2-6D2B-3E64075AB32B}"/>
-                  </a:ext>
-                </a:extLst>
-              </p:cNvPr>
-              <p:cNvSpPr txBox="1">
-                <a:spLocks noRot="1" noChangeAspect="1" noMove="1" noResize="1" noEditPoints="1" noAdjustHandles="1" noChangeArrowheads="1" noChangeShapeType="1" noTextEdit="1"/>
-              </p:cNvSpPr>
-              <p:nvPr/>
-            </p:nvSpPr>
-            <p:spPr>
-              <a:xfrm>
-                <a:off x="818569" y="4800601"/>
-                <a:ext cx="7316362" cy="957121"/>
-              </a:xfrm>
-              <a:prstGeom prst="rect">
-                <a:avLst/>
-              </a:prstGeom>
-              <a:blipFill>
-                <a:blip r:embed="rId4"/>
-                <a:stretch>
-                  <a:fillRect l="-693" t="-6579"/>
-                </a:stretch>
-              </a:blipFill>
-            </p:spPr>
-            <p:txBody>
-              <a:bodyPr/>
-              <a:lstStyle/>
-              <a:p>
-                <a:r>
-                  <a:rPr lang="ja-JP" altLang="en-US">
-                    <a:noFill/>
-                  </a:rPr>
-                  <a:t> </a:t>
-                </a:r>
-              </a:p>
-            </p:txBody>
-          </p:sp>
-        </mc:Fallback>
-      </mc:AlternateContent>
       <p:sp>
         <p:nvSpPr>
           <p:cNvPr id="9" name="正方形/長方形 8">
@@ -12062,6 +12108,313 @@
               <a:rPr lang="ja-JP" altLang="ja-JP" sz="3200" b="1"/>
               <a:t>log-oddsを局所的に説明する</a:t>
             </a:r>
+          </a:p>
+        </p:txBody>
+      </p:sp>
+      <p:sp>
+        <p:nvSpPr>
+          <p:cNvPr id="15" name="card-header">
+            <a:extLst>
+              <a:ext uri="{FF2B5EF4-FFF2-40B4-BE49-F238E27FC236}">
+                <a16:creationId xmlns:a16="http://schemas.microsoft.com/office/drawing/2014/main" id="{A12492C6-9F96-D1E9-16D5-6098B9840B3F}"/>
+              </a:ext>
+            </a:extLst>
+          </p:cNvPr>
+          <p:cNvSpPr>
+            <a:spLocks noGrp="1"/>
+          </p:cNvSpPr>
+          <p:nvPr/>
+        </p:nvSpPr>
+        <p:spPr>
+          <a:xfrm>
+            <a:off x="919999" y="1430000"/>
+            <a:ext cx="4461297" cy="380000"/>
+          </a:xfrm>
+          <a:prstGeom prst="rect">
+            <a:avLst/>
+          </a:prstGeom>
+          <a:noFill/>
+          <a:ln w="0">
+            <a:noFill/>
+            <a:prstDash val="solid"/>
+          </a:ln>
+        </p:spPr>
+        <p:txBody>
+          <a:bodyPr lIns="0" tIns="0" rIns="0" bIns="0" anchor="t">
+            <a:noAutofit/>
+          </a:bodyPr>
+          <a:lstStyle/>
+          <a:p>
+            <a:pPr>
+              <a:defRPr sz="1350" b="1">
+                <a:solidFill>
+                  <a:srgbClr val="2F6BDE"/>
+                </a:solidFill>
+                <a:latin typeface="Hiragino Sans"/>
+                <a:ea typeface="Hiragino Sans"/>
+                <a:cs typeface="Hiragino Sans"/>
+              </a:defRPr>
+            </a:pPr>
+            <a:r>
+              <a:rPr lang="en" altLang="ja-JP" sz="2400" b="1" dirty="0">
+                <a:solidFill>
+                  <a:srgbClr val="2F6BDE"/>
+                </a:solidFill>
+                <a:latin typeface="Hiragino Sans"/>
+                <a:ea typeface="Hiragino Sans"/>
+                <a:cs typeface="Hiragino Sans"/>
+              </a:rPr>
+              <a:t>CLIMAX</a:t>
+            </a:r>
+            <a:r>
+              <a:rPr lang="ja-JP" altLang="en-US" sz="2400" b="1">
+                <a:solidFill>
+                  <a:srgbClr val="2F6BDE"/>
+                </a:solidFill>
+                <a:latin typeface="Hiragino Sans"/>
+                <a:ea typeface="Hiragino Sans"/>
+                <a:cs typeface="Hiragino Sans"/>
+              </a:rPr>
+              <a:t>が提案したこと</a:t>
+            </a:r>
+            <a:endParaRPr lang="ja-JP" altLang="en-US" sz="2400" b="1" dirty="0">
+              <a:solidFill>
+                <a:srgbClr val="2F6BDE"/>
+              </a:solidFill>
+              <a:latin typeface="Hiragino Sans"/>
+              <a:ea typeface="Hiragino Sans"/>
+              <a:cs typeface="Hiragino Sans"/>
+            </a:endParaRPr>
+          </a:p>
+        </p:txBody>
+      </p:sp>
+      <p:sp>
+        <p:nvSpPr>
+          <p:cNvPr id="16" name="card-bullets">
+            <a:extLst>
+              <a:ext uri="{FF2B5EF4-FFF2-40B4-BE49-F238E27FC236}">
+                <a16:creationId xmlns:a16="http://schemas.microsoft.com/office/drawing/2014/main" id="{74A0CA4C-F33D-D24C-DEF6-E4565E39F524}"/>
+              </a:ext>
+            </a:extLst>
+          </p:cNvPr>
+          <p:cNvSpPr>
+            <a:spLocks noGrp="1"/>
+          </p:cNvSpPr>
+          <p:nvPr/>
+        </p:nvSpPr>
+        <p:spPr>
+          <a:xfrm>
+            <a:off x="920000" y="1900001"/>
+            <a:ext cx="7467256" cy="630794"/>
+          </a:xfrm>
+          <a:prstGeom prst="rect">
+            <a:avLst/>
+          </a:prstGeom>
+          <a:noFill/>
+          <a:ln w="0">
+            <a:noFill/>
+            <a:prstDash val="solid"/>
+          </a:ln>
+        </p:spPr>
+        <p:txBody>
+          <a:bodyPr lIns="0" tIns="0" rIns="0" bIns="0" anchor="t">
+            <a:noAutofit/>
+          </a:bodyPr>
+          <a:lstStyle/>
+          <a:p>
+            <a:r>
+              <a:rPr lang="ja-JP" altLang="en-US" sz="2000"/>
+              <a:t>対象クラスの対数オッズを回帰する（</a:t>
+            </a:r>
+            <a:r>
+              <a:rPr lang="en" altLang="ja-JP" sz="2000" dirty="0"/>
+              <a:t>L-CLIMAX</a:t>
+            </a:r>
+            <a:r>
+              <a:rPr lang="ja-JP" altLang="en" sz="2000"/>
+              <a:t>）</a:t>
+            </a:r>
+          </a:p>
+          <a:p>
+            <a:r>
+              <a:rPr lang="ja-JP" altLang="en-US" sz="2000"/>
+              <a:t>確率を交差エントロピーで回帰する（</a:t>
+            </a:r>
+            <a:r>
+              <a:rPr lang="en" altLang="ja-JP" sz="2000" dirty="0"/>
+              <a:t>CE-CLIMAX</a:t>
+            </a:r>
+            <a:r>
+              <a:rPr lang="ja-JP" altLang="en" sz="2000"/>
+              <a:t>）</a:t>
+            </a:r>
+            <a:br>
+              <a:rPr lang="en" altLang="ja-JP" sz="2000" dirty="0"/>
+            </a:br>
+            <a:endParaRPr lang="en" altLang="ja-JP" sz="1400" dirty="0">
+              <a:solidFill>
+                <a:srgbClr val="111827"/>
+              </a:solidFill>
+            </a:endParaRPr>
+          </a:p>
+        </p:txBody>
+      </p:sp>
+      <p:sp>
+        <p:nvSpPr>
+          <p:cNvPr id="17" name="card-header">
+            <a:extLst>
+              <a:ext uri="{FF2B5EF4-FFF2-40B4-BE49-F238E27FC236}">
+                <a16:creationId xmlns:a16="http://schemas.microsoft.com/office/drawing/2014/main" id="{C8239131-0784-0899-1B93-D3EFA3CB8791}"/>
+              </a:ext>
+            </a:extLst>
+          </p:cNvPr>
+          <p:cNvSpPr>
+            <a:spLocks noGrp="1"/>
+          </p:cNvSpPr>
+          <p:nvPr/>
+        </p:nvSpPr>
+        <p:spPr>
+          <a:xfrm>
+            <a:off x="882444" y="4003061"/>
+            <a:ext cx="3010000" cy="380000"/>
+          </a:xfrm>
+          <a:prstGeom prst="rect">
+            <a:avLst/>
+          </a:prstGeom>
+          <a:noFill/>
+          <a:ln w="0">
+            <a:noFill/>
+            <a:prstDash val="solid"/>
+          </a:ln>
+        </p:spPr>
+        <p:txBody>
+          <a:bodyPr lIns="0" tIns="0" rIns="0" bIns="0" anchor="t">
+            <a:noAutofit/>
+          </a:bodyPr>
+          <a:lstStyle/>
+          <a:p>
+            <a:pPr algn="l">
+              <a:buNone/>
+              <a:defRPr sz="1500" b="1">
+                <a:solidFill>
+                  <a:srgbClr val="2AA876"/>
+                </a:solidFill>
+                <a:latin typeface="Hiragino Sans"/>
+                <a:ea typeface="Hiragino Sans"/>
+                <a:cs typeface="Hiragino Sans"/>
+              </a:defRPr>
+            </a:pPr>
+            <a:r>
+              <a:rPr lang="ja-JP" sz="2400" b="1" noProof="0">
+                <a:solidFill>
+                  <a:srgbClr val="2AA876"/>
+                </a:solidFill>
+                <a:latin typeface="Hiragino Sans"/>
+                <a:ea typeface="Hiragino Sans"/>
+                <a:cs typeface="Hiragino Sans"/>
+              </a:rPr>
+              <a:t>本研究が活かす点</a:t>
+            </a:r>
+          </a:p>
+        </p:txBody>
+      </p:sp>
+      <p:sp>
+        <p:nvSpPr>
+          <p:cNvPr id="18" name="card-bullets">
+            <a:extLst>
+              <a:ext uri="{FF2B5EF4-FFF2-40B4-BE49-F238E27FC236}">
+                <a16:creationId xmlns:a16="http://schemas.microsoft.com/office/drawing/2014/main" id="{86271FA1-D21C-E8CB-4B2C-578FAF9BBC77}"/>
+              </a:ext>
+            </a:extLst>
+          </p:cNvPr>
+          <p:cNvSpPr>
+            <a:spLocks noGrp="1"/>
+          </p:cNvSpPr>
+          <p:nvPr/>
+        </p:nvSpPr>
+        <p:spPr>
+          <a:xfrm>
+            <a:off x="1014950" y="4403456"/>
+            <a:ext cx="11954815" cy="1629481"/>
+          </a:xfrm>
+          <a:prstGeom prst="rect">
+            <a:avLst/>
+          </a:prstGeom>
+          <a:noFill/>
+          <a:ln w="0">
+            <a:noFill/>
+            <a:prstDash val="solid"/>
+          </a:ln>
+        </p:spPr>
+        <p:txBody>
+          <a:bodyPr lIns="0" tIns="0" rIns="0" bIns="0" anchor="t">
+            <a:noAutofit/>
+          </a:bodyPr>
+          <a:lstStyle/>
+          <a:p>
+            <a:r>
+              <a:rPr lang="en-US" altLang="ja-JP" sz="2000" dirty="0"/>
+              <a:t>- </a:t>
+            </a:r>
+            <a:r>
+              <a:rPr lang="ja-JP" altLang="en-US" sz="2000"/>
+              <a:t>確率をそのまま見ず、対数比や交差エントロピーで近似するという当てはめ方を採</a:t>
+            </a:r>
+          </a:p>
+          <a:p>
+            <a:r>
+              <a:rPr lang="ja-JP" altLang="en-US" sz="2000"/>
+              <a:t>用する</a:t>
+            </a:r>
+          </a:p>
+          <a:p>
+            <a:r>
+              <a:rPr lang="en-US" altLang="ja-JP" sz="2000" dirty="0"/>
+              <a:t>- </a:t>
+            </a:r>
+            <a:r>
+              <a:rPr lang="ja-JP" altLang="en-US" sz="2000"/>
+              <a:t>ただし比較対象は「それ以外全部」ではなく、予測</a:t>
+            </a:r>
+            <a:r>
+              <a:rPr lang="en-US" altLang="ja-JP" sz="2000" dirty="0"/>
+              <a:t>1</a:t>
+            </a:r>
+            <a:r>
+              <a:rPr lang="ja-JP" altLang="en-US" sz="2000"/>
+              <a:t>位・</a:t>
+            </a:r>
+            <a:r>
+              <a:rPr lang="en-US" altLang="ja-JP" sz="2000" dirty="0"/>
+              <a:t>2</a:t>
+            </a:r>
+            <a:r>
+              <a:rPr lang="ja-JP" altLang="en-US" sz="2000"/>
+              <a:t>位という特定の</a:t>
+            </a:r>
+            <a:r>
+              <a:rPr lang="en-US" altLang="ja-JP" sz="2000" dirty="0"/>
+              <a:t>2</a:t>
+            </a:r>
+            <a:r>
+              <a:rPr lang="ja-JP" altLang="en-US" sz="2000"/>
+              <a:t>クラスに絞る</a:t>
+            </a:r>
+          </a:p>
+          <a:p>
+            <a:r>
+              <a:rPr lang="en-US" altLang="ja-JP" sz="2000" dirty="0"/>
+              <a:t>	- </a:t>
+            </a:r>
+            <a:r>
+              <a:rPr lang="ja-JP" altLang="en-US" sz="2000"/>
+              <a:t>クラス数が多いほど、この絞り込みの効果が大きくなる</a:t>
+            </a:r>
+            <a:endParaRPr lang="ja-JP" altLang="en-US" sz="1400" dirty="0">
+              <a:solidFill>
+                <a:srgbClr val="111827"/>
+              </a:solidFill>
+            </a:endParaRPr>
           </a:p>
         </p:txBody>
       </p:sp>
@@ -19163,63 +19516,16 @@
       </p:pic>
       <p:sp>
         <p:nvSpPr>
-          <p:cNvPr id="6" name="角丸四角形 5">
-            <a:extLst>
-              <a:ext uri="{FF2B5EF4-FFF2-40B4-BE49-F238E27FC236}">
-                <a16:creationId xmlns:a16="http://schemas.microsoft.com/office/drawing/2014/main" id="{320073FC-A068-493B-9184-36B6599D264B}"/>
-              </a:ext>
-            </a:extLst>
-          </p:cNvPr>
-          <p:cNvSpPr>
-            <a:spLocks noGrp="1"/>
-          </p:cNvSpPr>
-          <p:nvPr/>
-        </p:nvSpPr>
-        <p:spPr>
-          <a:xfrm>
-            <a:off x="9220200" y="2428875"/>
-            <a:ext cx="2305050" cy="1162050"/>
-          </a:xfrm>
-          <a:prstGeom prst="roundRect">
-            <a:avLst>
-              <a:gd name="adj" fmla="val 6557"/>
-            </a:avLst>
-          </a:prstGeom>
-          <a:solidFill>
-            <a:srgbClr val="F7F9FC"/>
-          </a:solidFill>
-          <a:ln w="9525">
-            <a:solidFill>
-              <a:srgbClr val="E7EBF0"/>
-            </a:solidFill>
-          </a:ln>
-        </p:spPr>
-        <p:txBody>
-          <a:bodyPr/>
-          <a:lstStyle/>
-          <a:p>
-            <a:endParaRPr lang="ja-JP" altLang="en-US"/>
-          </a:p>
-        </p:txBody>
-      </p:sp>
-      <p:sp>
-        <p:nvSpPr>
-          <p:cNvPr id="7" name="正方形/長方形 6">
-            <a:extLst>
-              <a:ext uri="{FF2B5EF4-FFF2-40B4-BE49-F238E27FC236}">
-                <a16:creationId xmlns:a16="http://schemas.microsoft.com/office/drawing/2014/main" id="{AA5A21CE-4DAF-4C05-9568-C0E74A110E0E}"/>
-              </a:ext>
-            </a:extLst>
-          </p:cNvPr>
-          <p:cNvSpPr>
-            <a:spLocks noGrp="1"/>
-          </p:cNvSpPr>
-          <p:nvPr/>
-        </p:nvSpPr>
-        <p:spPr>
-          <a:xfrm>
-            <a:off x="9391650" y="2543175"/>
-            <a:ext cx="1962150" cy="266700"/>
+          <p:cNvPr id="951" name="metric-explain-text"/>
+          <p:cNvSpPr>
+            <a:spLocks noGrp="1"/>
+          </p:cNvSpPr>
+          <p:nvPr/>
+        </p:nvSpPr>
+        <p:spPr>
+          <a:xfrm>
+            <a:off x="886312" y="1642597"/>
+            <a:ext cx="7800000" cy="553406"/>
           </a:xfrm>
           <a:prstGeom prst="rect">
             <a:avLst/>
@@ -19227,387 +19533,112 @@
           <a:noFill/>
           <a:ln w="0">
             <a:noFill/>
-          </a:ln>
-        </p:spPr>
-        <p:txBody>
-          <a:bodyPr anchor="ctr">
-            <a:normAutofit fontScale="85185"/>
+            <a:prstDash val="solid"/>
+          </a:ln>
+        </p:spPr>
+        <p:txBody>
+          <a:bodyPr lIns="0" tIns="0" rIns="0" bIns="0" anchor="t">
+            <a:noAutofit/>
           </a:bodyPr>
           <a:lstStyle/>
           <a:p>
-            <a:pPr algn="ctr">
-              <a:defRPr sz="1350" b="1">
-                <a:solidFill>
-                  <a:srgbClr val="687386"/>
-                </a:solidFill>
-                <a:latin typeface="Hiragino Sans"/>
-                <a:ea typeface="Hiragino Sans"/>
-                <a:cs typeface="Hiragino Sans"/>
-              </a:defRPr>
-            </a:pPr>
-            <a:r>
-              <a:rPr sz="1350" b="1">
-                <a:solidFill>
-                  <a:srgbClr val="687386"/>
-                </a:solidFill>
-                <a:latin typeface="Hiragino Sans"/>
-                <a:ea typeface="Hiragino Sans"/>
-                <a:cs typeface="Hiragino Sans"/>
-              </a:rPr>
-              <a:t>全条件平均</a:t>
-            </a:r>
-          </a:p>
-        </p:txBody>
-      </p:sp>
-      <p:sp>
-        <p:nvSpPr>
-          <p:cNvPr id="8" name="正方形/長方形 7">
-            <a:extLst>
-              <a:ext uri="{FF2B5EF4-FFF2-40B4-BE49-F238E27FC236}">
-                <a16:creationId xmlns:a16="http://schemas.microsoft.com/office/drawing/2014/main" id="{42195F54-3AAC-4555-A421-85573DDFDB0A}"/>
-              </a:ext>
-            </a:extLst>
-          </p:cNvPr>
-          <p:cNvSpPr>
-            <a:spLocks noGrp="1"/>
-          </p:cNvSpPr>
-          <p:nvPr/>
-        </p:nvSpPr>
-        <p:spPr>
-          <a:xfrm>
-            <a:off x="9391650" y="2886075"/>
-            <a:ext cx="1962150" cy="533400"/>
+            <a:pPr algn="l">
+              <a:buNone/>
+              <a:defRPr sz="1300" b="0">
+                <a:solidFill>
+                  <a:srgbClr val="111827"/>
+                </a:solidFill>
+                <a:latin typeface="Hiragino Sans"/>
+                <a:ea typeface="Hiragino Sans"/>
+                <a:cs typeface="Hiragino Sans"/>
+              </a:defRPr>
+            </a:pPr>
+            <a:r>
+              <a:rPr sz="1300" b="0" dirty="0">
+                <a:solidFill>
+                  <a:srgbClr val="111827"/>
+                </a:solidFill>
+                <a:latin typeface="Hiragino Sans"/>
+                <a:ea typeface="Hiragino Sans"/>
+                <a:cs typeface="Hiragino Sans"/>
+              </a:rPr>
+              <a:t>各説明点で、AとBの確率比を実際に動かしている「本当に重要な特徴」上位5個を</a:t>
+            </a:r>
+          </a:p>
+          <a:p>
+            <a:pPr algn="l">
+              <a:buNone/>
+              <a:defRPr sz="1300" b="0">
+                <a:solidFill>
+                  <a:srgbClr val="111827"/>
+                </a:solidFill>
+                <a:latin typeface="Hiragino Sans"/>
+                <a:ea typeface="Hiragino Sans"/>
+                <a:cs typeface="Hiragino Sans"/>
+              </a:defRPr>
+            </a:pPr>
+            <a:r>
+              <a:rPr sz="1300" b="0" dirty="0">
+                <a:solidFill>
+                  <a:srgbClr val="111827"/>
+                </a:solidFill>
+                <a:latin typeface="Hiragino Sans"/>
+                <a:ea typeface="Hiragino Sans"/>
+                <a:cs typeface="Hiragino Sans"/>
+              </a:rPr>
+              <a:t>あらかじめ数値計算で求めておき、各手法が選んだ上位5特徴と何個一致したかを再現率として測る</a:t>
+            </a:r>
+          </a:p>
+        </p:txBody>
+      </p:sp>
+      <p:sp>
+        <p:nvSpPr>
+          <p:cNvPr id="4" name="テキスト ボックス 3">
+            <a:extLst>
+              <a:ext uri="{FF2B5EF4-FFF2-40B4-BE49-F238E27FC236}">
+                <a16:creationId xmlns:a16="http://schemas.microsoft.com/office/drawing/2014/main" id="{54601608-55ED-9823-0963-4C4CDCE179FD}"/>
+              </a:ext>
+            </a:extLst>
+          </p:cNvPr>
+          <p:cNvSpPr txBox="1"/>
+          <p:nvPr/>
+        </p:nvSpPr>
+        <p:spPr>
+          <a:xfrm>
+            <a:off x="9000001" y="2790850"/>
+            <a:ext cx="3192000" cy="2585323"/>
           </a:xfrm>
           <a:prstGeom prst="rect">
             <a:avLst/>
           </a:prstGeom>
           <a:noFill/>
-          <a:ln w="0">
-            <a:noFill/>
-          </a:ln>
-        </p:spPr>
-        <p:txBody>
-          <a:bodyPr anchor="ctr">
-            <a:normAutofit/>
+        </p:spPr>
+        <p:txBody>
+          <a:bodyPr wrap="square" rtlCol="0">
+            <a:spAutoFit/>
           </a:bodyPr>
           <a:lstStyle/>
           <a:p>
-            <a:pPr algn="ctr">
-              <a:defRPr sz="2025" b="1">
-                <a:solidFill>
-                  <a:srgbClr val="687386"/>
-                </a:solidFill>
-                <a:latin typeface="Hiragino Sans"/>
-                <a:ea typeface="Hiragino Sans"/>
-                <a:cs typeface="Hiragino Sans"/>
-              </a:defRPr>
-            </a:pPr>
-            <a:r>
-              <a:rPr sz="2025" b="1">
-                <a:solidFill>
-                  <a:srgbClr val="687386"/>
-                </a:solidFill>
-                <a:latin typeface="Hiragino Sans"/>
-                <a:ea typeface="Hiragino Sans"/>
-                <a:cs typeface="Hiragino Sans"/>
-              </a:rPr>
-              <a:t>OVR  0.820</a:t>
-            </a:r>
-          </a:p>
-        </p:txBody>
-      </p:sp>
-      <p:sp>
-        <p:nvSpPr>
-          <p:cNvPr id="9" name="角丸四角形 8">
-            <a:extLst>
-              <a:ext uri="{FF2B5EF4-FFF2-40B4-BE49-F238E27FC236}">
-                <a16:creationId xmlns:a16="http://schemas.microsoft.com/office/drawing/2014/main" id="{4D28DE9F-8CA4-4F70-AAD2-3106582FD7A9}"/>
-              </a:ext>
-            </a:extLst>
-          </p:cNvPr>
-          <p:cNvSpPr>
-            <a:spLocks noGrp="1"/>
-          </p:cNvSpPr>
-          <p:nvPr/>
-        </p:nvSpPr>
-        <p:spPr>
-          <a:xfrm>
-            <a:off x="9220200" y="3781425"/>
-            <a:ext cx="2305050" cy="1219200"/>
-          </a:xfrm>
-          <a:prstGeom prst="roundRect">
-            <a:avLst>
-              <a:gd name="adj" fmla="val 6250"/>
-            </a:avLst>
-          </a:prstGeom>
-          <a:solidFill>
-            <a:srgbClr val="EAF4FB"/>
-          </a:solidFill>
-          <a:ln w="0">
-            <a:noFill/>
-          </a:ln>
-        </p:spPr>
-        <p:txBody>
-          <a:bodyPr/>
-          <a:lstStyle/>
-          <a:p>
-            <a:endParaRPr lang="ja-JP" altLang="en-US"/>
-          </a:p>
-        </p:txBody>
-      </p:sp>
-      <p:sp>
-        <p:nvSpPr>
-          <p:cNvPr id="10" name="正方形/長方形 9">
-            <a:extLst>
-              <a:ext uri="{FF2B5EF4-FFF2-40B4-BE49-F238E27FC236}">
-                <a16:creationId xmlns:a16="http://schemas.microsoft.com/office/drawing/2014/main" id="{9582CB9E-AC87-4447-9DEE-52219695FAB9}"/>
-              </a:ext>
-            </a:extLst>
-          </p:cNvPr>
-          <p:cNvSpPr>
-            <a:spLocks noGrp="1"/>
-          </p:cNvSpPr>
-          <p:nvPr/>
-        </p:nvSpPr>
-        <p:spPr>
-          <a:xfrm>
-            <a:off x="9391650" y="3952875"/>
-            <a:ext cx="1962150" cy="838200"/>
-          </a:xfrm>
-          <a:prstGeom prst="rect">
-            <a:avLst/>
-          </a:prstGeom>
-          <a:noFill/>
-          <a:ln w="0">
-            <a:noFill/>
-          </a:ln>
-        </p:spPr>
-        <p:txBody>
-          <a:bodyPr anchor="ctr">
-            <a:normAutofit fontScale="85542"/>
-          </a:bodyPr>
-          <a:lstStyle/>
-          <a:p>
-            <a:pPr algn="ctr">
-              <a:defRPr sz="1500" b="1">
-                <a:solidFill>
-                  <a:srgbClr val="F28C28"/>
-                </a:solidFill>
-                <a:latin typeface="Hiragino Sans"/>
-                <a:ea typeface="Hiragino Sans"/>
-                <a:cs typeface="Hiragino Sans"/>
-              </a:defRPr>
-            </a:pPr>
-            <a:r>
-              <a:rPr sz="1500" b="1">
-                <a:solidFill>
-                  <a:srgbClr val="F28C28"/>
-                </a:solidFill>
-                <a:latin typeface="Hiragino Sans"/>
-                <a:ea typeface="Hiragino Sans"/>
-                <a:cs typeface="Hiragino Sans"/>
-              </a:rPr>
-              <a:t>2クラス通常LIME  0.913</a:t>
-            </a:r>
-          </a:p>
-          <a:p>
-            <a:pPr algn="ctr">
-              <a:defRPr sz="1500" b="1">
-                <a:solidFill>
-                  <a:srgbClr val="F28C28"/>
-                </a:solidFill>
-                <a:latin typeface="Hiragino Sans"/>
-                <a:ea typeface="Hiragino Sans"/>
-                <a:cs typeface="Hiragino Sans"/>
-              </a:defRPr>
-            </a:pPr>
-            <a:r>
-              <a:rPr sz="1500" b="1">
-                <a:solidFill>
-                  <a:srgbClr val="F28C28"/>
-                </a:solidFill>
-                <a:latin typeface="Hiragino Sans"/>
-                <a:ea typeface="Hiragino Sans"/>
-                <a:cs typeface="Hiragino Sans"/>
-              </a:rPr>
-              <a:t>Contrastive  0.926</a:t>
-            </a:r>
-          </a:p>
-        </p:txBody>
-      </p:sp>
-      <p:sp>
-        <p:nvSpPr>
-          <p:cNvPr id="11" name="角丸四角形 10">
-            <a:extLst>
-              <a:ext uri="{FF2B5EF4-FFF2-40B4-BE49-F238E27FC236}">
-                <a16:creationId xmlns:a16="http://schemas.microsoft.com/office/drawing/2014/main" id="{E5FFD85C-C62F-4D75-9A3D-748A7CB033A2}"/>
-              </a:ext>
-            </a:extLst>
-          </p:cNvPr>
-          <p:cNvSpPr>
-            <a:spLocks noGrp="1"/>
-          </p:cNvSpPr>
-          <p:nvPr/>
-        </p:nvSpPr>
-        <p:spPr>
-          <a:xfrm>
-            <a:off x="9220200" y="5191125"/>
-            <a:ext cx="2305050" cy="1266825"/>
-          </a:xfrm>
-          <a:prstGeom prst="roundRect">
-            <a:avLst>
-              <a:gd name="adj" fmla="val 6015"/>
-            </a:avLst>
-          </a:prstGeom>
-          <a:solidFill>
-            <a:srgbClr val="FFF4D6"/>
-          </a:solidFill>
-          <a:ln w="0">
-            <a:noFill/>
-          </a:ln>
-        </p:spPr>
-        <p:txBody>
-          <a:bodyPr/>
-          <a:lstStyle/>
-          <a:p>
-            <a:endParaRPr lang="ja-JP" altLang="en-US"/>
-          </a:p>
-        </p:txBody>
-      </p:sp>
-      <p:sp>
-        <p:nvSpPr>
-          <p:cNvPr id="12" name="正方形/長方形 11">
-            <a:extLst>
-              <a:ext uri="{FF2B5EF4-FFF2-40B4-BE49-F238E27FC236}">
-                <a16:creationId xmlns:a16="http://schemas.microsoft.com/office/drawing/2014/main" id="{160B63F0-6EB7-4201-8645-0857765B54AF}"/>
-              </a:ext>
-            </a:extLst>
-          </p:cNvPr>
-          <p:cNvSpPr>
-            <a:spLocks noGrp="1"/>
-          </p:cNvSpPr>
-          <p:nvPr/>
-        </p:nvSpPr>
-        <p:spPr>
-          <a:xfrm>
-            <a:off x="9391650" y="5381625"/>
-            <a:ext cx="1962150" cy="685800"/>
-          </a:xfrm>
-          <a:prstGeom prst="rect">
-            <a:avLst/>
-          </a:prstGeom>
-          <a:noFill/>
-          <a:ln w="0">
-            <a:noFill/>
-          </a:ln>
-        </p:spPr>
-        <p:txBody>
-          <a:bodyPr anchor="ctr">
-            <a:normAutofit fontScale="98728" lnSpcReduction="10000"/>
-          </a:bodyPr>
-          <a:lstStyle/>
-          <a:p>
-            <a:pPr algn="ctr">
-              <a:defRPr sz="1425" b="1">
-                <a:solidFill>
-                  <a:srgbClr val="2AA876"/>
-                </a:solidFill>
-                <a:latin typeface="Hiragino Sans"/>
-                <a:ea typeface="Hiragino Sans"/>
-                <a:cs typeface="Hiragino Sans"/>
-              </a:defRPr>
-            </a:pPr>
-            <a:r>
-              <a:rPr sz="1425" b="1">
-                <a:solidFill>
-                  <a:srgbClr val="2AA876"/>
-                </a:solidFill>
-                <a:latin typeface="Hiragino Sans"/>
-                <a:ea typeface="Hiragino Sans"/>
-                <a:cs typeface="Hiragino Sans"/>
-              </a:rPr>
-              <a:t>両方式とも</a:t>
-            </a:r>
-          </a:p>
-          <a:p>
-            <a:pPr algn="ctr">
-              <a:defRPr sz="1425" b="1">
-                <a:solidFill>
-                  <a:srgbClr val="2AA876"/>
-                </a:solidFill>
-                <a:latin typeface="Hiragino Sans"/>
-                <a:ea typeface="Hiragino Sans"/>
-                <a:cs typeface="Hiragino Sans"/>
-              </a:defRPr>
-            </a:pPr>
-            <a:r>
-              <a:rPr sz="1425" b="1">
-                <a:solidFill>
-                  <a:srgbClr val="2AA876"/>
-                </a:solidFill>
-                <a:latin typeface="Hiragino Sans"/>
-                <a:ea typeface="Hiragino Sans"/>
-                <a:cs typeface="Hiragino Sans"/>
-              </a:rPr>
-              <a:t>OVRより全6条件で有意</a:t>
-            </a:r>
-          </a:p>
-        </p:txBody>
-      </p:sp>
-      <p:sp>
-        <p:nvSpPr>
-          <p:cNvPr id="13" name="正方形/長方形 12">
-            <a:extLst>
-              <a:ext uri="{FF2B5EF4-FFF2-40B4-BE49-F238E27FC236}">
-                <a16:creationId xmlns:a16="http://schemas.microsoft.com/office/drawing/2014/main" id="{E4BF0BB5-2941-4149-965F-BCAE15CECAFC}"/>
-              </a:ext>
-            </a:extLst>
-          </p:cNvPr>
-          <p:cNvSpPr>
-            <a:spLocks noGrp="1"/>
-          </p:cNvSpPr>
-          <p:nvPr/>
-        </p:nvSpPr>
-        <p:spPr>
-          <a:xfrm>
-            <a:off x="9391650" y="6105525"/>
-            <a:ext cx="1962150" cy="219075"/>
-          </a:xfrm>
-          <a:prstGeom prst="rect">
-            <a:avLst/>
-          </a:prstGeom>
-          <a:noFill/>
-          <a:ln w="0">
-            <a:noFill/>
-          </a:ln>
-        </p:spPr>
-        <p:txBody>
-          <a:bodyPr anchor="ctr">
-            <a:normAutofit fontScale="87262" lnSpcReduction="10000"/>
-          </a:bodyPr>
-          <a:lstStyle/>
-          <a:p>
-            <a:pPr algn="ctr">
-              <a:defRPr sz="1050" b="0">
-                <a:solidFill>
-                  <a:srgbClr val="687386"/>
-                </a:solidFill>
-                <a:latin typeface="Hiragino Sans"/>
-                <a:ea typeface="Hiragino Sans"/>
-                <a:cs typeface="Hiragino Sans"/>
-              </a:defRPr>
-            </a:pPr>
-            <a:r>
-              <a:rPr sz="1050" b="0">
-                <a:solidFill>
-                  <a:srgbClr val="687386"/>
-                </a:solidFill>
-                <a:latin typeface="Hiragino Sans"/>
-                <a:ea typeface="Hiragino Sans"/>
-                <a:cs typeface="Hiragino Sans"/>
-              </a:rPr>
-              <a:t>Holm補正後</a:t>
-            </a:r>
+            <a:r>
+              <a:rPr lang="ja-JP" altLang="ja-JP"/>
+              <a:t>OVRは「A対それ以外全部」の</a:t>
+            </a:r>
+          </a:p>
+          <a:p>
+            <a:r>
+              <a:rPr lang="ja-JP" altLang="ja-JP"/>
+              <a:t>確率を回帰するため、AとBを分ける特徴が他クラスの情報に埋もれやすい</a:t>
+            </a:r>
+            <a:endParaRPr lang="en-US" altLang="ja-JP" dirty="0"/>
+          </a:p>
+          <a:p>
+            <a:r>
+              <a:rPr lang="ja-JP" altLang="ja-JP"/>
+              <a:t>2クラスに絞ると、AB間の違いに直接効く特徴だけが残りやすくなる。</a:t>
+            </a:r>
+          </a:p>
+          <a:p>
+            <a:endParaRPr kumimoji="1" lang="ja-JP" altLang="en-US"/>
           </a:p>
         </p:txBody>
       </p:sp>
@@ -19816,63 +19847,16 @@
       </p:pic>
       <p:sp>
         <p:nvSpPr>
-          <p:cNvPr id="6" name="角丸四角形 5">
-            <a:extLst>
-              <a:ext uri="{FF2B5EF4-FFF2-40B4-BE49-F238E27FC236}">
-                <a16:creationId xmlns:a16="http://schemas.microsoft.com/office/drawing/2014/main" id="{A1680A8C-917F-49BA-9194-1A2AF8480FF1}"/>
-              </a:ext>
-            </a:extLst>
-          </p:cNvPr>
-          <p:cNvSpPr>
-            <a:spLocks noGrp="1"/>
-          </p:cNvSpPr>
-          <p:nvPr/>
-        </p:nvSpPr>
-        <p:spPr>
-          <a:xfrm>
-            <a:off x="9210675" y="2419350"/>
-            <a:ext cx="2305050" cy="1162050"/>
-          </a:xfrm>
-          <a:prstGeom prst="roundRect">
-            <a:avLst>
-              <a:gd name="adj" fmla="val 6557"/>
-            </a:avLst>
-          </a:prstGeom>
-          <a:solidFill>
-            <a:srgbClr val="F7F9FC"/>
-          </a:solidFill>
-          <a:ln w="9525">
-            <a:solidFill>
-              <a:srgbClr val="E7EBF0"/>
-            </a:solidFill>
-          </a:ln>
-        </p:spPr>
-        <p:txBody>
-          <a:bodyPr/>
-          <a:lstStyle/>
-          <a:p>
-            <a:endParaRPr lang="ja-JP" altLang="en-US"/>
-          </a:p>
-        </p:txBody>
-      </p:sp>
-      <p:sp>
-        <p:nvSpPr>
-          <p:cNvPr id="7" name="正方形/長方形 6">
-            <a:extLst>
-              <a:ext uri="{FF2B5EF4-FFF2-40B4-BE49-F238E27FC236}">
-                <a16:creationId xmlns:a16="http://schemas.microsoft.com/office/drawing/2014/main" id="{A32D2F38-BC99-464A-8C1E-2E45CA143A3C}"/>
-              </a:ext>
-            </a:extLst>
-          </p:cNvPr>
-          <p:cNvSpPr>
-            <a:spLocks noGrp="1"/>
-          </p:cNvSpPr>
-          <p:nvPr/>
-        </p:nvSpPr>
-        <p:spPr>
-          <a:xfrm>
-            <a:off x="9382125" y="2533650"/>
-            <a:ext cx="1962150" cy="266700"/>
+          <p:cNvPr id="951" name="metric-explain-text"/>
+          <p:cNvSpPr>
+            <a:spLocks noGrp="1"/>
+          </p:cNvSpPr>
+          <p:nvPr/>
+        </p:nvSpPr>
+        <p:spPr>
+          <a:xfrm>
+            <a:off x="950000" y="1250000"/>
+            <a:ext cx="7800000" cy="515738"/>
           </a:xfrm>
           <a:prstGeom prst="rect">
             <a:avLst/>
@@ -19880,333 +19864,86 @@
           <a:noFill/>
           <a:ln w="0">
             <a:noFill/>
-          </a:ln>
-        </p:spPr>
-        <p:txBody>
-          <a:bodyPr anchor="ctr">
-            <a:normAutofit fontScale="85185"/>
+            <a:prstDash val="solid"/>
+          </a:ln>
+        </p:spPr>
+        <p:txBody>
+          <a:bodyPr lIns="0" tIns="0" rIns="0" bIns="0" anchor="t">
+            <a:noAutofit/>
           </a:bodyPr>
           <a:lstStyle/>
           <a:p>
-            <a:pPr algn="ctr">
-              <a:defRPr sz="1350" b="1">
-                <a:solidFill>
-                  <a:srgbClr val="687386"/>
-                </a:solidFill>
-                <a:latin typeface="Hiragino Sans"/>
-                <a:ea typeface="Hiragino Sans"/>
-                <a:cs typeface="Hiragino Sans"/>
-              </a:defRPr>
-            </a:pPr>
-            <a:r>
-              <a:rPr sz="1350" b="1">
-                <a:solidFill>
-                  <a:srgbClr val="687386"/>
-                </a:solidFill>
-                <a:latin typeface="Hiragino Sans"/>
-                <a:ea typeface="Hiragino Sans"/>
-                <a:cs typeface="Hiragino Sans"/>
-              </a:rPr>
-              <a:t>全条件平均</a:t>
-            </a:r>
-          </a:p>
-        </p:txBody>
-      </p:sp>
-      <p:sp>
-        <p:nvSpPr>
-          <p:cNvPr id="8" name="正方形/長方形 7">
-            <a:extLst>
-              <a:ext uri="{FF2B5EF4-FFF2-40B4-BE49-F238E27FC236}">
-                <a16:creationId xmlns:a16="http://schemas.microsoft.com/office/drawing/2014/main" id="{DCCC3293-52D1-49FF-B093-0C4DE2F11D96}"/>
-              </a:ext>
-            </a:extLst>
-          </p:cNvPr>
-          <p:cNvSpPr>
-            <a:spLocks noGrp="1"/>
-          </p:cNvSpPr>
-          <p:nvPr/>
-        </p:nvSpPr>
-        <p:spPr>
-          <a:xfrm>
-            <a:off x="9382125" y="2876550"/>
-            <a:ext cx="1962150" cy="533400"/>
-          </a:xfrm>
-          <a:prstGeom prst="rect">
-            <a:avLst/>
-          </a:prstGeom>
-          <a:noFill/>
-          <a:ln w="0">
-            <a:noFill/>
-          </a:ln>
-        </p:spPr>
-        <p:txBody>
-          <a:bodyPr anchor="ctr">
-            <a:normAutofit/>
-          </a:bodyPr>
-          <a:lstStyle/>
-          <a:p>
-            <a:pPr algn="ctr">
-              <a:defRPr sz="2025" b="1">
-                <a:solidFill>
-                  <a:srgbClr val="687386"/>
-                </a:solidFill>
-                <a:latin typeface="Hiragino Sans"/>
-                <a:ea typeface="Hiragino Sans"/>
-                <a:cs typeface="Hiragino Sans"/>
-              </a:defRPr>
-            </a:pPr>
-            <a:r>
-              <a:rPr sz="2025" b="1">
-                <a:solidFill>
-                  <a:srgbClr val="687386"/>
-                </a:solidFill>
-                <a:latin typeface="Hiragino Sans"/>
-                <a:ea typeface="Hiragino Sans"/>
-                <a:cs typeface="Hiragino Sans"/>
-              </a:rPr>
-              <a:t>OVR  0.887</a:t>
-            </a:r>
-          </a:p>
-        </p:txBody>
-      </p:sp>
-      <p:sp>
-        <p:nvSpPr>
-          <p:cNvPr id="9" name="角丸四角形 8">
-            <a:extLst>
-              <a:ext uri="{FF2B5EF4-FFF2-40B4-BE49-F238E27FC236}">
-                <a16:creationId xmlns:a16="http://schemas.microsoft.com/office/drawing/2014/main" id="{1384D89E-BA46-4CB5-B3F4-EF5BB3B0490E}"/>
-              </a:ext>
-            </a:extLst>
-          </p:cNvPr>
-          <p:cNvSpPr>
-            <a:spLocks noGrp="1"/>
-          </p:cNvSpPr>
-          <p:nvPr/>
-        </p:nvSpPr>
-        <p:spPr>
-          <a:xfrm>
-            <a:off x="9210675" y="3771900"/>
-            <a:ext cx="2305050" cy="1219200"/>
-          </a:xfrm>
-          <a:prstGeom prst="roundRect">
-            <a:avLst>
-              <a:gd name="adj" fmla="val 6250"/>
-            </a:avLst>
-          </a:prstGeom>
-          <a:solidFill>
-            <a:srgbClr val="EAF4FB"/>
-          </a:solidFill>
-          <a:ln w="0">
-            <a:noFill/>
-          </a:ln>
-        </p:spPr>
-        <p:txBody>
-          <a:bodyPr/>
-          <a:lstStyle/>
-          <a:p>
-            <a:endParaRPr lang="ja-JP" altLang="en-US"/>
-          </a:p>
-        </p:txBody>
-      </p:sp>
-      <p:sp>
-        <p:nvSpPr>
-          <p:cNvPr id="10" name="正方形/長方形 9">
-            <a:extLst>
-              <a:ext uri="{FF2B5EF4-FFF2-40B4-BE49-F238E27FC236}">
-                <a16:creationId xmlns:a16="http://schemas.microsoft.com/office/drawing/2014/main" id="{0769DAC5-5E57-43A6-A795-EC7D92312F33}"/>
-              </a:ext>
-            </a:extLst>
-          </p:cNvPr>
-          <p:cNvSpPr>
-            <a:spLocks noGrp="1"/>
-          </p:cNvSpPr>
-          <p:nvPr/>
-        </p:nvSpPr>
-        <p:spPr>
-          <a:xfrm>
-            <a:off x="9382125" y="3943350"/>
-            <a:ext cx="1962150" cy="838200"/>
-          </a:xfrm>
-          <a:prstGeom prst="rect">
-            <a:avLst/>
-          </a:prstGeom>
-          <a:noFill/>
-          <a:ln w="0">
-            <a:noFill/>
-          </a:ln>
-        </p:spPr>
-        <p:txBody>
-          <a:bodyPr anchor="ctr">
-            <a:normAutofit fontScale="85542"/>
-          </a:bodyPr>
-          <a:lstStyle/>
-          <a:p>
-            <a:pPr algn="ctr">
-              <a:defRPr sz="1500" b="1">
-                <a:solidFill>
-                  <a:srgbClr val="F28C28"/>
-                </a:solidFill>
-                <a:latin typeface="Hiragino Sans"/>
-                <a:ea typeface="Hiragino Sans"/>
-                <a:cs typeface="Hiragino Sans"/>
-              </a:defRPr>
-            </a:pPr>
-            <a:r>
-              <a:rPr sz="1500" b="1">
-                <a:solidFill>
-                  <a:srgbClr val="F28C28"/>
-                </a:solidFill>
-                <a:latin typeface="Hiragino Sans"/>
-                <a:ea typeface="Hiragino Sans"/>
-                <a:cs typeface="Hiragino Sans"/>
-              </a:rPr>
-              <a:t>2クラス通常LIME  0.898</a:t>
-            </a:r>
-          </a:p>
-          <a:p>
-            <a:pPr algn="ctr">
-              <a:defRPr sz="1500" b="1">
-                <a:solidFill>
-                  <a:srgbClr val="F28C28"/>
-                </a:solidFill>
-                <a:latin typeface="Hiragino Sans"/>
-                <a:ea typeface="Hiragino Sans"/>
-                <a:cs typeface="Hiragino Sans"/>
-              </a:defRPr>
-            </a:pPr>
-            <a:r>
-              <a:rPr sz="1500" b="1">
-                <a:solidFill>
-                  <a:srgbClr val="F28C28"/>
-                </a:solidFill>
-                <a:latin typeface="Hiragino Sans"/>
-                <a:ea typeface="Hiragino Sans"/>
-                <a:cs typeface="Hiragino Sans"/>
-              </a:rPr>
-              <a:t>Contrastive  0.901</a:t>
-            </a:r>
-          </a:p>
-        </p:txBody>
-      </p:sp>
-      <p:sp>
-        <p:nvSpPr>
-          <p:cNvPr id="11" name="角丸四角形 10">
-            <a:extLst>
-              <a:ext uri="{FF2B5EF4-FFF2-40B4-BE49-F238E27FC236}">
-                <a16:creationId xmlns:a16="http://schemas.microsoft.com/office/drawing/2014/main" id="{2D37DFB8-5DCB-40A9-BEAD-598D75295A61}"/>
-              </a:ext>
-            </a:extLst>
-          </p:cNvPr>
-          <p:cNvSpPr>
-            <a:spLocks noGrp="1"/>
-          </p:cNvSpPr>
-          <p:nvPr/>
-        </p:nvSpPr>
-        <p:spPr>
-          <a:xfrm>
-            <a:off x="9210675" y="5181600"/>
-            <a:ext cx="2305050" cy="1266825"/>
-          </a:xfrm>
-          <a:prstGeom prst="roundRect">
-            <a:avLst>
-              <a:gd name="adj" fmla="val 6015"/>
-            </a:avLst>
-          </a:prstGeom>
-          <a:solidFill>
-            <a:srgbClr val="FFF4D6"/>
-          </a:solidFill>
-          <a:ln w="0">
-            <a:noFill/>
-          </a:ln>
-        </p:spPr>
-        <p:txBody>
-          <a:bodyPr/>
-          <a:lstStyle/>
-          <a:p>
-            <a:endParaRPr lang="ja-JP" altLang="en-US"/>
-          </a:p>
-        </p:txBody>
-      </p:sp>
-      <p:sp>
-        <p:nvSpPr>
-          <p:cNvPr id="12" name="正方形/長方形 11">
-            <a:extLst>
-              <a:ext uri="{FF2B5EF4-FFF2-40B4-BE49-F238E27FC236}">
-                <a16:creationId xmlns:a16="http://schemas.microsoft.com/office/drawing/2014/main" id="{BBFB2DF5-FE5E-4201-B094-28585033CA2E}"/>
-              </a:ext>
-            </a:extLst>
-          </p:cNvPr>
-          <p:cNvSpPr>
-            <a:spLocks noGrp="1"/>
-          </p:cNvSpPr>
-          <p:nvPr/>
-        </p:nvSpPr>
-        <p:spPr>
-          <a:xfrm>
-            <a:off x="9382125" y="5372100"/>
-            <a:ext cx="1962150" cy="685800"/>
-          </a:xfrm>
-          <a:prstGeom prst="rect">
-            <a:avLst/>
-          </a:prstGeom>
-          <a:noFill/>
-          <a:ln w="0">
-            <a:noFill/>
-          </a:ln>
-        </p:spPr>
-        <p:txBody>
-          <a:bodyPr anchor="ctr">
-            <a:normAutofit/>
-          </a:bodyPr>
-          <a:lstStyle/>
-          <a:p>
-            <a:pPr algn="ctr">
-              <a:defRPr sz="1575" b="1">
-                <a:solidFill>
-                  <a:srgbClr val="F28C28"/>
-                </a:solidFill>
-                <a:latin typeface="Hiragino Sans"/>
-                <a:ea typeface="Hiragino Sans"/>
-                <a:cs typeface="Hiragino Sans"/>
-              </a:defRPr>
-            </a:pPr>
-            <a:r>
-              <a:rPr sz="1575" b="1" dirty="0">
-                <a:solidFill>
-                  <a:srgbClr val="F28C28"/>
-                </a:solidFill>
-                <a:latin typeface="Hiragino Sans"/>
-                <a:ea typeface="Hiragino Sans"/>
-                <a:cs typeface="Hiragino Sans"/>
-              </a:rPr>
-              <a:t>改善は約1ポイント</a:t>
-            </a:r>
-          </a:p>
-          <a:p>
-            <a:pPr algn="ctr">
-              <a:defRPr sz="1575" b="1">
-                <a:solidFill>
-                  <a:srgbClr val="F28C28"/>
-                </a:solidFill>
-                <a:latin typeface="Hiragino Sans"/>
-                <a:ea typeface="Hiragino Sans"/>
-                <a:cs typeface="Hiragino Sans"/>
-              </a:defRPr>
-            </a:pPr>
-            <a:r>
-              <a:rPr sz="1575" b="1" dirty="0" err="1">
-                <a:solidFill>
-                  <a:srgbClr val="F28C28"/>
-                </a:solidFill>
-                <a:latin typeface="Hiragino Sans"/>
-                <a:ea typeface="Hiragino Sans"/>
-                <a:cs typeface="Hiragino Sans"/>
-              </a:rPr>
-              <a:t>大差ではない</a:t>
-            </a:r>
-            <a:endParaRPr sz="1575" b="1" dirty="0">
+            <a:pPr algn="l">
+              <a:buNone/>
+              <a:defRPr sz="1300" b="0">
+                <a:solidFill>
+                  <a:srgbClr val="111827"/>
+                </a:solidFill>
+                <a:latin typeface="Hiragino Sans"/>
+                <a:ea typeface="Hiragino Sans"/>
+                <a:cs typeface="Hiragino Sans"/>
+              </a:defRPr>
+            </a:pPr>
+            <a:r>
+              <a:rPr sz="1300" b="0">
+                <a:solidFill>
+                  <a:srgbClr val="111827"/>
+                </a:solidFill>
+                <a:latin typeface="Hiragino Sans"/>
+                <a:ea typeface="Hiragino Sans"/>
+                <a:cs typeface="Hiragino Sans"/>
+              </a:rPr>
+              <a:t>学習には使っていない未知の摂動点</a:t>
+            </a:r>
+            <a:r>
+              <a:rPr sz="1300" b="0" dirty="0">
+                <a:solidFill>
+                  <a:srgbClr val="111827"/>
+                </a:solidFill>
+                <a:latin typeface="Hiragino Sans"/>
+                <a:ea typeface="Hiragino Sans"/>
+                <a:cs typeface="Hiragino Sans"/>
+              </a:rPr>
+              <a:t>400個を用意し、各手法の説明が</a:t>
+            </a:r>
+          </a:p>
+          <a:p>
+            <a:pPr algn="l">
+              <a:buNone/>
+              <a:defRPr sz="1300" b="0">
+                <a:solidFill>
+                  <a:srgbClr val="111827"/>
+                </a:solidFill>
+                <a:latin typeface="Hiragino Sans"/>
+                <a:ea typeface="Hiragino Sans"/>
+                <a:cs typeface="Hiragino Sans"/>
+              </a:defRPr>
+            </a:pPr>
+            <a:r>
+              <a:rPr sz="1300" b="0" dirty="0">
+                <a:solidFill>
+                  <a:srgbClr val="111827"/>
+                </a:solidFill>
+                <a:latin typeface="Hiragino Sans"/>
+                <a:ea typeface="Hiragino Sans"/>
+                <a:cs typeface="Hiragino Sans"/>
+              </a:rPr>
+              <a:t>「</a:t>
+            </a:r>
+            <a:r>
+              <a:rPr sz="1300" b="0" dirty="0" err="1">
+                <a:solidFill>
+                  <a:srgbClr val="111827"/>
+                </a:solidFill>
+                <a:latin typeface="Hiragino Sans"/>
+                <a:ea typeface="Hiragino Sans"/>
+                <a:cs typeface="Hiragino Sans"/>
+              </a:rPr>
+              <a:t>AとBどちらが優勢か」をブラックボックスの実際の判定とどれだけ一致させられるかを測る</a:t>
+            </a:r>
+            <a:endParaRPr sz="1300" b="0" dirty="0">
               <a:solidFill>
-                <a:srgbClr val="F28C28"/>
+                <a:srgbClr val="111827"/>
               </a:solidFill>
               <a:latin typeface="Hiragino Sans"/>
               <a:ea typeface="Hiragino Sans"/>
@@ -20217,57 +19954,81 @@
       </p:sp>
       <p:sp>
         <p:nvSpPr>
-          <p:cNvPr id="13" name="正方形/長方形 12">
-            <a:extLst>
-              <a:ext uri="{FF2B5EF4-FFF2-40B4-BE49-F238E27FC236}">
-                <a16:creationId xmlns:a16="http://schemas.microsoft.com/office/drawing/2014/main" id="{86D4E878-E694-41BD-83C9-0A7DBCAABC34}"/>
-              </a:ext>
-            </a:extLst>
-          </p:cNvPr>
-          <p:cNvSpPr>
-            <a:spLocks noGrp="1"/>
-          </p:cNvSpPr>
-          <p:nvPr/>
-        </p:nvSpPr>
-        <p:spPr>
-          <a:xfrm>
-            <a:off x="9382125" y="6096000"/>
-            <a:ext cx="1962150" cy="219075"/>
+          <p:cNvPr id="5" name="テキスト ボックス 4">
+            <a:extLst>
+              <a:ext uri="{FF2B5EF4-FFF2-40B4-BE49-F238E27FC236}">
+                <a16:creationId xmlns:a16="http://schemas.microsoft.com/office/drawing/2014/main" id="{4ADDCAF3-6289-3CF2-B92B-D87C2A71A8F3}"/>
+              </a:ext>
+            </a:extLst>
+          </p:cNvPr>
+          <p:cNvSpPr txBox="1"/>
+          <p:nvPr/>
+        </p:nvSpPr>
+        <p:spPr>
+          <a:xfrm>
+            <a:off x="8907657" y="3221436"/>
+            <a:ext cx="3284344" cy="2308324"/>
           </a:xfrm>
           <a:prstGeom prst="rect">
             <a:avLst/>
           </a:prstGeom>
           <a:noFill/>
-          <a:ln w="0">
-            <a:noFill/>
-          </a:ln>
-        </p:spPr>
-        <p:txBody>
-          <a:bodyPr anchor="ctr">
-            <a:normAutofit fontScale="87262" lnSpcReduction="10000"/>
+        </p:spPr>
+        <p:txBody>
+          <a:bodyPr wrap="square">
+            <a:spAutoFit/>
           </a:bodyPr>
           <a:lstStyle/>
           <a:p>
-            <a:pPr algn="ctr">
-              <a:defRPr sz="1050" b="0">
-                <a:solidFill>
-                  <a:srgbClr val="2AA876"/>
-                </a:solidFill>
-                <a:latin typeface="Hiragino Sans"/>
-                <a:ea typeface="Hiragino Sans"/>
-                <a:cs typeface="Hiragino Sans"/>
-              </a:defRPr>
-            </a:pPr>
-            <a:r>
-              <a:rPr sz="1050" b="0">
-                <a:solidFill>
-                  <a:srgbClr val="2AA876"/>
-                </a:solidFill>
-                <a:latin typeface="Hiragino Sans"/>
-                <a:ea typeface="Hiragino Sans"/>
-                <a:cs typeface="Hiragino Sans"/>
-              </a:rPr>
-              <a:t>両方式とも6/6条件で有意</a:t>
+            <a:pPr>
+              <a:buNone/>
+            </a:pPr>
+            <a:r>
+              <a:rPr lang="ja-JP" altLang="ja-JP">
+                <a:solidFill>
+                  <a:srgbClr val="333A45"/>
+                </a:solidFill>
+                <a:effectLst/>
+                <a:latin typeface="Helvetica" pitchFamily="2" charset="0"/>
+              </a:rPr>
+              <a:t>学習に使った摂動点だけで良い結果が出ても、過学習の可能性が残る。 </a:t>
+            </a:r>
+            <a:endParaRPr lang="en-US" altLang="ja-JP" dirty="0">
+              <a:solidFill>
+                <a:srgbClr val="333A45"/>
+              </a:solidFill>
+              <a:effectLst/>
+              <a:latin typeface="Helvetica" pitchFamily="2" charset="0"/>
+            </a:endParaRPr>
+          </a:p>
+          <a:p>
+            <a:pPr>
+              <a:buNone/>
+            </a:pPr>
+            <a:r>
+              <a:rPr lang="ja-JP" altLang="ja-JP">
+                <a:solidFill>
+                  <a:srgbClr val="333A45"/>
+                </a:solidFill>
+                <a:effectLst/>
+                <a:latin typeface="Helvetica" pitchFamily="2" charset="0"/>
+              </a:rPr>
+              <a:t>未知の400点で改めて評価することで、結果1の関連性の改善が精度の犠牲の上に成り立っていないかを</a:t>
+            </a:r>
+          </a:p>
+          <a:p>
+            <a:pPr>
+              <a:buNone/>
+            </a:pPr>
+            <a:r>
+              <a:rPr lang="ja-JP" altLang="ja-JP">
+                <a:solidFill>
+                  <a:srgbClr val="333A45"/>
+                </a:solidFill>
+                <a:effectLst/>
+                <a:latin typeface="Helvetica" pitchFamily="2" charset="0"/>
+              </a:rPr>
+              <a:t>確認している</a:t>
             </a:r>
           </a:p>
         </p:txBody>
@@ -21244,7 +21005,7 @@
                 <a:ea typeface="Hiragino Sans"/>
                 <a:cs typeface="Hiragino Sans"/>
               </a:rPr>
-              <a:t>結果のまとめ</a:t>
+              <a:t>まとめと今後の展望</a:t>
             </a:r>
           </a:p>
         </p:txBody>
@@ -21301,7 +21062,7 @@
                 <a:ea typeface="Hiragino Sans"/>
                 <a:cs typeface="Hiragino Sans"/>
               </a:rPr>
-              <a:t>本編では、提案の価値を最も明確に示す3つの結果に絞る</a:t>
+              <a:t>本編で示した価値を3点に絞って振り返り、残る課題を示す</a:t>
             </a:r>
           </a:p>
         </p:txBody>
@@ -21431,7 +21192,7 @@
         </p:spPr>
         <p:txBody>
           <a:bodyPr anchor="ctr">
-            <a:normAutofit fontScale="84859" lnSpcReduction="10000"/>
+            <a:normAutofit fontScale="77359" lnSpcReduction="20000"/>
           </a:bodyPr>
           <a:lstStyle/>
           <a:p>
@@ -21454,7 +21215,7 @@
                 <a:ea typeface="Hiragino Sans"/>
                 <a:cs typeface="Hiragino Sans"/>
               </a:rPr>
-              <a:t>真のTop-5を約10pt多く回収</a:t>
+              <a:t>「AとBの違い」を直接説明できる</a:t>
             </a:r>
           </a:p>
         </p:txBody>
@@ -21584,7 +21345,7 @@
         </p:spPr>
         <p:txBody>
           <a:bodyPr anchor="ctr">
-            <a:normAutofit/>
+            <a:normAutofit fontScale="85000" lnSpcReduction="10000"/>
           </a:bodyPr>
           <a:lstStyle/>
           <a:p>
@@ -21607,7 +21368,7 @@
                 <a:ea typeface="Hiragino Sans"/>
                 <a:cs typeface="Hiragino Sans"/>
               </a:rPr>
-              <a:t>改善は約1ポイント</a:t>
+              <a:t>従来(OVR)より精度は落ちない</a:t>
             </a:r>
           </a:p>
         </p:txBody>
@@ -21762,6 +21523,100 @@
               </a:rPr>
               <a:t>クラス数に対してほぼ一定</a:t>
             </a:r>
+          </a:p>
+        </p:txBody>
+      </p:sp>
+      <p:sp>
+        <p:nvSpPr>
+          <p:cNvPr id="4" name="テキスト ボックス 3">
+            <a:extLst>
+              <a:ext uri="{FF2B5EF4-FFF2-40B4-BE49-F238E27FC236}">
+                <a16:creationId xmlns:a16="http://schemas.microsoft.com/office/drawing/2014/main" id="{C5DF47A2-1815-E701-433E-77936CB77D78}"/>
+              </a:ext>
+            </a:extLst>
+          </p:cNvPr>
+          <p:cNvSpPr txBox="1"/>
+          <p:nvPr/>
+        </p:nvSpPr>
+        <p:spPr>
+          <a:xfrm>
+            <a:off x="5848350" y="1882764"/>
+            <a:ext cx="6270078" cy="3416320"/>
+          </a:xfrm>
+          <a:prstGeom prst="rect">
+            <a:avLst/>
+          </a:prstGeom>
+          <a:noFill/>
+        </p:spPr>
+        <p:txBody>
+          <a:bodyPr wrap="square" rtlCol="0">
+            <a:spAutoFit/>
+          </a:bodyPr>
+          <a:lstStyle/>
+          <a:p>
+            <a:r>
+              <a:rPr lang="en-US" altLang="ja-JP" dirty="0"/>
+              <a:t>1.</a:t>
+            </a:r>
+            <a:r>
+              <a:rPr lang="ja-JP" altLang="ja-JP"/>
+              <a:t>今後の展望</a:t>
+            </a:r>
+          </a:p>
+          <a:p>
+            <a:r>
+              <a:rPr lang="ja-JP" altLang="ja-JP" sz="1400"/>
+              <a:t>解釈性の向上を定量的に測る方法の検討</a:t>
+            </a:r>
+          </a:p>
+          <a:p>
+            <a:r>
+              <a:rPr lang="ja-JP" altLang="ja-JP" sz="1400"/>
+              <a:t>既知の真値への関連性は測れたが、実際に人が説明を見て理解しやすいと感じるかは未検証。ユーザー評価などが必要</a:t>
+            </a:r>
+            <a:endParaRPr lang="en-US" altLang="ja-JP" sz="1400" dirty="0"/>
+          </a:p>
+          <a:p>
+            <a:endParaRPr lang="ja-JP" altLang="ja-JP" sz="1400"/>
+          </a:p>
+          <a:p>
+            <a:r>
+              <a:rPr lang="en-US" altLang="ja-JP" dirty="0"/>
+              <a:t>2.</a:t>
+            </a:r>
+            <a:r>
+              <a:rPr lang="ja-JP" altLang="ja-JP"/>
+              <a:t>実データでの検証</a:t>
+            </a:r>
+          </a:p>
+          <a:p>
+            <a:r>
+              <a:rPr lang="ja-JP" altLang="ja-JP" sz="1400"/>
+              <a:t>今回はすべて人工的に生成したデータ。実際のデータセットでも同じ傾向が出るかを確認する</a:t>
+            </a:r>
+            <a:endParaRPr lang="en-US" altLang="ja-JP" sz="1400" dirty="0"/>
+          </a:p>
+          <a:p>
+            <a:endParaRPr lang="ja-JP" altLang="ja-JP" sz="1400"/>
+          </a:p>
+          <a:p>
+            <a:r>
+              <a:rPr lang="en-US" altLang="ja-JP" dirty="0"/>
+              <a:t>3.</a:t>
+            </a:r>
+            <a:r>
+              <a:rPr lang="ja-JP" altLang="ja-JP"/>
+              <a:t>競合クラスがTop-2以外や入力ごとに変わる場合への対応</a:t>
+            </a:r>
+          </a:p>
+          <a:p>
+            <a:r>
+              <a:rPr lang="ja-JP" altLang="ja-JP" sz="1400"/>
+              <a:t>今回は予測1位・2位を固定して比較した。3位以下との比較や、入力によって競合クラスが変わる場合は未検証</a:t>
+            </a:r>
+          </a:p>
+          <a:p>
+            <a:endParaRPr kumimoji="1" lang="ja-JP" altLang="en-US"/>
           </a:p>
         </p:txBody>
       </p:sp>
